--- a/assets/libreoffice_impr_njc/ff469fdc-409b-4ed4-a544-46cb1dfb24c2/The Golden Age of Arcade Games.pptx
+++ b/assets/libreoffice_impr_njc/ff469fdc-409b-4ed4-a544-46cb1dfb24c2/The Golden Age of Arcade Games.pptx
@@ -29,7 +29,7 @@
     <p:sldId id="274" r:id="rId22"/>
     <p:sldId id="275" r:id="rId23"/>
   </p:sldIdLst>
-  <p:sldSz cx="12192000" cy="6858000"/>
+  <p:sldSz cx="12193588" cy="6858000"/>
   <p:notesSz cx="6858000" cy="12192000"/>
 </p:presentation>
 </file>
@@ -83,19 +83,13 @@
               <a:buNone/>
             </a:pPr>
             <a:r>
-              <a:rPr b="1" lang="en-HK" sz="4400" spc="-1" strike="noStrike">
-                <a:solidFill>
-                  <a:srgbClr val="ffff00"/>
-                </a:solidFill>
-                <a:latin typeface="Calibri Light"/>
+              <a:rPr b="0" lang="en-HK" sz="4400" spc="-1" strike="noStrike">
+                <a:latin typeface="Arial"/>
               </a:rPr>
               <a:t>Click to move the slide</a:t>
             </a:r>
-            <a:endParaRPr b="1" lang="en-HK" sz="4400" spc="-1" strike="noStrike">
-              <a:solidFill>
-                <a:srgbClr val="ffff00"/>
-              </a:solidFill>
-              <a:latin typeface="Calibri Light"/>
+            <a:endParaRPr b="0" lang="en-HK" sz="4400" spc="-1" strike="noStrike">
+              <a:latin typeface="Arial"/>
             </a:endParaRPr>
           </a:p>
         </p:txBody>
@@ -317,7 +311,7 @@
             <a:pPr algn="r">
               <a:buNone/>
             </a:pPr>
-            <a:fld id="{61EE228E-0E75-4C53-973A-A3EC16CE09AE}" type="slidenum">
+            <a:fld id="{77034F8A-B5E9-4899-B0E3-8FC21A443943}" type="slidenum">
               <a:rPr b="0" lang="en-HK" sz="1400" spc="-1" strike="noStrike">
                 <a:latin typeface="Times New Roman"/>
               </a:rPr>
@@ -365,7 +359,7 @@
         <p:spPr>
           <a:xfrm>
             <a:off x="685800" y="1143000"/>
-            <a:ext cx="5486040" cy="3085920"/>
+            <a:ext cx="5485680" cy="3085560"/>
           </a:xfrm>
           <a:prstGeom prst="rect">
             <a:avLst/>
@@ -388,7 +382,7 @@
         <p:spPr>
           <a:xfrm>
             <a:off x="685800" y="4400640"/>
-            <a:ext cx="5486040" cy="3600000"/>
+            <a:ext cx="5485680" cy="3599640"/>
           </a:xfrm>
           <a:prstGeom prst="rect">
             <a:avLst/>
@@ -399,7 +393,7 @@
           </a:ln>
         </p:spPr>
         <p:txBody>
-          <a:bodyPr anchor="t">
+          <a:bodyPr lIns="0" rIns="0" tIns="0" bIns="0" anchor="t">
             <a:noAutofit/>
           </a:bodyPr>
           <a:p>
@@ -422,7 +416,7 @@
         <p:spPr>
           <a:xfrm>
             <a:off x="3884760" y="8685360"/>
-            <a:ext cx="2971440" cy="458280"/>
+            <a:ext cx="2971080" cy="457920"/>
           </a:xfrm>
           <a:prstGeom prst="rect">
             <a:avLst/>
@@ -433,7 +427,7 @@
           </a:ln>
         </p:spPr>
         <p:txBody>
-          <a:bodyPr anchor="b">
+          <a:bodyPr lIns="0" rIns="0" tIns="0" bIns="0" anchor="b">
             <a:noAutofit/>
           </a:bodyPr>
           <a:lstStyle>
@@ -454,7 +448,7 @@
               </a:lnSpc>
               <a:buNone/>
             </a:pPr>
-            <a:fld id="{65567CD5-4A99-46A7-8213-D52EEC45718F}" type="slidenum">
+            <a:fld id="{6C95B269-106D-4ECE-A552-4DEF577C588D}" type="slidenum">
               <a:rPr b="0" lang="en-US" sz="1200" spc="-1" strike="noStrike">
                 <a:latin typeface="Times New Roman"/>
               </a:rPr>
@@ -501,7 +495,7 @@
         <p:spPr>
           <a:xfrm>
             <a:off x="685800" y="1143000"/>
-            <a:ext cx="5486040" cy="3085920"/>
+            <a:ext cx="5485680" cy="3085560"/>
           </a:xfrm>
           <a:prstGeom prst="rect">
             <a:avLst/>
@@ -524,7 +518,7 @@
         <p:spPr>
           <a:xfrm>
             <a:off x="685800" y="4400640"/>
-            <a:ext cx="5486040" cy="3600000"/>
+            <a:ext cx="5485680" cy="3599640"/>
           </a:xfrm>
           <a:prstGeom prst="rect">
             <a:avLst/>
@@ -535,7 +529,7 @@
           </a:ln>
         </p:spPr>
         <p:txBody>
-          <a:bodyPr anchor="t">
+          <a:bodyPr lIns="0" rIns="0" tIns="0" bIns="0" anchor="t">
             <a:noAutofit/>
           </a:bodyPr>
           <a:p>
@@ -558,7 +552,7 @@
         <p:spPr>
           <a:xfrm>
             <a:off x="3884760" y="8685360"/>
-            <a:ext cx="2971440" cy="458280"/>
+            <a:ext cx="2971080" cy="457920"/>
           </a:xfrm>
           <a:prstGeom prst="rect">
             <a:avLst/>
@@ -569,7 +563,7 @@
           </a:ln>
         </p:spPr>
         <p:txBody>
-          <a:bodyPr anchor="b">
+          <a:bodyPr lIns="0" rIns="0" tIns="0" bIns="0" anchor="b">
             <a:noAutofit/>
           </a:bodyPr>
           <a:lstStyle>
@@ -590,7 +584,7 @@
               </a:lnSpc>
               <a:buNone/>
             </a:pPr>
-            <a:fld id="{D7EDAE87-237D-4D38-91DD-83E8BEF370ED}" type="slidenum">
+            <a:fld id="{E7E4E7C0-2F69-4EAA-825D-A1F4148B87F0}" type="slidenum">
               <a:rPr b="0" lang="en-US" sz="1200" spc="-1" strike="noStrike">
                 <a:latin typeface="Times New Roman"/>
               </a:rPr>
@@ -637,7 +631,7 @@
         <p:spPr>
           <a:xfrm>
             <a:off x="685800" y="1143000"/>
-            <a:ext cx="5486040" cy="3085920"/>
+            <a:ext cx="5485680" cy="3085560"/>
           </a:xfrm>
           <a:prstGeom prst="rect">
             <a:avLst/>
@@ -660,7 +654,7 @@
         <p:spPr>
           <a:xfrm>
             <a:off x="685800" y="4400640"/>
-            <a:ext cx="5486040" cy="3600000"/>
+            <a:ext cx="5485680" cy="3599640"/>
           </a:xfrm>
           <a:prstGeom prst="rect">
             <a:avLst/>
@@ -671,7 +665,7 @@
           </a:ln>
         </p:spPr>
         <p:txBody>
-          <a:bodyPr anchor="t">
+          <a:bodyPr lIns="0" rIns="0" tIns="0" bIns="0" anchor="t">
             <a:noAutofit/>
           </a:bodyPr>
           <a:p>
@@ -694,7 +688,7 @@
         <p:spPr>
           <a:xfrm>
             <a:off x="3884760" y="8685360"/>
-            <a:ext cx="2971440" cy="458280"/>
+            <a:ext cx="2971080" cy="457920"/>
           </a:xfrm>
           <a:prstGeom prst="rect">
             <a:avLst/>
@@ -705,7 +699,7 @@
           </a:ln>
         </p:spPr>
         <p:txBody>
-          <a:bodyPr anchor="b">
+          <a:bodyPr lIns="0" rIns="0" tIns="0" bIns="0" anchor="b">
             <a:noAutofit/>
           </a:bodyPr>
           <a:lstStyle>
@@ -726,7 +720,7 @@
               </a:lnSpc>
               <a:buNone/>
             </a:pPr>
-            <a:fld id="{3A58CD4C-EDA6-4B65-9B0F-C29ABD8CC6FA}" type="slidenum">
+            <a:fld id="{4C378770-81ED-4456-8FD6-E00C680E802C}" type="slidenum">
               <a:rPr b="0" lang="en-US" sz="1200" spc="-1" strike="noStrike">
                 <a:latin typeface="Times New Roman"/>
               </a:rPr>
@@ -773,7 +767,7 @@
         <p:spPr>
           <a:xfrm>
             <a:off x="685800" y="1143000"/>
-            <a:ext cx="5486040" cy="3085920"/>
+            <a:ext cx="5485680" cy="3085560"/>
           </a:xfrm>
           <a:prstGeom prst="rect">
             <a:avLst/>
@@ -796,7 +790,7 @@
         <p:spPr>
           <a:xfrm>
             <a:off x="685800" y="4400640"/>
-            <a:ext cx="5486040" cy="3600000"/>
+            <a:ext cx="5485680" cy="3599640"/>
           </a:xfrm>
           <a:prstGeom prst="rect">
             <a:avLst/>
@@ -807,7 +801,7 @@
           </a:ln>
         </p:spPr>
         <p:txBody>
-          <a:bodyPr anchor="t">
+          <a:bodyPr lIns="0" rIns="0" tIns="0" bIns="0" anchor="t">
             <a:noAutofit/>
           </a:bodyPr>
           <a:p>
@@ -830,7 +824,7 @@
         <p:spPr>
           <a:xfrm>
             <a:off x="3884760" y="8685360"/>
-            <a:ext cx="2971440" cy="458280"/>
+            <a:ext cx="2971080" cy="457920"/>
           </a:xfrm>
           <a:prstGeom prst="rect">
             <a:avLst/>
@@ -841,7 +835,7 @@
           </a:ln>
         </p:spPr>
         <p:txBody>
-          <a:bodyPr anchor="b">
+          <a:bodyPr lIns="0" rIns="0" tIns="0" bIns="0" anchor="b">
             <a:noAutofit/>
           </a:bodyPr>
           <a:lstStyle>
@@ -862,7 +856,7 @@
               </a:lnSpc>
               <a:buNone/>
             </a:pPr>
-            <a:fld id="{7EA57108-5A99-4BF1-8F57-36CCF6292302}" type="slidenum">
+            <a:fld id="{A19DB2D7-8E48-45E2-A5F3-5BC967D8B86D}" type="slidenum">
               <a:rPr b="0" lang="en-US" sz="1200" spc="-1" strike="noStrike">
                 <a:latin typeface="Times New Roman"/>
               </a:rPr>
@@ -909,7 +903,7 @@
         <p:spPr>
           <a:xfrm>
             <a:off x="685800" y="1143000"/>
-            <a:ext cx="5486040" cy="3085920"/>
+            <a:ext cx="5485680" cy="3085560"/>
           </a:xfrm>
           <a:prstGeom prst="rect">
             <a:avLst/>
@@ -932,7 +926,7 @@
         <p:spPr>
           <a:xfrm>
             <a:off x="685800" y="4400640"/>
-            <a:ext cx="5486040" cy="3600000"/>
+            <a:ext cx="5485680" cy="3599640"/>
           </a:xfrm>
           <a:prstGeom prst="rect">
             <a:avLst/>
@@ -943,7 +937,7 @@
           </a:ln>
         </p:spPr>
         <p:txBody>
-          <a:bodyPr anchor="t">
+          <a:bodyPr lIns="0" rIns="0" tIns="0" bIns="0" anchor="t">
             <a:noAutofit/>
           </a:bodyPr>
           <a:p>
@@ -966,7 +960,7 @@
         <p:spPr>
           <a:xfrm>
             <a:off x="3884760" y="8685360"/>
-            <a:ext cx="2971440" cy="458280"/>
+            <a:ext cx="2971080" cy="457920"/>
           </a:xfrm>
           <a:prstGeom prst="rect">
             <a:avLst/>
@@ -977,7 +971,7 @@
           </a:ln>
         </p:spPr>
         <p:txBody>
-          <a:bodyPr anchor="b">
+          <a:bodyPr lIns="0" rIns="0" tIns="0" bIns="0" anchor="b">
             <a:noAutofit/>
           </a:bodyPr>
           <a:lstStyle>
@@ -998,7 +992,7 @@
               </a:lnSpc>
               <a:buNone/>
             </a:pPr>
-            <a:fld id="{3DBC617A-8EEA-4884-9652-CD58EDB22F36}" type="slidenum">
+            <a:fld id="{1CC9C763-BCC0-4B2B-96F9-81E7A9D795C6}" type="slidenum">
               <a:rPr b="0" lang="en-US" sz="1200" spc="-1" strike="noStrike">
                 <a:latin typeface="Times New Roman"/>
               </a:rPr>
@@ -1045,7 +1039,7 @@
         <p:spPr>
           <a:xfrm>
             <a:off x="685800" y="1143000"/>
-            <a:ext cx="5486040" cy="3085920"/>
+            <a:ext cx="5485680" cy="3085560"/>
           </a:xfrm>
           <a:prstGeom prst="rect">
             <a:avLst/>
@@ -1068,7 +1062,7 @@
         <p:spPr>
           <a:xfrm>
             <a:off x="685800" y="4400640"/>
-            <a:ext cx="5486040" cy="3600000"/>
+            <a:ext cx="5485680" cy="3599640"/>
           </a:xfrm>
           <a:prstGeom prst="rect">
             <a:avLst/>
@@ -1079,7 +1073,7 @@
           </a:ln>
         </p:spPr>
         <p:txBody>
-          <a:bodyPr anchor="t">
+          <a:bodyPr lIns="0" rIns="0" tIns="0" bIns="0" anchor="t">
             <a:noAutofit/>
           </a:bodyPr>
           <a:p>
@@ -1102,7 +1096,7 @@
         <p:spPr>
           <a:xfrm>
             <a:off x="3884760" y="8685360"/>
-            <a:ext cx="2971440" cy="458280"/>
+            <a:ext cx="2971080" cy="457920"/>
           </a:xfrm>
           <a:prstGeom prst="rect">
             <a:avLst/>
@@ -1113,7 +1107,7 @@
           </a:ln>
         </p:spPr>
         <p:txBody>
-          <a:bodyPr anchor="b">
+          <a:bodyPr lIns="0" rIns="0" tIns="0" bIns="0" anchor="b">
             <a:noAutofit/>
           </a:bodyPr>
           <a:lstStyle>
@@ -1134,7 +1128,7 @@
               </a:lnSpc>
               <a:buNone/>
             </a:pPr>
-            <a:fld id="{D23D3566-D3FB-457C-9A4C-FB01BAB9FDA3}" type="slidenum">
+            <a:fld id="{2A1AFE1C-8FAE-482B-812C-107CE832150B}" type="slidenum">
               <a:rPr b="0" lang="en-US" sz="1200" spc="-1" strike="noStrike">
                 <a:latin typeface="Times New Roman"/>
               </a:rPr>
@@ -1181,7 +1175,7 @@
         <p:spPr>
           <a:xfrm>
             <a:off x="685800" y="1143000"/>
-            <a:ext cx="5486040" cy="3085920"/>
+            <a:ext cx="5485680" cy="3085560"/>
           </a:xfrm>
           <a:prstGeom prst="rect">
             <a:avLst/>
@@ -1204,7 +1198,7 @@
         <p:spPr>
           <a:xfrm>
             <a:off x="685800" y="4400640"/>
-            <a:ext cx="5486040" cy="3600000"/>
+            <a:ext cx="5485680" cy="3599640"/>
           </a:xfrm>
           <a:prstGeom prst="rect">
             <a:avLst/>
@@ -1215,7 +1209,7 @@
           </a:ln>
         </p:spPr>
         <p:txBody>
-          <a:bodyPr anchor="t">
+          <a:bodyPr lIns="0" rIns="0" tIns="0" bIns="0" anchor="t">
             <a:noAutofit/>
           </a:bodyPr>
           <a:p>
@@ -1238,7 +1232,7 @@
         <p:spPr>
           <a:xfrm>
             <a:off x="3884760" y="8685360"/>
-            <a:ext cx="2971440" cy="458280"/>
+            <a:ext cx="2971080" cy="457920"/>
           </a:xfrm>
           <a:prstGeom prst="rect">
             <a:avLst/>
@@ -1249,7 +1243,7 @@
           </a:ln>
         </p:spPr>
         <p:txBody>
-          <a:bodyPr anchor="b">
+          <a:bodyPr lIns="0" rIns="0" tIns="0" bIns="0" anchor="b">
             <a:noAutofit/>
           </a:bodyPr>
           <a:lstStyle>
@@ -1270,7 +1264,7 @@
               </a:lnSpc>
               <a:buNone/>
             </a:pPr>
-            <a:fld id="{4F6A16B7-C251-4D76-8CFE-EA067744B506}" type="slidenum">
+            <a:fld id="{C8DF8BCC-A7FB-434E-B885-03C1E0B7F4E3}" type="slidenum">
               <a:rPr b="0" lang="en-US" sz="1200" spc="-1" strike="noStrike">
                 <a:latin typeface="Times New Roman"/>
               </a:rPr>
@@ -1317,7 +1311,7 @@
         <p:spPr>
           <a:xfrm>
             <a:off x="685800" y="1143000"/>
-            <a:ext cx="5486040" cy="3085920"/>
+            <a:ext cx="5485680" cy="3085560"/>
           </a:xfrm>
           <a:prstGeom prst="rect">
             <a:avLst/>
@@ -1340,7 +1334,7 @@
         <p:spPr>
           <a:xfrm>
             <a:off x="685800" y="4400640"/>
-            <a:ext cx="5486040" cy="3600000"/>
+            <a:ext cx="5485680" cy="3599640"/>
           </a:xfrm>
           <a:prstGeom prst="rect">
             <a:avLst/>
@@ -1351,7 +1345,7 @@
           </a:ln>
         </p:spPr>
         <p:txBody>
-          <a:bodyPr anchor="t">
+          <a:bodyPr lIns="0" rIns="0" tIns="0" bIns="0" anchor="t">
             <a:noAutofit/>
           </a:bodyPr>
           <a:p>
@@ -1374,7 +1368,7 @@
         <p:spPr>
           <a:xfrm>
             <a:off x="3884760" y="8685360"/>
-            <a:ext cx="2971440" cy="458280"/>
+            <a:ext cx="2971080" cy="457920"/>
           </a:xfrm>
           <a:prstGeom prst="rect">
             <a:avLst/>
@@ -1385,7 +1379,7 @@
           </a:ln>
         </p:spPr>
         <p:txBody>
-          <a:bodyPr anchor="b">
+          <a:bodyPr lIns="0" rIns="0" tIns="0" bIns="0" anchor="b">
             <a:noAutofit/>
           </a:bodyPr>
           <a:lstStyle>
@@ -1406,7 +1400,7 @@
               </a:lnSpc>
               <a:buNone/>
             </a:pPr>
-            <a:fld id="{B3781B89-EB87-4423-BD87-160AB2D4B4F8}" type="slidenum">
+            <a:fld id="{B2D7A009-EAEC-44E6-AA89-DC6D02F79667}" type="slidenum">
               <a:rPr b="0" lang="en-US" sz="1200" spc="-1" strike="noStrike">
                 <a:latin typeface="Times New Roman"/>
               </a:rPr>
@@ -1453,7 +1447,7 @@
         <p:spPr>
           <a:xfrm>
             <a:off x="685800" y="1143000"/>
-            <a:ext cx="5486040" cy="3085920"/>
+            <a:ext cx="5485680" cy="3085560"/>
           </a:xfrm>
           <a:prstGeom prst="rect">
             <a:avLst/>
@@ -1476,7 +1470,7 @@
         <p:spPr>
           <a:xfrm>
             <a:off x="685800" y="4400640"/>
-            <a:ext cx="5486040" cy="3600000"/>
+            <a:ext cx="5485680" cy="3599640"/>
           </a:xfrm>
           <a:prstGeom prst="rect">
             <a:avLst/>
@@ -1487,7 +1481,7 @@
           </a:ln>
         </p:spPr>
         <p:txBody>
-          <a:bodyPr anchor="t">
+          <a:bodyPr lIns="0" rIns="0" tIns="0" bIns="0" anchor="t">
             <a:noAutofit/>
           </a:bodyPr>
           <a:p>
@@ -1510,7 +1504,7 @@
         <p:spPr>
           <a:xfrm>
             <a:off x="3884760" y="8685360"/>
-            <a:ext cx="2971440" cy="458280"/>
+            <a:ext cx="2971080" cy="457920"/>
           </a:xfrm>
           <a:prstGeom prst="rect">
             <a:avLst/>
@@ -1521,7 +1515,7 @@
           </a:ln>
         </p:spPr>
         <p:txBody>
-          <a:bodyPr anchor="b">
+          <a:bodyPr lIns="0" rIns="0" tIns="0" bIns="0" anchor="b">
             <a:noAutofit/>
           </a:bodyPr>
           <a:lstStyle>
@@ -1542,7 +1536,7 @@
               </a:lnSpc>
               <a:buNone/>
             </a:pPr>
-            <a:fld id="{2CA7F542-B4BC-452C-BF05-D9DCD44F2DCF}" type="slidenum">
+            <a:fld id="{8F5D30A5-7839-4E54-92E1-E9E9EFB032FD}" type="slidenum">
               <a:rPr b="0" lang="en-US" sz="1200" spc="-1" strike="noStrike">
                 <a:latin typeface="Times New Roman"/>
               </a:rPr>
@@ -1589,7 +1583,7 @@
         <p:spPr>
           <a:xfrm>
             <a:off x="685800" y="1143000"/>
-            <a:ext cx="5486040" cy="3085920"/>
+            <a:ext cx="5485680" cy="3085560"/>
           </a:xfrm>
           <a:prstGeom prst="rect">
             <a:avLst/>
@@ -1612,7 +1606,7 @@
         <p:spPr>
           <a:xfrm>
             <a:off x="685800" y="4400640"/>
-            <a:ext cx="5486040" cy="3600000"/>
+            <a:ext cx="5485680" cy="3599640"/>
           </a:xfrm>
           <a:prstGeom prst="rect">
             <a:avLst/>
@@ -1623,7 +1617,7 @@
           </a:ln>
         </p:spPr>
         <p:txBody>
-          <a:bodyPr anchor="t">
+          <a:bodyPr lIns="0" rIns="0" tIns="0" bIns="0" anchor="t">
             <a:noAutofit/>
           </a:bodyPr>
           <a:p>
@@ -1646,7 +1640,7 @@
         <p:spPr>
           <a:xfrm>
             <a:off x="3884760" y="8685360"/>
-            <a:ext cx="2971440" cy="458280"/>
+            <a:ext cx="2971080" cy="457920"/>
           </a:xfrm>
           <a:prstGeom prst="rect">
             <a:avLst/>
@@ -1657,7 +1651,7 @@
           </a:ln>
         </p:spPr>
         <p:txBody>
-          <a:bodyPr anchor="b">
+          <a:bodyPr lIns="0" rIns="0" tIns="0" bIns="0" anchor="b">
             <a:noAutofit/>
           </a:bodyPr>
           <a:lstStyle>
@@ -1678,7 +1672,7 @@
               </a:lnSpc>
               <a:buNone/>
             </a:pPr>
-            <a:fld id="{FA6BF2D7-1BCB-4F8C-B3AC-685E33984751}" type="slidenum">
+            <a:fld id="{1C1E155E-9620-40EC-A395-3D6D5E319AA5}" type="slidenum">
               <a:rPr b="0" lang="en-US" sz="1200" spc="-1" strike="noStrike">
                 <a:latin typeface="Times New Roman"/>
               </a:rPr>
@@ -1725,7 +1719,7 @@
         <p:spPr>
           <a:xfrm>
             <a:off x="685800" y="1143000"/>
-            <a:ext cx="5486040" cy="3085920"/>
+            <a:ext cx="5485680" cy="3085560"/>
           </a:xfrm>
           <a:prstGeom prst="rect">
             <a:avLst/>
@@ -1748,7 +1742,7 @@
         <p:spPr>
           <a:xfrm>
             <a:off x="685800" y="4400640"/>
-            <a:ext cx="5486040" cy="3600000"/>
+            <a:ext cx="5485680" cy="3599640"/>
           </a:xfrm>
           <a:prstGeom prst="rect">
             <a:avLst/>
@@ -1759,7 +1753,7 @@
           </a:ln>
         </p:spPr>
         <p:txBody>
-          <a:bodyPr anchor="t">
+          <a:bodyPr lIns="0" rIns="0" tIns="0" bIns="0" anchor="t">
             <a:noAutofit/>
           </a:bodyPr>
           <a:p>
@@ -1782,7 +1776,7 @@
         <p:spPr>
           <a:xfrm>
             <a:off x="3884760" y="8685360"/>
-            <a:ext cx="2971440" cy="458280"/>
+            <a:ext cx="2971080" cy="457920"/>
           </a:xfrm>
           <a:prstGeom prst="rect">
             <a:avLst/>
@@ -1793,7 +1787,7 @@
           </a:ln>
         </p:spPr>
         <p:txBody>
-          <a:bodyPr anchor="b">
+          <a:bodyPr lIns="0" rIns="0" tIns="0" bIns="0" anchor="b">
             <a:noAutofit/>
           </a:bodyPr>
           <a:lstStyle>
@@ -1814,7 +1808,7 @@
               </a:lnSpc>
               <a:buNone/>
             </a:pPr>
-            <a:fld id="{51DF13D2-E385-4FE7-A8F0-F3CFB17EE7C9}" type="slidenum">
+            <a:fld id="{BD1E8312-82A9-4C5D-809E-3DC63A0D6257}" type="slidenum">
               <a:rPr b="0" lang="en-US" sz="1200" spc="-1" strike="noStrike">
                 <a:latin typeface="Times New Roman"/>
               </a:rPr>
@@ -1861,7 +1855,7 @@
         <p:spPr>
           <a:xfrm>
             <a:off x="685800" y="1143000"/>
-            <a:ext cx="5486040" cy="3085920"/>
+            <a:ext cx="5485680" cy="3085560"/>
           </a:xfrm>
           <a:prstGeom prst="rect">
             <a:avLst/>
@@ -1884,7 +1878,7 @@
         <p:spPr>
           <a:xfrm>
             <a:off x="685800" y="4400640"/>
-            <a:ext cx="5486040" cy="3600000"/>
+            <a:ext cx="5485680" cy="3599640"/>
           </a:xfrm>
           <a:prstGeom prst="rect">
             <a:avLst/>
@@ -1895,7 +1889,7 @@
           </a:ln>
         </p:spPr>
         <p:txBody>
-          <a:bodyPr anchor="t">
+          <a:bodyPr lIns="0" rIns="0" tIns="0" bIns="0" anchor="t">
             <a:noAutofit/>
           </a:bodyPr>
           <a:p>
@@ -1918,7 +1912,7 @@
         <p:spPr>
           <a:xfrm>
             <a:off x="3884760" y="8685360"/>
-            <a:ext cx="2971440" cy="458280"/>
+            <a:ext cx="2971080" cy="457920"/>
           </a:xfrm>
           <a:prstGeom prst="rect">
             <a:avLst/>
@@ -1929,7 +1923,7 @@
           </a:ln>
         </p:spPr>
         <p:txBody>
-          <a:bodyPr anchor="b">
+          <a:bodyPr lIns="0" rIns="0" tIns="0" bIns="0" anchor="b">
             <a:noAutofit/>
           </a:bodyPr>
           <a:lstStyle>
@@ -1950,7 +1944,7 @@
               </a:lnSpc>
               <a:buNone/>
             </a:pPr>
-            <a:fld id="{1ED7ABB1-2929-4CC8-98CF-E42F524B9EEA}" type="slidenum">
+            <a:fld id="{9AC52B08-AD54-4B46-9BE7-97B9B7D01777}" type="slidenum">
               <a:rPr b="0" lang="en-US" sz="1200" spc="-1" strike="noStrike">
                 <a:latin typeface="Times New Roman"/>
               </a:rPr>
@@ -1997,7 +1991,7 @@
         <p:spPr>
           <a:xfrm>
             <a:off x="685800" y="1143000"/>
-            <a:ext cx="5486040" cy="3085920"/>
+            <a:ext cx="5485680" cy="3085560"/>
           </a:xfrm>
           <a:prstGeom prst="rect">
             <a:avLst/>
@@ -2020,7 +2014,7 @@
         <p:spPr>
           <a:xfrm>
             <a:off x="685800" y="4400640"/>
-            <a:ext cx="5486040" cy="3600000"/>
+            <a:ext cx="5485680" cy="3599640"/>
           </a:xfrm>
           <a:prstGeom prst="rect">
             <a:avLst/>
@@ -2031,7 +2025,7 @@
           </a:ln>
         </p:spPr>
         <p:txBody>
-          <a:bodyPr anchor="t">
+          <a:bodyPr lIns="0" rIns="0" tIns="0" bIns="0" anchor="t">
             <a:noAutofit/>
           </a:bodyPr>
           <a:p>
@@ -2054,7 +2048,7 @@
         <p:spPr>
           <a:xfrm>
             <a:off x="3884760" y="8685360"/>
-            <a:ext cx="2971440" cy="458280"/>
+            <a:ext cx="2971080" cy="457920"/>
           </a:xfrm>
           <a:prstGeom prst="rect">
             <a:avLst/>
@@ -2065,7 +2059,7 @@
           </a:ln>
         </p:spPr>
         <p:txBody>
-          <a:bodyPr anchor="b">
+          <a:bodyPr lIns="0" rIns="0" tIns="0" bIns="0" anchor="b">
             <a:noAutofit/>
           </a:bodyPr>
           <a:lstStyle>
@@ -2086,7 +2080,7 @@
               </a:lnSpc>
               <a:buNone/>
             </a:pPr>
-            <a:fld id="{E362732C-2919-4CD4-A61F-B90DBB67FB6F}" type="slidenum">
+            <a:fld id="{233600FB-42A3-43A2-BC18-9E820E28D8C1}" type="slidenum">
               <a:rPr b="0" lang="en-US" sz="1200" spc="-1" strike="noStrike">
                 <a:latin typeface="Times New Roman"/>
               </a:rPr>
@@ -2133,7 +2127,7 @@
         <p:spPr>
           <a:xfrm>
             <a:off x="685800" y="1143000"/>
-            <a:ext cx="5486040" cy="3085920"/>
+            <a:ext cx="5485680" cy="3085560"/>
           </a:xfrm>
           <a:prstGeom prst="rect">
             <a:avLst/>
@@ -2156,7 +2150,7 @@
         <p:spPr>
           <a:xfrm>
             <a:off x="685800" y="4400640"/>
-            <a:ext cx="5486040" cy="3600000"/>
+            <a:ext cx="5485680" cy="3599640"/>
           </a:xfrm>
           <a:prstGeom prst="rect">
             <a:avLst/>
@@ -2167,7 +2161,7 @@
           </a:ln>
         </p:spPr>
         <p:txBody>
-          <a:bodyPr anchor="t">
+          <a:bodyPr lIns="0" rIns="0" tIns="0" bIns="0" anchor="t">
             <a:noAutofit/>
           </a:bodyPr>
           <a:p>
@@ -2190,7 +2184,7 @@
         <p:spPr>
           <a:xfrm>
             <a:off x="3884760" y="8685360"/>
-            <a:ext cx="2971440" cy="458280"/>
+            <a:ext cx="2971080" cy="457920"/>
           </a:xfrm>
           <a:prstGeom prst="rect">
             <a:avLst/>
@@ -2201,7 +2195,7 @@
           </a:ln>
         </p:spPr>
         <p:txBody>
-          <a:bodyPr anchor="b">
+          <a:bodyPr lIns="0" rIns="0" tIns="0" bIns="0" anchor="b">
             <a:noAutofit/>
           </a:bodyPr>
           <a:lstStyle>
@@ -2222,7 +2216,7 @@
               </a:lnSpc>
               <a:buNone/>
             </a:pPr>
-            <a:fld id="{46DF237C-49C7-4434-B82F-3B85EEF77D6A}" type="slidenum">
+            <a:fld id="{4BF59A70-5AF2-4373-BDF2-8B6463BD7B5A}" type="slidenum">
               <a:rPr b="0" lang="en-US" sz="1200" spc="-1" strike="noStrike">
                 <a:latin typeface="Times New Roman"/>
               </a:rPr>
@@ -2269,7 +2263,7 @@
         <p:spPr>
           <a:xfrm>
             <a:off x="685800" y="1143000"/>
-            <a:ext cx="5486040" cy="3085920"/>
+            <a:ext cx="5485680" cy="3085560"/>
           </a:xfrm>
           <a:prstGeom prst="rect">
             <a:avLst/>
@@ -2292,7 +2286,7 @@
         <p:spPr>
           <a:xfrm>
             <a:off x="685800" y="4400640"/>
-            <a:ext cx="5486040" cy="3600000"/>
+            <a:ext cx="5485680" cy="3599640"/>
           </a:xfrm>
           <a:prstGeom prst="rect">
             <a:avLst/>
@@ -2303,7 +2297,7 @@
           </a:ln>
         </p:spPr>
         <p:txBody>
-          <a:bodyPr anchor="t">
+          <a:bodyPr lIns="0" rIns="0" tIns="0" bIns="0" anchor="t">
             <a:noAutofit/>
           </a:bodyPr>
           <a:p>
@@ -2312,6 +2306,9 @@
                 <a:spcPct val="100000"/>
               </a:lnSpc>
               <a:buNone/>
+              <a:tabLst>
+                <a:tab algn="l" pos="0"/>
+              </a:tabLst>
             </a:pPr>
             <a:r>
               <a:rPr b="0" lang="en-HK" sz="1800" spc="-1" strike="noStrike">
@@ -2338,7 +2335,7 @@
         <p:spPr>
           <a:xfrm>
             <a:off x="3884760" y="8685360"/>
-            <a:ext cx="2971440" cy="458280"/>
+            <a:ext cx="2971080" cy="457920"/>
           </a:xfrm>
           <a:prstGeom prst="rect">
             <a:avLst/>
@@ -2349,7 +2346,7 @@
           </a:ln>
         </p:spPr>
         <p:txBody>
-          <a:bodyPr anchor="b">
+          <a:bodyPr lIns="0" rIns="0" tIns="0" bIns="0" anchor="b">
             <a:noAutofit/>
           </a:bodyPr>
           <a:lstStyle>
@@ -2370,7 +2367,7 @@
               </a:lnSpc>
               <a:buNone/>
             </a:pPr>
-            <a:fld id="{273591C0-4DEC-4ADB-A7FD-B759D27ACFAF}" type="slidenum">
+            <a:fld id="{518D83A4-1A0E-4C2C-BA63-706FF92E7F15}" type="slidenum">
               <a:rPr b="0" lang="en-US" sz="1200" spc="-1" strike="noStrike">
                 <a:latin typeface="Times New Roman"/>
               </a:rPr>
@@ -2417,7 +2414,7 @@
         <p:spPr>
           <a:xfrm>
             <a:off x="685800" y="1143000"/>
-            <a:ext cx="5486040" cy="3085920"/>
+            <a:ext cx="5485680" cy="3085560"/>
           </a:xfrm>
           <a:prstGeom prst="rect">
             <a:avLst/>
@@ -2440,7 +2437,7 @@
         <p:spPr>
           <a:xfrm>
             <a:off x="685800" y="4400640"/>
-            <a:ext cx="5486040" cy="3600000"/>
+            <a:ext cx="5485680" cy="3599640"/>
           </a:xfrm>
           <a:prstGeom prst="rect">
             <a:avLst/>
@@ -2451,7 +2448,7 @@
           </a:ln>
         </p:spPr>
         <p:txBody>
-          <a:bodyPr anchor="t">
+          <a:bodyPr lIns="0" rIns="0" tIns="0" bIns="0" anchor="t">
             <a:noAutofit/>
           </a:bodyPr>
           <a:p>
@@ -2474,7 +2471,7 @@
         <p:spPr>
           <a:xfrm>
             <a:off x="3884760" y="8685360"/>
-            <a:ext cx="2971440" cy="458280"/>
+            <a:ext cx="2971080" cy="457920"/>
           </a:xfrm>
           <a:prstGeom prst="rect">
             <a:avLst/>
@@ -2485,7 +2482,7 @@
           </a:ln>
         </p:spPr>
         <p:txBody>
-          <a:bodyPr anchor="b">
+          <a:bodyPr lIns="0" rIns="0" tIns="0" bIns="0" anchor="b">
             <a:noAutofit/>
           </a:bodyPr>
           <a:lstStyle>
@@ -2506,7 +2503,7 @@
               </a:lnSpc>
               <a:buNone/>
             </a:pPr>
-            <a:fld id="{DDAE037C-B8C9-4B8E-A52B-B87C02AAF6A0}" type="slidenum">
+            <a:fld id="{90EA78FE-531F-433D-BEA0-37290ACB22CD}" type="slidenum">
               <a:rPr b="0" lang="en-US" sz="1200" spc="-1" strike="noStrike">
                 <a:latin typeface="Times New Roman"/>
               </a:rPr>
@@ -2553,7 +2550,7 @@
         <p:spPr>
           <a:xfrm>
             <a:off x="685800" y="1143000"/>
-            <a:ext cx="5486040" cy="3085920"/>
+            <a:ext cx="5485680" cy="3085560"/>
           </a:xfrm>
           <a:prstGeom prst="rect">
             <a:avLst/>
@@ -2576,7 +2573,7 @@
         <p:spPr>
           <a:xfrm>
             <a:off x="685800" y="4400640"/>
-            <a:ext cx="5486040" cy="3600000"/>
+            <a:ext cx="5485680" cy="3599640"/>
           </a:xfrm>
           <a:prstGeom prst="rect">
             <a:avLst/>
@@ -2587,7 +2584,7 @@
           </a:ln>
         </p:spPr>
         <p:txBody>
-          <a:bodyPr anchor="t">
+          <a:bodyPr lIns="0" rIns="0" tIns="0" bIns="0" anchor="t">
             <a:noAutofit/>
           </a:bodyPr>
           <a:p>
@@ -2610,7 +2607,7 @@
         <p:spPr>
           <a:xfrm>
             <a:off x="3884760" y="8685360"/>
-            <a:ext cx="2971440" cy="458280"/>
+            <a:ext cx="2971080" cy="457920"/>
           </a:xfrm>
           <a:prstGeom prst="rect">
             <a:avLst/>
@@ -2621,7 +2618,7 @@
           </a:ln>
         </p:spPr>
         <p:txBody>
-          <a:bodyPr anchor="b">
+          <a:bodyPr lIns="0" rIns="0" tIns="0" bIns="0" anchor="b">
             <a:noAutofit/>
           </a:bodyPr>
           <a:lstStyle>
@@ -2642,7 +2639,7 @@
               </a:lnSpc>
               <a:buNone/>
             </a:pPr>
-            <a:fld id="{F2DB2C63-2E90-4FD6-9672-5C4BBF86D471}" type="slidenum">
+            <a:fld id="{E7A9C1BF-05BE-4C1D-AF2F-6FC740570EE4}" type="slidenum">
               <a:rPr b="0" lang="en-US" sz="1200" spc="-1" strike="noStrike">
                 <a:latin typeface="Times New Roman"/>
               </a:rPr>
@@ -2689,7 +2686,7 @@
         <p:spPr>
           <a:xfrm>
             <a:off x="685800" y="1143000"/>
-            <a:ext cx="5486040" cy="3085920"/>
+            <a:ext cx="5485680" cy="3085560"/>
           </a:xfrm>
           <a:prstGeom prst="rect">
             <a:avLst/>
@@ -2712,7 +2709,7 @@
         <p:spPr>
           <a:xfrm>
             <a:off x="685800" y="4400640"/>
-            <a:ext cx="5486040" cy="3600000"/>
+            <a:ext cx="5485680" cy="3599640"/>
           </a:xfrm>
           <a:prstGeom prst="rect">
             <a:avLst/>
@@ -2723,7 +2720,7 @@
           </a:ln>
         </p:spPr>
         <p:txBody>
-          <a:bodyPr anchor="t">
+          <a:bodyPr lIns="0" rIns="0" tIns="0" bIns="0" anchor="t">
             <a:noAutofit/>
           </a:bodyPr>
           <a:p>
@@ -2746,7 +2743,7 @@
         <p:spPr>
           <a:xfrm>
             <a:off x="3884760" y="8685360"/>
-            <a:ext cx="2971440" cy="458280"/>
+            <a:ext cx="2971080" cy="457920"/>
           </a:xfrm>
           <a:prstGeom prst="rect">
             <a:avLst/>
@@ -2757,7 +2754,7 @@
           </a:ln>
         </p:spPr>
         <p:txBody>
-          <a:bodyPr anchor="b">
+          <a:bodyPr lIns="0" rIns="0" tIns="0" bIns="0" anchor="b">
             <a:noAutofit/>
           </a:bodyPr>
           <a:lstStyle>
@@ -2778,7 +2775,7 @@
               </a:lnSpc>
               <a:buNone/>
             </a:pPr>
-            <a:fld id="{43046295-2524-4597-9442-F309440F8C1A}" type="slidenum">
+            <a:fld id="{AD31820C-EEFA-44A8-B440-C9DCC1B8D629}" type="slidenum">
               <a:rPr b="0" lang="en-US" sz="1200" spc="-1" strike="noStrike">
                 <a:latin typeface="Times New Roman"/>
               </a:rPr>
@@ -2825,7 +2822,7 @@
         <p:spPr>
           <a:xfrm>
             <a:off x="685800" y="1143000"/>
-            <a:ext cx="5486040" cy="3085920"/>
+            <a:ext cx="5485680" cy="3085560"/>
           </a:xfrm>
           <a:prstGeom prst="rect">
             <a:avLst/>
@@ -2848,7 +2845,7 @@
         <p:spPr>
           <a:xfrm>
             <a:off x="685800" y="4400640"/>
-            <a:ext cx="5486040" cy="3600000"/>
+            <a:ext cx="5485680" cy="3599640"/>
           </a:xfrm>
           <a:prstGeom prst="rect">
             <a:avLst/>
@@ -2859,7 +2856,7 @@
           </a:ln>
         </p:spPr>
         <p:txBody>
-          <a:bodyPr anchor="t">
+          <a:bodyPr lIns="0" rIns="0" tIns="0" bIns="0" anchor="t">
             <a:noAutofit/>
           </a:bodyPr>
           <a:p>
@@ -2882,7 +2879,7 @@
         <p:spPr>
           <a:xfrm>
             <a:off x="3884760" y="8685360"/>
-            <a:ext cx="2971440" cy="458280"/>
+            <a:ext cx="2971080" cy="457920"/>
           </a:xfrm>
           <a:prstGeom prst="rect">
             <a:avLst/>
@@ -2893,7 +2890,7 @@
           </a:ln>
         </p:spPr>
         <p:txBody>
-          <a:bodyPr anchor="b">
+          <a:bodyPr lIns="0" rIns="0" tIns="0" bIns="0" anchor="b">
             <a:noAutofit/>
           </a:bodyPr>
           <a:lstStyle>
@@ -2914,7 +2911,7 @@
               </a:lnSpc>
               <a:buNone/>
             </a:pPr>
-            <a:fld id="{3A1B5EB8-1A3C-482D-8727-40A0D33C1603}" type="slidenum">
+            <a:fld id="{8F155111-6E71-4BFB-B495-06899FA47B44}" type="slidenum">
               <a:rPr b="0" lang="en-US" sz="1200" spc="-1" strike="noStrike">
                 <a:latin typeface="Times New Roman"/>
               </a:rPr>
@@ -2961,7 +2958,7 @@
         <p:spPr>
           <a:xfrm>
             <a:off x="685800" y="1143000"/>
-            <a:ext cx="5486040" cy="3085920"/>
+            <a:ext cx="5485680" cy="3085560"/>
           </a:xfrm>
           <a:prstGeom prst="rect">
             <a:avLst/>
@@ -2984,7 +2981,7 @@
         <p:spPr>
           <a:xfrm>
             <a:off x="685800" y="4400640"/>
-            <a:ext cx="5486040" cy="3600000"/>
+            <a:ext cx="5485680" cy="3599640"/>
           </a:xfrm>
           <a:prstGeom prst="rect">
             <a:avLst/>
@@ -2995,7 +2992,7 @@
           </a:ln>
         </p:spPr>
         <p:txBody>
-          <a:bodyPr anchor="t">
+          <a:bodyPr lIns="0" rIns="0" tIns="0" bIns="0" anchor="t">
             <a:noAutofit/>
           </a:bodyPr>
           <a:p>
@@ -3018,7 +3015,7 @@
         <p:spPr>
           <a:xfrm>
             <a:off x="3884760" y="8685360"/>
-            <a:ext cx="2971440" cy="458280"/>
+            <a:ext cx="2971080" cy="457920"/>
           </a:xfrm>
           <a:prstGeom prst="rect">
             <a:avLst/>
@@ -3029,7 +3026,7 @@
           </a:ln>
         </p:spPr>
         <p:txBody>
-          <a:bodyPr anchor="b">
+          <a:bodyPr lIns="0" rIns="0" tIns="0" bIns="0" anchor="b">
             <a:noAutofit/>
           </a:bodyPr>
           <a:lstStyle>
@@ -3050,7 +3047,7 @@
               </a:lnSpc>
               <a:buNone/>
             </a:pPr>
-            <a:fld id="{048349CC-235C-4DDB-B4FA-B257B7A01229}" type="slidenum">
+            <a:fld id="{D103C676-5C28-45E5-9D5A-44B64A6EAFE4}" type="slidenum">
               <a:rPr b="0" lang="en-US" sz="1200" spc="-1" strike="noStrike">
                 <a:latin typeface="Times New Roman"/>
               </a:rPr>
@@ -3119,7 +3116,7 @@
         <p:spPr>
           <a:xfrm>
             <a:off x="609480" y="273600"/>
-            <a:ext cx="10972440" cy="1144800"/>
+            <a:ext cx="10973520" cy="1144800"/>
           </a:xfrm>
           <a:prstGeom prst="rect">
             <a:avLst/>
@@ -3137,11 +3134,8 @@
             <a:pPr algn="ctr">
               <a:buNone/>
             </a:pPr>
-            <a:endParaRPr b="1" lang="en-HK" sz="4400" spc="-1" strike="noStrike">
-              <a:solidFill>
-                <a:srgbClr val="ffff00"/>
-              </a:solidFill>
-              <a:latin typeface="Calibri Light"/>
+            <a:endParaRPr b="0" lang="en-HK" sz="4400" spc="-1" strike="noStrike">
+              <a:latin typeface="Arial"/>
             </a:endParaRPr>
           </a:p>
         </p:txBody>
@@ -3159,7 +3153,7 @@
         <p:spPr>
           <a:xfrm>
             <a:off x="609480" y="1604520"/>
-            <a:ext cx="10972440" cy="1896840"/>
+            <a:ext cx="10973520" cy="1896840"/>
           </a:xfrm>
           <a:prstGeom prst="rect">
             <a:avLst/>
@@ -3175,10 +3169,7 @@
           </a:bodyPr>
           <a:p>
             <a:endParaRPr b="0" lang="en-HK" sz="3200" spc="-1" strike="noStrike">
-              <a:solidFill>
-                <a:srgbClr val="000000"/>
-              </a:solidFill>
-              <a:latin typeface="Calibri"/>
+              <a:latin typeface="Arial"/>
             </a:endParaRPr>
           </a:p>
         </p:txBody>
@@ -3196,7 +3187,7 @@
         <p:spPr>
           <a:xfrm>
             <a:off x="609480" y="3682080"/>
-            <a:ext cx="10972440" cy="1896840"/>
+            <a:ext cx="10973520" cy="1896840"/>
           </a:xfrm>
           <a:prstGeom prst="rect">
             <a:avLst/>
@@ -3212,10 +3203,7 @@
           </a:bodyPr>
           <a:p>
             <a:endParaRPr b="0" lang="en-HK" sz="3200" spc="-1" strike="noStrike">
-              <a:solidFill>
-                <a:srgbClr val="000000"/>
-              </a:solidFill>
-              <a:latin typeface="Calibri"/>
+              <a:latin typeface="Arial"/>
             </a:endParaRPr>
           </a:p>
         </p:txBody>
@@ -3255,7 +3243,7 @@
         <p:spPr>
           <a:xfrm>
             <a:off x="609480" y="273600"/>
-            <a:ext cx="10972440" cy="1144800"/>
+            <a:ext cx="10973520" cy="1144800"/>
           </a:xfrm>
           <a:prstGeom prst="rect">
             <a:avLst/>
@@ -3273,11 +3261,8 @@
             <a:pPr algn="ctr">
               <a:buNone/>
             </a:pPr>
-            <a:endParaRPr b="1" lang="en-HK" sz="4400" spc="-1" strike="noStrike">
-              <a:solidFill>
-                <a:srgbClr val="ffff00"/>
-              </a:solidFill>
-              <a:latin typeface="Calibri Light"/>
+            <a:endParaRPr b="0" lang="en-HK" sz="4400" spc="-1" strike="noStrike">
+              <a:latin typeface="Arial"/>
             </a:endParaRPr>
           </a:p>
         </p:txBody>
@@ -3295,7 +3280,7 @@
         <p:spPr>
           <a:xfrm>
             <a:off x="609480" y="1604520"/>
-            <a:ext cx="5354280" cy="1896840"/>
+            <a:ext cx="5355000" cy="1896840"/>
           </a:xfrm>
           <a:prstGeom prst="rect">
             <a:avLst/>
@@ -3311,10 +3296,7 @@
           </a:bodyPr>
           <a:p>
             <a:endParaRPr b="0" lang="en-HK" sz="3200" spc="-1" strike="noStrike">
-              <a:solidFill>
-                <a:srgbClr val="000000"/>
-              </a:solidFill>
-              <a:latin typeface="Calibri"/>
+              <a:latin typeface="Arial"/>
             </a:endParaRPr>
           </a:p>
         </p:txBody>
@@ -3331,8 +3313,8 @@
         </p:nvSpPr>
         <p:spPr>
           <a:xfrm>
-            <a:off x="6231960" y="1604520"/>
-            <a:ext cx="5354280" cy="1896840"/>
+            <a:off x="6232680" y="1604520"/>
+            <a:ext cx="5355000" cy="1896840"/>
           </a:xfrm>
           <a:prstGeom prst="rect">
             <a:avLst/>
@@ -3348,10 +3330,7 @@
           </a:bodyPr>
           <a:p>
             <a:endParaRPr b="0" lang="en-HK" sz="3200" spc="-1" strike="noStrike">
-              <a:solidFill>
-                <a:srgbClr val="000000"/>
-              </a:solidFill>
-              <a:latin typeface="Calibri"/>
+              <a:latin typeface="Arial"/>
             </a:endParaRPr>
           </a:p>
         </p:txBody>
@@ -3369,7 +3348,7 @@
         <p:spPr>
           <a:xfrm>
             <a:off x="609480" y="3682080"/>
-            <a:ext cx="5354280" cy="1896840"/>
+            <a:ext cx="5355000" cy="1896840"/>
           </a:xfrm>
           <a:prstGeom prst="rect">
             <a:avLst/>
@@ -3385,10 +3364,7 @@
           </a:bodyPr>
           <a:p>
             <a:endParaRPr b="0" lang="en-HK" sz="3200" spc="-1" strike="noStrike">
-              <a:solidFill>
-                <a:srgbClr val="000000"/>
-              </a:solidFill>
-              <a:latin typeface="Calibri"/>
+              <a:latin typeface="Arial"/>
             </a:endParaRPr>
           </a:p>
         </p:txBody>
@@ -3405,8 +3381,8 @@
         </p:nvSpPr>
         <p:spPr>
           <a:xfrm>
-            <a:off x="6231960" y="3682080"/>
-            <a:ext cx="5354280" cy="1896840"/>
+            <a:off x="6232680" y="3682080"/>
+            <a:ext cx="5355000" cy="1896840"/>
           </a:xfrm>
           <a:prstGeom prst="rect">
             <a:avLst/>
@@ -3422,10 +3398,7 @@
           </a:bodyPr>
           <a:p>
             <a:endParaRPr b="0" lang="en-HK" sz="3200" spc="-1" strike="noStrike">
-              <a:solidFill>
-                <a:srgbClr val="000000"/>
-              </a:solidFill>
-              <a:latin typeface="Calibri"/>
+              <a:latin typeface="Arial"/>
             </a:endParaRPr>
           </a:p>
         </p:txBody>
@@ -3465,7 +3438,7 @@
         <p:spPr>
           <a:xfrm>
             <a:off x="609480" y="273600"/>
-            <a:ext cx="10972440" cy="1144800"/>
+            <a:ext cx="10973520" cy="1144800"/>
           </a:xfrm>
           <a:prstGeom prst="rect">
             <a:avLst/>
@@ -3483,11 +3456,8 @@
             <a:pPr algn="ctr">
               <a:buNone/>
             </a:pPr>
-            <a:endParaRPr b="1" lang="en-HK" sz="4400" spc="-1" strike="noStrike">
-              <a:solidFill>
-                <a:srgbClr val="ffff00"/>
-              </a:solidFill>
-              <a:latin typeface="Calibri Light"/>
+            <a:endParaRPr b="0" lang="en-HK" sz="4400" spc="-1" strike="noStrike">
+              <a:latin typeface="Arial"/>
             </a:endParaRPr>
           </a:p>
         </p:txBody>
@@ -3505,7 +3475,7 @@
         <p:spPr>
           <a:xfrm>
             <a:off x="609480" y="1604520"/>
-            <a:ext cx="3533040" cy="1896840"/>
+            <a:ext cx="3533400" cy="1896840"/>
           </a:xfrm>
           <a:prstGeom prst="rect">
             <a:avLst/>
@@ -3521,10 +3491,7 @@
           </a:bodyPr>
           <a:p>
             <a:endParaRPr b="0" lang="en-HK" sz="3200" spc="-1" strike="noStrike">
-              <a:solidFill>
-                <a:srgbClr val="000000"/>
-              </a:solidFill>
-              <a:latin typeface="Calibri"/>
+              <a:latin typeface="Arial"/>
             </a:endParaRPr>
           </a:p>
         </p:txBody>
@@ -3541,8 +3508,8 @@
         </p:nvSpPr>
         <p:spPr>
           <a:xfrm>
-            <a:off x="4319640" y="1604520"/>
-            <a:ext cx="3533040" cy="1896840"/>
+            <a:off x="4320000" y="1604520"/>
+            <a:ext cx="3533400" cy="1896840"/>
           </a:xfrm>
           <a:prstGeom prst="rect">
             <a:avLst/>
@@ -3558,10 +3525,7 @@
           </a:bodyPr>
           <a:p>
             <a:endParaRPr b="0" lang="en-HK" sz="3200" spc="-1" strike="noStrike">
-              <a:solidFill>
-                <a:srgbClr val="000000"/>
-              </a:solidFill>
-              <a:latin typeface="Calibri"/>
+              <a:latin typeface="Arial"/>
             </a:endParaRPr>
           </a:p>
         </p:txBody>
@@ -3578,8 +3542,8 @@
         </p:nvSpPr>
         <p:spPr>
           <a:xfrm>
-            <a:off x="8029800" y="1604520"/>
-            <a:ext cx="3533040" cy="1896840"/>
+            <a:off x="8030520" y="1604520"/>
+            <a:ext cx="3533400" cy="1896840"/>
           </a:xfrm>
           <a:prstGeom prst="rect">
             <a:avLst/>
@@ -3595,10 +3559,7 @@
           </a:bodyPr>
           <a:p>
             <a:endParaRPr b="0" lang="en-HK" sz="3200" spc="-1" strike="noStrike">
-              <a:solidFill>
-                <a:srgbClr val="000000"/>
-              </a:solidFill>
-              <a:latin typeface="Calibri"/>
+              <a:latin typeface="Arial"/>
             </a:endParaRPr>
           </a:p>
         </p:txBody>
@@ -3616,7 +3577,7 @@
         <p:spPr>
           <a:xfrm>
             <a:off x="609480" y="3682080"/>
-            <a:ext cx="3533040" cy="1896840"/>
+            <a:ext cx="3533400" cy="1896840"/>
           </a:xfrm>
           <a:prstGeom prst="rect">
             <a:avLst/>
@@ -3632,10 +3593,7 @@
           </a:bodyPr>
           <a:p>
             <a:endParaRPr b="0" lang="en-HK" sz="3200" spc="-1" strike="noStrike">
-              <a:solidFill>
-                <a:srgbClr val="000000"/>
-              </a:solidFill>
-              <a:latin typeface="Calibri"/>
+              <a:latin typeface="Arial"/>
             </a:endParaRPr>
           </a:p>
         </p:txBody>
@@ -3652,8 +3610,8 @@
         </p:nvSpPr>
         <p:spPr>
           <a:xfrm>
-            <a:off x="4319640" y="3682080"/>
-            <a:ext cx="3533040" cy="1896840"/>
+            <a:off x="4320000" y="3682080"/>
+            <a:ext cx="3533400" cy="1896840"/>
           </a:xfrm>
           <a:prstGeom prst="rect">
             <a:avLst/>
@@ -3669,10 +3627,7 @@
           </a:bodyPr>
           <a:p>
             <a:endParaRPr b="0" lang="en-HK" sz="3200" spc="-1" strike="noStrike">
-              <a:solidFill>
-                <a:srgbClr val="000000"/>
-              </a:solidFill>
-              <a:latin typeface="Calibri"/>
+              <a:latin typeface="Arial"/>
             </a:endParaRPr>
           </a:p>
         </p:txBody>
@@ -3689,8 +3644,8 @@
         </p:nvSpPr>
         <p:spPr>
           <a:xfrm>
-            <a:off x="8029800" y="3682080"/>
-            <a:ext cx="3533040" cy="1896840"/>
+            <a:off x="8030520" y="3682080"/>
+            <a:ext cx="3533400" cy="1896840"/>
           </a:xfrm>
           <a:prstGeom prst="rect">
             <a:avLst/>
@@ -3706,10 +3661,7 @@
           </a:bodyPr>
           <a:p>
             <a:endParaRPr b="0" lang="en-HK" sz="3200" spc="-1" strike="noStrike">
-              <a:solidFill>
-                <a:srgbClr val="000000"/>
-              </a:solidFill>
-              <a:latin typeface="Calibri"/>
+              <a:latin typeface="Arial"/>
             </a:endParaRPr>
           </a:p>
         </p:txBody>
@@ -3749,7 +3701,7 @@
         <p:spPr>
           <a:xfrm>
             <a:off x="609480" y="273600"/>
-            <a:ext cx="10972440" cy="1144800"/>
+            <a:ext cx="10973520" cy="1144800"/>
           </a:xfrm>
           <a:prstGeom prst="rect">
             <a:avLst/>
@@ -3767,11 +3719,8 @@
             <a:pPr algn="ctr">
               <a:buNone/>
             </a:pPr>
-            <a:endParaRPr b="1" lang="en-HK" sz="4400" spc="-1" strike="noStrike">
-              <a:solidFill>
-                <a:srgbClr val="ffff00"/>
-              </a:solidFill>
-              <a:latin typeface="Calibri Light"/>
+            <a:endParaRPr b="0" lang="en-HK" sz="4400" spc="-1" strike="noStrike">
+              <a:latin typeface="Arial"/>
             </a:endParaRPr>
           </a:p>
         </p:txBody>
@@ -3789,7 +3738,7 @@
         <p:spPr>
           <a:xfrm>
             <a:off x="609480" y="1604520"/>
-            <a:ext cx="10972440" cy="3977280"/>
+            <a:ext cx="10973520" cy="3977280"/>
           </a:xfrm>
           <a:prstGeom prst="rect">
             <a:avLst/>
@@ -3848,7 +3797,7 @@
         <p:spPr>
           <a:xfrm>
             <a:off x="609480" y="273600"/>
-            <a:ext cx="10972440" cy="1144800"/>
+            <a:ext cx="10973520" cy="1144800"/>
           </a:xfrm>
           <a:prstGeom prst="rect">
             <a:avLst/>
@@ -3866,11 +3815,8 @@
             <a:pPr algn="ctr">
               <a:buNone/>
             </a:pPr>
-            <a:endParaRPr b="1" lang="en-HK" sz="4400" spc="-1" strike="noStrike">
-              <a:solidFill>
-                <a:srgbClr val="ffff00"/>
-              </a:solidFill>
-              <a:latin typeface="Calibri Light"/>
+            <a:endParaRPr b="0" lang="en-HK" sz="4400" spc="-1" strike="noStrike">
+              <a:latin typeface="Arial"/>
             </a:endParaRPr>
           </a:p>
         </p:txBody>
@@ -3888,7 +3834,7 @@
         <p:spPr>
           <a:xfrm>
             <a:off x="609480" y="1604520"/>
-            <a:ext cx="10972440" cy="3977280"/>
+            <a:ext cx="10973520" cy="3977280"/>
           </a:xfrm>
           <a:prstGeom prst="rect">
             <a:avLst/>
@@ -3904,10 +3850,7 @@
           </a:bodyPr>
           <a:p>
             <a:endParaRPr b="0" lang="en-HK" sz="3200" spc="-1" strike="noStrike">
-              <a:solidFill>
-                <a:srgbClr val="000000"/>
-              </a:solidFill>
-              <a:latin typeface="Calibri"/>
+              <a:latin typeface="Arial"/>
             </a:endParaRPr>
           </a:p>
         </p:txBody>
@@ -3947,7 +3890,7 @@
         <p:spPr>
           <a:xfrm>
             <a:off x="609480" y="273600"/>
-            <a:ext cx="10972440" cy="1144800"/>
+            <a:ext cx="10973520" cy="1144800"/>
           </a:xfrm>
           <a:prstGeom prst="rect">
             <a:avLst/>
@@ -3965,11 +3908,8 @@
             <a:pPr algn="ctr">
               <a:buNone/>
             </a:pPr>
-            <a:endParaRPr b="1" lang="en-HK" sz="4400" spc="-1" strike="noStrike">
-              <a:solidFill>
-                <a:srgbClr val="ffff00"/>
-              </a:solidFill>
-              <a:latin typeface="Calibri Light"/>
+            <a:endParaRPr b="0" lang="en-HK" sz="4400" spc="-1" strike="noStrike">
+              <a:latin typeface="Arial"/>
             </a:endParaRPr>
           </a:p>
         </p:txBody>
@@ -3987,7 +3927,7 @@
         <p:spPr>
           <a:xfrm>
             <a:off x="609480" y="1604520"/>
-            <a:ext cx="5354280" cy="3977280"/>
+            <a:ext cx="5355000" cy="3977280"/>
           </a:xfrm>
           <a:prstGeom prst="rect">
             <a:avLst/>
@@ -4003,10 +3943,7 @@
           </a:bodyPr>
           <a:p>
             <a:endParaRPr b="0" lang="en-HK" sz="3200" spc="-1" strike="noStrike">
-              <a:solidFill>
-                <a:srgbClr val="000000"/>
-              </a:solidFill>
-              <a:latin typeface="Calibri"/>
+              <a:latin typeface="Arial"/>
             </a:endParaRPr>
           </a:p>
         </p:txBody>
@@ -4023,8 +3960,8 @@
         </p:nvSpPr>
         <p:spPr>
           <a:xfrm>
-            <a:off x="6231960" y="1604520"/>
-            <a:ext cx="5354280" cy="3977280"/>
+            <a:off x="6232680" y="1604520"/>
+            <a:ext cx="5355000" cy="3977280"/>
           </a:xfrm>
           <a:prstGeom prst="rect">
             <a:avLst/>
@@ -4040,10 +3977,7 @@
           </a:bodyPr>
           <a:p>
             <a:endParaRPr b="0" lang="en-HK" sz="3200" spc="-1" strike="noStrike">
-              <a:solidFill>
-                <a:srgbClr val="000000"/>
-              </a:solidFill>
-              <a:latin typeface="Calibri"/>
+              <a:latin typeface="Arial"/>
             </a:endParaRPr>
           </a:p>
         </p:txBody>
@@ -4083,7 +4017,7 @@
         <p:spPr>
           <a:xfrm>
             <a:off x="609480" y="273600"/>
-            <a:ext cx="10972440" cy="1144800"/>
+            <a:ext cx="10973520" cy="1144800"/>
           </a:xfrm>
           <a:prstGeom prst="rect">
             <a:avLst/>
@@ -4101,11 +4035,8 @@
             <a:pPr algn="ctr">
               <a:buNone/>
             </a:pPr>
-            <a:endParaRPr b="1" lang="en-HK" sz="4400" spc="-1" strike="noStrike">
-              <a:solidFill>
-                <a:srgbClr val="ffff00"/>
-              </a:solidFill>
-              <a:latin typeface="Calibri Light"/>
+            <a:endParaRPr b="0" lang="en-HK" sz="4400" spc="-1" strike="noStrike">
+              <a:latin typeface="Arial"/>
             </a:endParaRPr>
           </a:p>
         </p:txBody>
@@ -4145,7 +4076,7 @@
         <p:spPr>
           <a:xfrm>
             <a:off x="609480" y="273600"/>
-            <a:ext cx="10972440" cy="5307840"/>
+            <a:ext cx="10973520" cy="5307840"/>
           </a:xfrm>
           <a:prstGeom prst="rect">
             <a:avLst/>
@@ -4204,7 +4135,7 @@
         <p:spPr>
           <a:xfrm>
             <a:off x="609480" y="273600"/>
-            <a:ext cx="10972440" cy="1144800"/>
+            <a:ext cx="10973520" cy="1144800"/>
           </a:xfrm>
           <a:prstGeom prst="rect">
             <a:avLst/>
@@ -4222,11 +4153,8 @@
             <a:pPr algn="ctr">
               <a:buNone/>
             </a:pPr>
-            <a:endParaRPr b="1" lang="en-HK" sz="4400" spc="-1" strike="noStrike">
-              <a:solidFill>
-                <a:srgbClr val="ffff00"/>
-              </a:solidFill>
-              <a:latin typeface="Calibri Light"/>
+            <a:endParaRPr b="0" lang="en-HK" sz="4400" spc="-1" strike="noStrike">
+              <a:latin typeface="Arial"/>
             </a:endParaRPr>
           </a:p>
         </p:txBody>
@@ -4244,7 +4172,7 @@
         <p:spPr>
           <a:xfrm>
             <a:off x="609480" y="1604520"/>
-            <a:ext cx="5354280" cy="1896840"/>
+            <a:ext cx="5355000" cy="1896840"/>
           </a:xfrm>
           <a:prstGeom prst="rect">
             <a:avLst/>
@@ -4260,10 +4188,7 @@
           </a:bodyPr>
           <a:p>
             <a:endParaRPr b="0" lang="en-HK" sz="3200" spc="-1" strike="noStrike">
-              <a:solidFill>
-                <a:srgbClr val="000000"/>
-              </a:solidFill>
-              <a:latin typeface="Calibri"/>
+              <a:latin typeface="Arial"/>
             </a:endParaRPr>
           </a:p>
         </p:txBody>
@@ -4280,8 +4205,8 @@
         </p:nvSpPr>
         <p:spPr>
           <a:xfrm>
-            <a:off x="6231960" y="1604520"/>
-            <a:ext cx="5354280" cy="3977280"/>
+            <a:off x="6232680" y="1604520"/>
+            <a:ext cx="5355000" cy="3977280"/>
           </a:xfrm>
           <a:prstGeom prst="rect">
             <a:avLst/>
@@ -4297,10 +4222,7 @@
           </a:bodyPr>
           <a:p>
             <a:endParaRPr b="0" lang="en-HK" sz="3200" spc="-1" strike="noStrike">
-              <a:solidFill>
-                <a:srgbClr val="000000"/>
-              </a:solidFill>
-              <a:latin typeface="Calibri"/>
+              <a:latin typeface="Arial"/>
             </a:endParaRPr>
           </a:p>
         </p:txBody>
@@ -4318,7 +4240,7 @@
         <p:spPr>
           <a:xfrm>
             <a:off x="609480" y="3682080"/>
-            <a:ext cx="5354280" cy="1896840"/>
+            <a:ext cx="5355000" cy="1896840"/>
           </a:xfrm>
           <a:prstGeom prst="rect">
             <a:avLst/>
@@ -4334,10 +4256,7 @@
           </a:bodyPr>
           <a:p>
             <a:endParaRPr b="0" lang="en-HK" sz="3200" spc="-1" strike="noStrike">
-              <a:solidFill>
-                <a:srgbClr val="000000"/>
-              </a:solidFill>
-              <a:latin typeface="Calibri"/>
+              <a:latin typeface="Arial"/>
             </a:endParaRPr>
           </a:p>
         </p:txBody>
@@ -4377,7 +4296,7 @@
         <p:spPr>
           <a:xfrm>
             <a:off x="609480" y="273600"/>
-            <a:ext cx="10972440" cy="1144800"/>
+            <a:ext cx="10973520" cy="1144800"/>
           </a:xfrm>
           <a:prstGeom prst="rect">
             <a:avLst/>
@@ -4395,11 +4314,8 @@
             <a:pPr algn="ctr">
               <a:buNone/>
             </a:pPr>
-            <a:endParaRPr b="1" lang="en-HK" sz="4400" spc="-1" strike="noStrike">
-              <a:solidFill>
-                <a:srgbClr val="ffff00"/>
-              </a:solidFill>
-              <a:latin typeface="Calibri Light"/>
+            <a:endParaRPr b="0" lang="en-HK" sz="4400" spc="-1" strike="noStrike">
+              <a:latin typeface="Arial"/>
             </a:endParaRPr>
           </a:p>
         </p:txBody>
@@ -4417,7 +4333,7 @@
         <p:spPr>
           <a:xfrm>
             <a:off x="609480" y="1604520"/>
-            <a:ext cx="5354280" cy="3977280"/>
+            <a:ext cx="5355000" cy="3977280"/>
           </a:xfrm>
           <a:prstGeom prst="rect">
             <a:avLst/>
@@ -4433,10 +4349,7 @@
           </a:bodyPr>
           <a:p>
             <a:endParaRPr b="0" lang="en-HK" sz="3200" spc="-1" strike="noStrike">
-              <a:solidFill>
-                <a:srgbClr val="000000"/>
-              </a:solidFill>
-              <a:latin typeface="Calibri"/>
+              <a:latin typeface="Arial"/>
             </a:endParaRPr>
           </a:p>
         </p:txBody>
@@ -4453,8 +4366,8 @@
         </p:nvSpPr>
         <p:spPr>
           <a:xfrm>
-            <a:off x="6231960" y="1604520"/>
-            <a:ext cx="5354280" cy="1896840"/>
+            <a:off x="6232680" y="1604520"/>
+            <a:ext cx="5355000" cy="1896840"/>
           </a:xfrm>
           <a:prstGeom prst="rect">
             <a:avLst/>
@@ -4470,10 +4383,7 @@
           </a:bodyPr>
           <a:p>
             <a:endParaRPr b="0" lang="en-HK" sz="3200" spc="-1" strike="noStrike">
-              <a:solidFill>
-                <a:srgbClr val="000000"/>
-              </a:solidFill>
-              <a:latin typeface="Calibri"/>
+              <a:latin typeface="Arial"/>
             </a:endParaRPr>
           </a:p>
         </p:txBody>
@@ -4490,8 +4400,8 @@
         </p:nvSpPr>
         <p:spPr>
           <a:xfrm>
-            <a:off x="6231960" y="3682080"/>
-            <a:ext cx="5354280" cy="1896840"/>
+            <a:off x="6232680" y="3682080"/>
+            <a:ext cx="5355000" cy="1896840"/>
           </a:xfrm>
           <a:prstGeom prst="rect">
             <a:avLst/>
@@ -4507,10 +4417,7 @@
           </a:bodyPr>
           <a:p>
             <a:endParaRPr b="0" lang="en-HK" sz="3200" spc="-1" strike="noStrike">
-              <a:solidFill>
-                <a:srgbClr val="000000"/>
-              </a:solidFill>
-              <a:latin typeface="Calibri"/>
+              <a:latin typeface="Arial"/>
             </a:endParaRPr>
           </a:p>
         </p:txBody>
@@ -4550,7 +4457,7 @@
         <p:spPr>
           <a:xfrm>
             <a:off x="609480" y="273600"/>
-            <a:ext cx="10972440" cy="1144800"/>
+            <a:ext cx="10973520" cy="1144800"/>
           </a:xfrm>
           <a:prstGeom prst="rect">
             <a:avLst/>
@@ -4568,11 +4475,8 @@
             <a:pPr algn="ctr">
               <a:buNone/>
             </a:pPr>
-            <a:endParaRPr b="1" lang="en-HK" sz="4400" spc="-1" strike="noStrike">
-              <a:solidFill>
-                <a:srgbClr val="ffff00"/>
-              </a:solidFill>
-              <a:latin typeface="Calibri Light"/>
+            <a:endParaRPr b="0" lang="en-HK" sz="4400" spc="-1" strike="noStrike">
+              <a:latin typeface="Arial"/>
             </a:endParaRPr>
           </a:p>
         </p:txBody>
@@ -4590,7 +4494,7 @@
         <p:spPr>
           <a:xfrm>
             <a:off x="609480" y="1604520"/>
-            <a:ext cx="5354280" cy="1896840"/>
+            <a:ext cx="5355000" cy="1896840"/>
           </a:xfrm>
           <a:prstGeom prst="rect">
             <a:avLst/>
@@ -4606,10 +4510,7 @@
           </a:bodyPr>
           <a:p>
             <a:endParaRPr b="0" lang="en-HK" sz="3200" spc="-1" strike="noStrike">
-              <a:solidFill>
-                <a:srgbClr val="000000"/>
-              </a:solidFill>
-              <a:latin typeface="Calibri"/>
+              <a:latin typeface="Arial"/>
             </a:endParaRPr>
           </a:p>
         </p:txBody>
@@ -4626,8 +4527,8 @@
         </p:nvSpPr>
         <p:spPr>
           <a:xfrm>
-            <a:off x="6231960" y="1604520"/>
-            <a:ext cx="5354280" cy="1896840"/>
+            <a:off x="6232680" y="1604520"/>
+            <a:ext cx="5355000" cy="1896840"/>
           </a:xfrm>
           <a:prstGeom prst="rect">
             <a:avLst/>
@@ -4643,10 +4544,7 @@
           </a:bodyPr>
           <a:p>
             <a:endParaRPr b="0" lang="en-HK" sz="3200" spc="-1" strike="noStrike">
-              <a:solidFill>
-                <a:srgbClr val="000000"/>
-              </a:solidFill>
-              <a:latin typeface="Calibri"/>
+              <a:latin typeface="Arial"/>
             </a:endParaRPr>
           </a:p>
         </p:txBody>
@@ -4664,7 +4562,7 @@
         <p:spPr>
           <a:xfrm>
             <a:off x="609480" y="3682080"/>
-            <a:ext cx="10972440" cy="1896840"/>
+            <a:ext cx="10973520" cy="1896840"/>
           </a:xfrm>
           <a:prstGeom prst="rect">
             <a:avLst/>
@@ -4680,10 +4578,7 @@
           </a:bodyPr>
           <a:p>
             <a:endParaRPr b="0" lang="en-HK" sz="3200" spc="-1" strike="noStrike">
-              <a:solidFill>
-                <a:srgbClr val="000000"/>
-              </a:solidFill>
-              <a:latin typeface="Calibri"/>
+              <a:latin typeface="Arial"/>
             </a:endParaRPr>
           </a:p>
         </p:txBody>
@@ -4699,7 +4594,7 @@
     <p:bg>
       <p:bgPr>
         <a:solidFill>
-          <a:srgbClr val="ffffff"/>
+          <a:srgbClr val="000000"/>
         </a:solidFill>
       </p:bgPr>
     </p:bg>
@@ -4730,7 +4625,7 @@
         <p:spPr>
           <a:xfrm>
             <a:off x="609480" y="273600"/>
-            <a:ext cx="10972440" cy="1144800"/>
+            <a:ext cx="10973520" cy="1144800"/>
           </a:xfrm>
           <a:prstGeom prst="rect">
             <a:avLst/>
@@ -4749,19 +4644,13 @@
               <a:buNone/>
             </a:pPr>
             <a:r>
-              <a:rPr b="1" lang="en-HK" sz="4400" spc="-1" strike="noStrike">
-                <a:solidFill>
-                  <a:srgbClr val="ffff00"/>
-                </a:solidFill>
-                <a:latin typeface="Calibri Light"/>
+              <a:rPr b="0" lang="en-HK" sz="4400" spc="-1" strike="noStrike">
+                <a:latin typeface="Arial"/>
               </a:rPr>
               <a:t>Click to edit the title text format</a:t>
             </a:r>
-            <a:endParaRPr b="1" lang="en-HK" sz="4400" spc="-1" strike="noStrike">
-              <a:solidFill>
-                <a:srgbClr val="ffff00"/>
-              </a:solidFill>
-              <a:latin typeface="Calibri Light"/>
+            <a:endParaRPr b="0" lang="en-HK" sz="4400" spc="-1" strike="noStrike">
+              <a:latin typeface="Arial"/>
             </a:endParaRPr>
           </a:p>
         </p:txBody>
@@ -4779,7 +4668,7 @@
         <p:spPr>
           <a:xfrm>
             <a:off x="609480" y="1604520"/>
-            <a:ext cx="10972440" cy="3977280"/>
+            <a:ext cx="10973520" cy="3977280"/>
           </a:xfrm>
           <a:prstGeom prst="rect">
             <a:avLst/>
@@ -4799,7 +4688,7 @@
                 <a:spcPts val="1417"/>
               </a:spcBef>
               <a:buClr>
-                <a:srgbClr val="000000"/>
+                <a:srgbClr val="ffffff"/>
               </a:buClr>
               <a:buSzPct val="45000"/>
               <a:buFont typeface="Wingdings" charset="2"/>
@@ -4807,18 +4696,12 @@
             </a:pPr>
             <a:r>
               <a:rPr b="0" lang="en-HK" sz="3200" spc="-1" strike="noStrike">
-                <a:solidFill>
-                  <a:srgbClr val="000000"/>
-                </a:solidFill>
-                <a:latin typeface="Calibri"/>
+                <a:latin typeface="Arial"/>
               </a:rPr>
               <a:t>Click to edit the outline text format</a:t>
             </a:r>
             <a:endParaRPr b="0" lang="en-HK" sz="3200" spc="-1" strike="noStrike">
-              <a:solidFill>
-                <a:srgbClr val="000000"/>
-              </a:solidFill>
-              <a:latin typeface="Calibri"/>
+              <a:latin typeface="Arial"/>
             </a:endParaRPr>
           </a:p>
           <a:p>
@@ -4827,26 +4710,20 @@
                 <a:spcPts val="1134"/>
               </a:spcBef>
               <a:buClr>
-                <a:srgbClr val="000000"/>
+                <a:srgbClr val="ffffff"/>
               </a:buClr>
               <a:buSzPct val="75000"/>
               <a:buFont typeface="Symbol" charset="2"/>
               <a:buChar char=""/>
             </a:pPr>
             <a:r>
-              <a:rPr b="0" lang="en-HK" sz="2400" spc="-1" strike="noStrike">
-                <a:solidFill>
-                  <a:srgbClr val="000000"/>
-                </a:solidFill>
-                <a:latin typeface="Calibri"/>
+              <a:rPr b="0" lang="en-HK" sz="2800" spc="-1" strike="noStrike">
+                <a:latin typeface="Arial"/>
               </a:rPr>
               <a:t>Second Outline Level</a:t>
             </a:r>
-            <a:endParaRPr b="0" lang="en-HK" sz="2400" spc="-1" strike="noStrike">
-              <a:solidFill>
-                <a:srgbClr val="000000"/>
-              </a:solidFill>
-              <a:latin typeface="Calibri"/>
+            <a:endParaRPr b="0" lang="en-HK" sz="2800" spc="-1" strike="noStrike">
+              <a:latin typeface="Arial"/>
             </a:endParaRPr>
           </a:p>
           <a:p>
@@ -4855,26 +4732,20 @@
                 <a:spcPts val="850"/>
               </a:spcBef>
               <a:buClr>
-                <a:srgbClr val="000000"/>
+                <a:srgbClr val="ffffff"/>
               </a:buClr>
               <a:buSzPct val="45000"/>
               <a:buFont typeface="Wingdings" charset="2"/>
               <a:buChar char=""/>
             </a:pPr>
             <a:r>
-              <a:rPr b="0" lang="en-HK" sz="2000" spc="-1" strike="noStrike">
-                <a:solidFill>
-                  <a:srgbClr val="000000"/>
-                </a:solidFill>
-                <a:latin typeface="Calibri"/>
+              <a:rPr b="0" lang="en-HK" sz="2400" spc="-1" strike="noStrike">
+                <a:latin typeface="Arial"/>
               </a:rPr>
               <a:t>Third Outline Level</a:t>
             </a:r>
-            <a:endParaRPr b="0" lang="en-HK" sz="2000" spc="-1" strike="noStrike">
-              <a:solidFill>
-                <a:srgbClr val="000000"/>
-              </a:solidFill>
-              <a:latin typeface="Calibri"/>
+            <a:endParaRPr b="0" lang="en-HK" sz="2400" spc="-1" strike="noStrike">
+              <a:latin typeface="Arial"/>
             </a:endParaRPr>
           </a:p>
           <a:p>
@@ -4883,7 +4754,7 @@
                 <a:spcPts val="567"/>
               </a:spcBef>
               <a:buClr>
-                <a:srgbClr val="000000"/>
+                <a:srgbClr val="ffffff"/>
               </a:buClr>
               <a:buSzPct val="75000"/>
               <a:buFont typeface="Symbol" charset="2"/>
@@ -4891,18 +4762,12 @@
             </a:pPr>
             <a:r>
               <a:rPr b="0" lang="en-HK" sz="2000" spc="-1" strike="noStrike">
-                <a:solidFill>
-                  <a:srgbClr val="000000"/>
-                </a:solidFill>
-                <a:latin typeface="Calibri"/>
+                <a:latin typeface="Arial"/>
               </a:rPr>
               <a:t>Fourth Outline Level</a:t>
             </a:r>
             <a:endParaRPr b="0" lang="en-HK" sz="2000" spc="-1" strike="noStrike">
-              <a:solidFill>
-                <a:srgbClr val="000000"/>
-              </a:solidFill>
-              <a:latin typeface="Calibri"/>
+              <a:latin typeface="Arial"/>
             </a:endParaRPr>
           </a:p>
           <a:p>
@@ -4911,7 +4776,7 @@
                 <a:spcPts val="283"/>
               </a:spcBef>
               <a:buClr>
-                <a:srgbClr val="000000"/>
+                <a:srgbClr val="ffffff"/>
               </a:buClr>
               <a:buSzPct val="45000"/>
               <a:buFont typeface="Wingdings" charset="2"/>
@@ -4919,18 +4784,12 @@
             </a:pPr>
             <a:r>
               <a:rPr b="0" lang="en-HK" sz="2000" spc="-1" strike="noStrike">
-                <a:solidFill>
-                  <a:srgbClr val="000000"/>
-                </a:solidFill>
-                <a:latin typeface="Calibri"/>
+                <a:latin typeface="Arial"/>
               </a:rPr>
               <a:t>Fifth Outline Level</a:t>
             </a:r>
             <a:endParaRPr b="0" lang="en-HK" sz="2000" spc="-1" strike="noStrike">
-              <a:solidFill>
-                <a:srgbClr val="000000"/>
-              </a:solidFill>
-              <a:latin typeface="Calibri"/>
+              <a:latin typeface="Arial"/>
             </a:endParaRPr>
           </a:p>
           <a:p>
@@ -4939,7 +4798,7 @@
                 <a:spcPts val="283"/>
               </a:spcBef>
               <a:buClr>
-                <a:srgbClr val="000000"/>
+                <a:srgbClr val="ffffff"/>
               </a:buClr>
               <a:buSzPct val="45000"/>
               <a:buFont typeface="Wingdings" charset="2"/>
@@ -4947,18 +4806,12 @@
             </a:pPr>
             <a:r>
               <a:rPr b="0" lang="en-HK" sz="2000" spc="-1" strike="noStrike">
-                <a:solidFill>
-                  <a:srgbClr val="000000"/>
-                </a:solidFill>
-                <a:latin typeface="Calibri"/>
+                <a:latin typeface="Arial"/>
               </a:rPr>
               <a:t>Sixth Outline Level</a:t>
             </a:r>
             <a:endParaRPr b="0" lang="en-HK" sz="2000" spc="-1" strike="noStrike">
-              <a:solidFill>
-                <a:srgbClr val="000000"/>
-              </a:solidFill>
-              <a:latin typeface="Calibri"/>
+              <a:latin typeface="Arial"/>
             </a:endParaRPr>
           </a:p>
           <a:p>
@@ -4967,7 +4820,7 @@
                 <a:spcPts val="283"/>
               </a:spcBef>
               <a:buClr>
-                <a:srgbClr val="000000"/>
+                <a:srgbClr val="ffffff"/>
               </a:buClr>
               <a:buSzPct val="45000"/>
               <a:buFont typeface="Wingdings" charset="2"/>
@@ -4975,18 +4828,12 @@
             </a:pPr>
             <a:r>
               <a:rPr b="0" lang="en-HK" sz="2000" spc="-1" strike="noStrike">
-                <a:solidFill>
-                  <a:srgbClr val="000000"/>
-                </a:solidFill>
-                <a:latin typeface="Calibri"/>
+                <a:latin typeface="Arial"/>
               </a:rPr>
               <a:t>Seventh Outline Level</a:t>
             </a:r>
             <a:endParaRPr b="0" lang="en-HK" sz="2000" spc="-1" strike="noStrike">
-              <a:solidFill>
-                <a:srgbClr val="000000"/>
-              </a:solidFill>
-              <a:latin typeface="Calibri"/>
+              <a:latin typeface="Arial"/>
             </a:endParaRPr>
           </a:p>
         </p:txBody>
@@ -5044,7 +4891,7 @@
         <p:spPr>
           <a:xfrm>
             <a:off x="0" y="0"/>
-            <a:ext cx="12191760" cy="6857640"/>
+            <a:ext cx="12192480" cy="6857280"/>
           </a:xfrm>
           <a:prstGeom prst="roundRect">
             <a:avLst>
@@ -5076,7 +4923,7 @@
         <p:spPr>
           <a:xfrm>
             <a:off x="0" y="0"/>
-            <a:ext cx="12191760" cy="6857640"/>
+            <a:ext cx="12192480" cy="6857280"/>
           </a:xfrm>
           <a:custGeom>
             <a:avLst/>
@@ -5138,8 +4985,8 @@
         </p:nvSpPr>
         <p:spPr>
           <a:xfrm>
-            <a:off x="5667480" y="1276200"/>
-            <a:ext cx="856800" cy="571320"/>
+            <a:off x="5667840" y="1276200"/>
+            <a:ext cx="856440" cy="570960"/>
           </a:xfrm>
           <a:prstGeom prst="rect">
             <a:avLst/>
@@ -5191,7 +5038,7 @@
         <p:spPr>
           <a:xfrm>
             <a:off x="3164400" y="2305080"/>
-            <a:ext cx="5866920" cy="914040"/>
+            <a:ext cx="5866920" cy="913680"/>
           </a:xfrm>
           <a:prstGeom prst="rect">
             <a:avLst/>
@@ -5219,36 +5066,21 @@
               <a:buNone/>
             </a:pPr>
             <a:r>
-              <a:rPr b="1" lang="en-US" sz="7200" spc="-1" strike="noStrike">
-                <a:solidFill>
-                  <a:srgbClr val="ffcd75"/>
-                </a:solidFill>
+              <a:rPr b="0" lang="en-US" sz="4000" spc="-1" strike="noStrike" u="sng">
+                <a:solidFill>
+                  <a:srgbClr val="ffff00"/>
+                </a:solidFill>
+                <a:uFillTx/>
                 <a:latin typeface="Jersey 20 Charted"/>
                 <a:ea typeface="Jersey 20 Charted"/>
               </a:rPr>
-              <a:t>THE </a:t>
-            </a:r>
-            <a:r>
-              <a:rPr b="1" lang="en-US" sz="7200" spc="-1" strike="noStrike">
-                <a:solidFill>
-                  <a:srgbClr val="000000"/>
-                </a:solidFill>
-                <a:latin typeface="Jersey 20 Charted"/>
-                <a:ea typeface="Jersey 20 Charted"/>
-              </a:rPr>
-              <a:t>GOLDEN</a:t>
-            </a:r>
-            <a:r>
-              <a:rPr b="1" lang="en-US" sz="7200" spc="-1" strike="noStrike">
-                <a:solidFill>
-                  <a:srgbClr val="ffcd75"/>
-                </a:solidFill>
-                <a:latin typeface="Jersey 20 Charted"/>
-                <a:ea typeface="Jersey 20 Charted"/>
-              </a:rPr>
-              <a:t> AGE</a:t>
-            </a:r>
-            <a:endParaRPr b="0" lang="en-HK" sz="7200" spc="-1" strike="noStrike">
+              <a:t>THE GOLDEN AGE</a:t>
+            </a:r>
+            <a:endParaRPr b="0" lang="en-HK" sz="4000" spc="-1" strike="noStrike" u="sng">
+              <a:solidFill>
+                <a:srgbClr val="ffff00"/>
+              </a:solidFill>
+              <a:uFillTx/>
               <a:latin typeface="Arial"/>
             </a:endParaRPr>
           </a:p>
@@ -5262,8 +5094,8 @@
         </p:nvSpPr>
         <p:spPr>
           <a:xfrm>
-            <a:off x="4154040" y="3448080"/>
-            <a:ext cx="3885840" cy="571320"/>
+            <a:off x="4154400" y="3448080"/>
+            <a:ext cx="3885840" cy="570960"/>
           </a:xfrm>
           <a:prstGeom prst="rect">
             <a:avLst/>
@@ -5301,11 +5133,7 @@
               </a:rPr>
               <a:t>OF ARCADE GAMES</a:t>
             </a:r>
-            <a:endParaRPr b="0" lang="en-HK" sz="4000" spc="-1" strike="noStrike" u="sng">
-              <a:solidFill>
-                <a:srgbClr val="ffff00"/>
-              </a:solidFill>
-              <a:uFillTx/>
+            <a:endParaRPr b="0" lang="en-HK" sz="4000" spc="-1" strike="noStrike">
               <a:latin typeface="Arial"/>
             </a:endParaRPr>
           </a:p>
@@ -5319,8 +5147,8 @@
         </p:nvSpPr>
         <p:spPr>
           <a:xfrm>
-            <a:off x="5486400" y="4324320"/>
-            <a:ext cx="1218960" cy="75960"/>
+            <a:off x="5486760" y="4324320"/>
+            <a:ext cx="1218600" cy="75600"/>
           </a:xfrm>
           <a:custGeom>
             <a:avLst/>
@@ -5370,8 +5198,8 @@
         </p:nvSpPr>
         <p:spPr>
           <a:xfrm>
-            <a:off x="5400720" y="4705200"/>
-            <a:ext cx="1390320" cy="380520"/>
+            <a:off x="5401080" y="4705200"/>
+            <a:ext cx="1389960" cy="380160"/>
           </a:xfrm>
           <a:prstGeom prst="rect">
             <a:avLst/>
@@ -5422,8 +5250,8 @@
         </p:nvSpPr>
         <p:spPr>
           <a:xfrm>
-            <a:off x="4384080" y="5238720"/>
-            <a:ext cx="3419280" cy="342720"/>
+            <a:off x="4384440" y="5238720"/>
+            <a:ext cx="3419280" cy="342360"/>
           </a:xfrm>
           <a:prstGeom prst="rect">
             <a:avLst/>
@@ -5451,19 +5279,21 @@
               <a:buNone/>
             </a:pPr>
             <a:r>
-              <a:rPr b="0" lang="en-US" sz="4000" spc="-1" strike="noStrike">
+              <a:rPr b="1" lang="en-US" sz="4000" spc="-1" strike="noStrike" u="sng">
                 <a:solidFill>
                   <a:srgbClr val="ffff00"/>
                 </a:solidFill>
+                <a:uFillTx/>
                 <a:latin typeface="Jersey 15"/>
                 <a:ea typeface="Jersey 15"/>
               </a:rPr>
               <a:t>When Quarters Ruled the World</a:t>
             </a:r>
-            <a:endParaRPr b="0" lang="en-HK" sz="4000" spc="-1" strike="noStrike">
+            <a:endParaRPr b="1" lang="en-HK" sz="4000" spc="-1" strike="noStrike" u="sng">
               <a:solidFill>
                 <a:srgbClr val="ffff00"/>
               </a:solidFill>
+              <a:uFillTx/>
               <a:latin typeface="Arial"/>
             </a:endParaRPr>
           </a:p>
@@ -5477,8 +5307,8 @@
         </p:nvSpPr>
         <p:spPr>
           <a:xfrm>
-            <a:off x="5715000" y="5867280"/>
-            <a:ext cx="151920" cy="151920"/>
+            <a:off x="5715360" y="5867280"/>
+            <a:ext cx="151560" cy="151560"/>
           </a:xfrm>
           <a:custGeom>
             <a:avLst/>
@@ -5528,8 +5358,8 @@
         </p:nvSpPr>
         <p:spPr>
           <a:xfrm>
-            <a:off x="6019920" y="5867280"/>
-            <a:ext cx="151920" cy="151920"/>
+            <a:off x="6020280" y="5867280"/>
+            <a:ext cx="151560" cy="151560"/>
           </a:xfrm>
           <a:custGeom>
             <a:avLst/>
@@ -5579,8 +5409,8 @@
         </p:nvSpPr>
         <p:spPr>
           <a:xfrm>
-            <a:off x="6324480" y="5867280"/>
-            <a:ext cx="151920" cy="151920"/>
+            <a:off x="6324840" y="5867280"/>
+            <a:ext cx="151560" cy="151560"/>
           </a:xfrm>
           <a:custGeom>
             <a:avLst/>
@@ -5663,7 +5493,7 @@
         <p:spPr>
           <a:xfrm>
             <a:off x="0" y="0"/>
-            <a:ext cx="12191760" cy="6857640"/>
+            <a:ext cx="12192480" cy="6857280"/>
           </a:xfrm>
           <a:custGeom>
             <a:avLst/>
@@ -5726,7 +5556,7 @@
         <p:spPr>
           <a:xfrm>
             <a:off x="380880" y="380880"/>
-            <a:ext cx="11658240" cy="456840"/>
+            <a:ext cx="11658960" cy="456480"/>
           </a:xfrm>
           <a:prstGeom prst="rect">
             <a:avLst/>
@@ -5778,7 +5608,7 @@
         <p:spPr>
           <a:xfrm>
             <a:off x="380880" y="952560"/>
-            <a:ext cx="11544120" cy="304560"/>
+            <a:ext cx="11544840" cy="304200"/>
           </a:xfrm>
           <a:prstGeom prst="rect">
             <a:avLst/>
@@ -5830,7 +5660,7 @@
         <p:spPr>
           <a:xfrm>
             <a:off x="380880" y="1371600"/>
-            <a:ext cx="914040" cy="37800"/>
+            <a:ext cx="913680" cy="37440"/>
           </a:xfrm>
           <a:custGeom>
             <a:avLst/>
@@ -5881,7 +5711,7 @@
         <p:spPr>
           <a:xfrm>
             <a:off x="395280" y="1576440"/>
-            <a:ext cx="5609880" cy="752040"/>
+            <a:ext cx="5609880" cy="751680"/>
           </a:xfrm>
           <a:custGeom>
             <a:avLst/>
@@ -5937,7 +5767,7 @@
         <p:spPr>
           <a:xfrm>
             <a:off x="523800" y="1762200"/>
-            <a:ext cx="399600" cy="380520"/>
+            <a:ext cx="399240" cy="380160"/>
           </a:xfrm>
           <a:prstGeom prst="rect">
             <a:avLst/>
@@ -5989,7 +5819,7 @@
         <p:spPr>
           <a:xfrm>
             <a:off x="905040" y="1704960"/>
-            <a:ext cx="5067000" cy="266400"/>
+            <a:ext cx="5067000" cy="266040"/>
           </a:xfrm>
           <a:prstGeom prst="rect">
             <a:avLst/>
@@ -6041,7 +5871,7 @@
         <p:spPr>
           <a:xfrm>
             <a:off x="905040" y="1971720"/>
-            <a:ext cx="5047920" cy="228240"/>
+            <a:ext cx="5047920" cy="227880"/>
           </a:xfrm>
           <a:prstGeom prst="rect">
             <a:avLst/>
@@ -6095,7 +5925,7 @@
         <p:spPr>
           <a:xfrm>
             <a:off x="395280" y="2471760"/>
-            <a:ext cx="5609880" cy="752040"/>
+            <a:ext cx="5609880" cy="751680"/>
           </a:xfrm>
           <a:custGeom>
             <a:avLst/>
@@ -6151,7 +5981,7 @@
         <p:spPr>
           <a:xfrm>
             <a:off x="523800" y="2657520"/>
-            <a:ext cx="466200" cy="380520"/>
+            <a:ext cx="465840" cy="380160"/>
           </a:xfrm>
           <a:prstGeom prst="rect">
             <a:avLst/>
@@ -6203,7 +6033,7 @@
         <p:spPr>
           <a:xfrm>
             <a:off x="968400" y="2600280"/>
-            <a:ext cx="5000400" cy="266400"/>
+            <a:ext cx="5000400" cy="266040"/>
           </a:xfrm>
           <a:prstGeom prst="rect">
             <a:avLst/>
@@ -6255,7 +6085,7 @@
         <p:spPr>
           <a:xfrm>
             <a:off x="968400" y="2867040"/>
-            <a:ext cx="4981320" cy="228240"/>
+            <a:ext cx="4981320" cy="227880"/>
           </a:xfrm>
           <a:prstGeom prst="rect">
             <a:avLst/>
@@ -6309,7 +6139,7 @@
         <p:spPr>
           <a:xfrm>
             <a:off x="395280" y="3367080"/>
-            <a:ext cx="5609880" cy="752040"/>
+            <a:ext cx="5609880" cy="751680"/>
           </a:xfrm>
           <a:custGeom>
             <a:avLst/>
@@ -6365,7 +6195,7 @@
         <p:spPr>
           <a:xfrm>
             <a:off x="523800" y="3552840"/>
-            <a:ext cx="466200" cy="380520"/>
+            <a:ext cx="465840" cy="380160"/>
           </a:xfrm>
           <a:prstGeom prst="rect">
             <a:avLst/>
@@ -6417,7 +6247,7 @@
         <p:spPr>
           <a:xfrm>
             <a:off x="968400" y="3495600"/>
-            <a:ext cx="5000400" cy="266400"/>
+            <a:ext cx="5000400" cy="266040"/>
           </a:xfrm>
           <a:prstGeom prst="rect">
             <a:avLst/>
@@ -6469,7 +6299,7 @@
         <p:spPr>
           <a:xfrm>
             <a:off x="968400" y="3762360"/>
-            <a:ext cx="4981320" cy="228240"/>
+            <a:ext cx="4981320" cy="227880"/>
           </a:xfrm>
           <a:prstGeom prst="rect">
             <a:avLst/>
@@ -6523,7 +6353,7 @@
         <p:spPr>
           <a:xfrm>
             <a:off x="395280" y="4262400"/>
-            <a:ext cx="5609880" cy="752040"/>
+            <a:ext cx="5609880" cy="751680"/>
           </a:xfrm>
           <a:custGeom>
             <a:avLst/>
@@ -6579,7 +6409,7 @@
         <p:spPr>
           <a:xfrm>
             <a:off x="523800" y="4448160"/>
-            <a:ext cx="447480" cy="380520"/>
+            <a:ext cx="447120" cy="380160"/>
           </a:xfrm>
           <a:prstGeom prst="rect">
             <a:avLst/>
@@ -6631,7 +6461,7 @@
         <p:spPr>
           <a:xfrm>
             <a:off x="955800" y="4390920"/>
-            <a:ext cx="5019480" cy="266400"/>
+            <a:ext cx="5019480" cy="266040"/>
           </a:xfrm>
           <a:prstGeom prst="rect">
             <a:avLst/>
@@ -6683,7 +6513,7 @@
         <p:spPr>
           <a:xfrm>
             <a:off x="955800" y="4657680"/>
-            <a:ext cx="5000400" cy="228240"/>
+            <a:ext cx="5000400" cy="227880"/>
           </a:xfrm>
           <a:prstGeom prst="rect">
             <a:avLst/>
@@ -6737,7 +6567,7 @@
         <p:spPr>
           <a:xfrm>
             <a:off x="395280" y="5157720"/>
-            <a:ext cx="5609880" cy="752040"/>
+            <a:ext cx="5609880" cy="751680"/>
           </a:xfrm>
           <a:custGeom>
             <a:avLst/>
@@ -6793,7 +6623,7 @@
         <p:spPr>
           <a:xfrm>
             <a:off x="523800" y="5343480"/>
-            <a:ext cx="447480" cy="380520"/>
+            <a:ext cx="447120" cy="380160"/>
           </a:xfrm>
           <a:prstGeom prst="rect">
             <a:avLst/>
@@ -6845,7 +6675,7 @@
         <p:spPr>
           <a:xfrm>
             <a:off x="955800" y="5286240"/>
-            <a:ext cx="5019480" cy="266400"/>
+            <a:ext cx="5019480" cy="266040"/>
           </a:xfrm>
           <a:prstGeom prst="rect">
             <a:avLst/>
@@ -6897,7 +6727,7 @@
         <p:spPr>
           <a:xfrm>
             <a:off x="955800" y="5553000"/>
-            <a:ext cx="5000400" cy="228240"/>
+            <a:ext cx="5000400" cy="227880"/>
           </a:xfrm>
           <a:prstGeom prst="rect">
             <a:avLst/>
@@ -6950,8 +6780,8 @@
         </p:nvSpPr>
         <p:spPr>
           <a:xfrm>
-            <a:off x="6186600" y="1576440"/>
-            <a:ext cx="5609880" cy="752040"/>
+            <a:off x="6186960" y="1576440"/>
+            <a:ext cx="5609880" cy="751680"/>
           </a:xfrm>
           <a:custGeom>
             <a:avLst/>
@@ -7006,8 +6836,8 @@
         </p:nvSpPr>
         <p:spPr>
           <a:xfrm>
-            <a:off x="6315120" y="1762200"/>
-            <a:ext cx="466200" cy="380520"/>
+            <a:off x="6315480" y="1762200"/>
+            <a:ext cx="465840" cy="380160"/>
           </a:xfrm>
           <a:prstGeom prst="rect">
             <a:avLst/>
@@ -7058,8 +6888,8 @@
         </p:nvSpPr>
         <p:spPr>
           <a:xfrm>
-            <a:off x="6759720" y="1704960"/>
-            <a:ext cx="5000400" cy="266400"/>
+            <a:off x="6760080" y="1704960"/>
+            <a:ext cx="5000400" cy="266040"/>
           </a:xfrm>
           <a:prstGeom prst="rect">
             <a:avLst/>
@@ -7110,8 +6940,8 @@
         </p:nvSpPr>
         <p:spPr>
           <a:xfrm>
-            <a:off x="6759720" y="1971720"/>
-            <a:ext cx="4981320" cy="228240"/>
+            <a:off x="6760080" y="1971720"/>
+            <a:ext cx="4981320" cy="227880"/>
           </a:xfrm>
           <a:prstGeom prst="rect">
             <a:avLst/>
@@ -7164,8 +6994,8 @@
         </p:nvSpPr>
         <p:spPr>
           <a:xfrm>
-            <a:off x="6186600" y="2471760"/>
-            <a:ext cx="5609880" cy="752040"/>
+            <a:off x="6186960" y="2471760"/>
+            <a:ext cx="5609880" cy="751680"/>
           </a:xfrm>
           <a:custGeom>
             <a:avLst/>
@@ -7220,8 +7050,8 @@
         </p:nvSpPr>
         <p:spPr>
           <a:xfrm>
-            <a:off x="6315120" y="2657520"/>
-            <a:ext cx="447480" cy="380520"/>
+            <a:off x="6315480" y="2657520"/>
+            <a:ext cx="447120" cy="380160"/>
           </a:xfrm>
           <a:prstGeom prst="rect">
             <a:avLst/>
@@ -7272,8 +7102,8 @@
         </p:nvSpPr>
         <p:spPr>
           <a:xfrm>
-            <a:off x="6746760" y="2600280"/>
-            <a:ext cx="5019480" cy="266400"/>
+            <a:off x="6747120" y="2600280"/>
+            <a:ext cx="5019480" cy="266040"/>
           </a:xfrm>
           <a:prstGeom prst="rect">
             <a:avLst/>
@@ -7324,8 +7154,8 @@
         </p:nvSpPr>
         <p:spPr>
           <a:xfrm>
-            <a:off x="6746760" y="2867040"/>
-            <a:ext cx="5000400" cy="228240"/>
+            <a:off x="6747120" y="2867040"/>
+            <a:ext cx="5000400" cy="227880"/>
           </a:xfrm>
           <a:prstGeom prst="rect">
             <a:avLst/>
@@ -7378,8 +7208,8 @@
         </p:nvSpPr>
         <p:spPr>
           <a:xfrm>
-            <a:off x="6186600" y="3367080"/>
-            <a:ext cx="5609880" cy="752040"/>
+            <a:off x="6186960" y="3367080"/>
+            <a:ext cx="5609880" cy="751680"/>
           </a:xfrm>
           <a:custGeom>
             <a:avLst/>
@@ -7434,8 +7264,8 @@
         </p:nvSpPr>
         <p:spPr>
           <a:xfrm>
-            <a:off x="6315120" y="3552840"/>
-            <a:ext cx="466200" cy="380520"/>
+            <a:off x="6315480" y="3552840"/>
+            <a:ext cx="465840" cy="380160"/>
           </a:xfrm>
           <a:prstGeom prst="rect">
             <a:avLst/>
@@ -7486,8 +7316,8 @@
         </p:nvSpPr>
         <p:spPr>
           <a:xfrm>
-            <a:off x="6759720" y="3495600"/>
-            <a:ext cx="5000400" cy="266400"/>
+            <a:off x="6760080" y="3495600"/>
+            <a:ext cx="5000400" cy="266040"/>
           </a:xfrm>
           <a:prstGeom prst="rect">
             <a:avLst/>
@@ -7538,8 +7368,8 @@
         </p:nvSpPr>
         <p:spPr>
           <a:xfrm>
-            <a:off x="6759720" y="3762360"/>
-            <a:ext cx="4981320" cy="228240"/>
+            <a:off x="6760080" y="3762360"/>
+            <a:ext cx="4981320" cy="227880"/>
           </a:xfrm>
           <a:prstGeom prst="rect">
             <a:avLst/>
@@ -7592,8 +7422,8 @@
         </p:nvSpPr>
         <p:spPr>
           <a:xfrm>
-            <a:off x="6186600" y="4262400"/>
-            <a:ext cx="5609880" cy="752040"/>
+            <a:off x="6186960" y="4262400"/>
+            <a:ext cx="5609880" cy="751680"/>
           </a:xfrm>
           <a:custGeom>
             <a:avLst/>
@@ -7648,8 +7478,8 @@
         </p:nvSpPr>
         <p:spPr>
           <a:xfrm>
-            <a:off x="6315120" y="4448160"/>
-            <a:ext cx="466200" cy="380520"/>
+            <a:off x="6315480" y="4448160"/>
+            <a:ext cx="465840" cy="380160"/>
           </a:xfrm>
           <a:prstGeom prst="rect">
             <a:avLst/>
@@ -7700,8 +7530,8 @@
         </p:nvSpPr>
         <p:spPr>
           <a:xfrm>
-            <a:off x="6759720" y="4390920"/>
-            <a:ext cx="5000400" cy="266400"/>
+            <a:off x="6760080" y="4390920"/>
+            <a:ext cx="5000400" cy="266040"/>
           </a:xfrm>
           <a:prstGeom prst="rect">
             <a:avLst/>
@@ -7752,8 +7582,8 @@
         </p:nvSpPr>
         <p:spPr>
           <a:xfrm>
-            <a:off x="6759720" y="4657680"/>
-            <a:ext cx="4981320" cy="228240"/>
+            <a:off x="6760080" y="4657680"/>
+            <a:ext cx="4981320" cy="227880"/>
           </a:xfrm>
           <a:prstGeom prst="rect">
             <a:avLst/>
@@ -7806,8 +7636,8 @@
         </p:nvSpPr>
         <p:spPr>
           <a:xfrm>
-            <a:off x="6186600" y="5157720"/>
-            <a:ext cx="5609880" cy="752040"/>
+            <a:off x="6186960" y="5157720"/>
+            <a:ext cx="5609880" cy="751680"/>
           </a:xfrm>
           <a:custGeom>
             <a:avLst/>
@@ -7862,8 +7692,8 @@
         </p:nvSpPr>
         <p:spPr>
           <a:xfrm>
-            <a:off x="6315120" y="5343480"/>
-            <a:ext cx="399600" cy="380520"/>
+            <a:off x="6315480" y="5343480"/>
+            <a:ext cx="399240" cy="380160"/>
           </a:xfrm>
           <a:prstGeom prst="rect">
             <a:avLst/>
@@ -7914,8 +7744,8 @@
         </p:nvSpPr>
         <p:spPr>
           <a:xfrm>
-            <a:off x="6696000" y="5286240"/>
-            <a:ext cx="5067000" cy="266400"/>
+            <a:off x="6696360" y="5286240"/>
+            <a:ext cx="5067000" cy="266040"/>
           </a:xfrm>
           <a:prstGeom prst="rect">
             <a:avLst/>
@@ -7966,8 +7796,8 @@
         </p:nvSpPr>
         <p:spPr>
           <a:xfrm>
-            <a:off x="6696000" y="5553000"/>
-            <a:ext cx="5047920" cy="228240"/>
+            <a:off x="6696360" y="5553000"/>
+            <a:ext cx="5047920" cy="227880"/>
           </a:xfrm>
           <a:prstGeom prst="rect">
             <a:avLst/>
@@ -8021,7 +7851,7 @@
         <p:spPr>
           <a:xfrm>
             <a:off x="395280" y="6091200"/>
-            <a:ext cx="11401200" cy="599760"/>
+            <a:ext cx="11401920" cy="599400"/>
           </a:xfrm>
           <a:custGeom>
             <a:avLst/>
@@ -8077,7 +7907,7 @@
         <p:spPr>
           <a:xfrm>
             <a:off x="514440" y="6257880"/>
-            <a:ext cx="11162880" cy="266400"/>
+            <a:ext cx="11163600" cy="266040"/>
           </a:xfrm>
           <a:prstGeom prst="rect">
             <a:avLst/>
@@ -8181,7 +8011,7 @@
         <p:spPr>
           <a:xfrm>
             <a:off x="0" y="0"/>
-            <a:ext cx="12191760" cy="6857640"/>
+            <a:ext cx="12192480" cy="6857280"/>
           </a:xfrm>
           <a:prstGeom prst="roundRect">
             <a:avLst>
@@ -8213,7 +8043,7 @@
         <p:spPr>
           <a:xfrm>
             <a:off x="0" y="0"/>
-            <a:ext cx="12191760" cy="6857640"/>
+            <a:ext cx="12192480" cy="6857280"/>
           </a:xfrm>
           <a:custGeom>
             <a:avLst/>
@@ -8276,7 +8106,7 @@
         <p:spPr>
           <a:xfrm>
             <a:off x="380880" y="1542960"/>
-            <a:ext cx="1866600" cy="609120"/>
+            <a:ext cx="1866240" cy="608760"/>
           </a:xfrm>
           <a:custGeom>
             <a:avLst/>
@@ -8327,7 +8157,7 @@
         <p:spPr>
           <a:xfrm>
             <a:off x="609480" y="1676520"/>
-            <a:ext cx="1580760" cy="342720"/>
+            <a:ext cx="1580400" cy="342360"/>
           </a:xfrm>
           <a:prstGeom prst="rect">
             <a:avLst/>
@@ -8379,7 +8209,7 @@
         <p:spPr>
           <a:xfrm>
             <a:off x="380880" y="2381400"/>
-            <a:ext cx="11772720" cy="1714320"/>
+            <a:ext cx="11773440" cy="1713960"/>
           </a:xfrm>
           <a:prstGeom prst="rect">
             <a:avLst/>
@@ -8452,7 +8282,7 @@
         <p:spPr>
           <a:xfrm>
             <a:off x="380880" y="4324320"/>
-            <a:ext cx="1523520" cy="75960"/>
+            <a:ext cx="1523160" cy="75600"/>
           </a:xfrm>
           <a:custGeom>
             <a:avLst/>
@@ -8503,7 +8333,7 @@
         <p:spPr>
           <a:xfrm>
             <a:off x="380880" y="4629240"/>
-            <a:ext cx="7457760" cy="685440"/>
+            <a:ext cx="7458120" cy="685080"/>
           </a:xfrm>
           <a:prstGeom prst="rect">
             <a:avLst/>
@@ -8575,8 +8405,8 @@
         </p:nvSpPr>
         <p:spPr>
           <a:xfrm>
-            <a:off x="10591920" y="5867280"/>
-            <a:ext cx="151920" cy="151920"/>
+            <a:off x="10592640" y="5867280"/>
+            <a:ext cx="151560" cy="151560"/>
           </a:xfrm>
           <a:custGeom>
             <a:avLst/>
@@ -8626,8 +8456,8 @@
         </p:nvSpPr>
         <p:spPr>
           <a:xfrm>
-            <a:off x="10896480" y="5867280"/>
-            <a:ext cx="151920" cy="151920"/>
+            <a:off x="10897200" y="5867280"/>
+            <a:ext cx="151560" cy="151560"/>
           </a:xfrm>
           <a:custGeom>
             <a:avLst/>
@@ -8677,8 +8507,8 @@
         </p:nvSpPr>
         <p:spPr>
           <a:xfrm>
-            <a:off x="11201400" y="5867280"/>
-            <a:ext cx="151920" cy="151920"/>
+            <a:off x="11202120" y="5867280"/>
+            <a:ext cx="151560" cy="151560"/>
           </a:xfrm>
           <a:custGeom>
             <a:avLst/>
@@ -8761,7 +8591,7 @@
         <p:spPr>
           <a:xfrm>
             <a:off x="0" y="0"/>
-            <a:ext cx="12191760" cy="6855480"/>
+            <a:ext cx="12192480" cy="6855120"/>
           </a:xfrm>
           <a:custGeom>
             <a:avLst/>
@@ -8824,7 +8654,7 @@
         <p:spPr>
           <a:xfrm>
             <a:off x="345240" y="345240"/>
-            <a:ext cx="11708280" cy="414000"/>
+            <a:ext cx="11709000" cy="413640"/>
           </a:xfrm>
           <a:prstGeom prst="rect">
             <a:avLst/>
@@ -8876,7 +8706,7 @@
         <p:spPr>
           <a:xfrm>
             <a:off x="345240" y="863280"/>
-            <a:ext cx="11604600" cy="276120"/>
+            <a:ext cx="11605320" cy="275760"/>
           </a:xfrm>
           <a:prstGeom prst="rect">
             <a:avLst/>
@@ -8928,7 +8758,7 @@
         <p:spPr>
           <a:xfrm>
             <a:off x="345240" y="1243440"/>
-            <a:ext cx="828720" cy="34200"/>
+            <a:ext cx="828360" cy="33840"/>
           </a:xfrm>
           <a:custGeom>
             <a:avLst/>
@@ -8979,7 +8809,7 @@
         <p:spPr>
           <a:xfrm>
             <a:off x="358200" y="1429200"/>
-            <a:ext cx="5620680" cy="2754000"/>
+            <a:ext cx="5620680" cy="2753640"/>
           </a:xfrm>
           <a:custGeom>
             <a:avLst/>
@@ -9035,7 +8865,7 @@
         <p:spPr>
           <a:xfrm>
             <a:off x="492120" y="1614600"/>
-            <a:ext cx="5353200" cy="276120"/>
+            <a:ext cx="5353200" cy="275760"/>
           </a:xfrm>
           <a:prstGeom prst="rect">
             <a:avLst/>
@@ -9087,7 +8917,7 @@
         <p:spPr>
           <a:xfrm>
             <a:off x="440280" y="2028960"/>
-            <a:ext cx="5456520" cy="414000"/>
+            <a:ext cx="5456520" cy="413640"/>
           </a:xfrm>
           <a:prstGeom prst="rect">
             <a:avLst/>
@@ -9139,7 +8969,7 @@
         <p:spPr>
           <a:xfrm>
             <a:off x="505080" y="2478240"/>
-            <a:ext cx="5327280" cy="241560"/>
+            <a:ext cx="5327280" cy="241200"/>
           </a:xfrm>
           <a:prstGeom prst="rect">
             <a:avLst/>
@@ -9191,7 +9021,7 @@
         <p:spPr>
           <a:xfrm>
             <a:off x="543960" y="2858040"/>
-            <a:ext cx="5249520" cy="414000"/>
+            <a:ext cx="5249520" cy="413640"/>
           </a:xfrm>
           <a:custGeom>
             <a:avLst/>
@@ -9244,7 +9074,7 @@
         <p:spPr>
           <a:xfrm>
             <a:off x="613080" y="2961720"/>
-            <a:ext cx="5111280" cy="207000"/>
+            <a:ext cx="5111280" cy="206640"/>
           </a:xfrm>
           <a:prstGeom prst="rect">
             <a:avLst/>
@@ -9316,7 +9146,7 @@
         <p:spPr>
           <a:xfrm>
             <a:off x="543960" y="3410640"/>
-            <a:ext cx="2572560" cy="586800"/>
+            <a:ext cx="2572560" cy="586440"/>
           </a:xfrm>
           <a:custGeom>
             <a:avLst/>
@@ -9369,7 +9199,7 @@
         <p:spPr>
           <a:xfrm>
             <a:off x="561240" y="3479760"/>
-            <a:ext cx="2538360" cy="276120"/>
+            <a:ext cx="2538360" cy="275760"/>
           </a:xfrm>
           <a:prstGeom prst="rect">
             <a:avLst/>
@@ -9421,7 +9251,7 @@
         <p:spPr>
           <a:xfrm>
             <a:off x="582840" y="3755880"/>
-            <a:ext cx="2495160" cy="172440"/>
+            <a:ext cx="2495160" cy="172080"/>
           </a:xfrm>
           <a:prstGeom prst="rect">
             <a:avLst/>
@@ -9473,7 +9303,7 @@
         <p:spPr>
           <a:xfrm>
             <a:off x="3219840" y="3410640"/>
-            <a:ext cx="2572560" cy="586800"/>
+            <a:ext cx="2572560" cy="586440"/>
           </a:xfrm>
           <a:custGeom>
             <a:avLst/>
@@ -9526,7 +9356,7 @@
         <p:spPr>
           <a:xfrm>
             <a:off x="3237120" y="3479760"/>
-            <a:ext cx="2538360" cy="276120"/>
+            <a:ext cx="2538360" cy="275760"/>
           </a:xfrm>
           <a:prstGeom prst="rect">
             <a:avLst/>
@@ -9578,7 +9408,7 @@
         <p:spPr>
           <a:xfrm>
             <a:off x="3258360" y="3755880"/>
-            <a:ext cx="2495160" cy="172440"/>
+            <a:ext cx="2495160" cy="172080"/>
           </a:xfrm>
           <a:prstGeom prst="rect">
             <a:avLst/>
@@ -9629,8 +9459,8 @@
         </p:nvSpPr>
         <p:spPr>
           <a:xfrm>
-            <a:off x="6210720" y="1429200"/>
-            <a:ext cx="5620680" cy="2754000"/>
+            <a:off x="6211080" y="1429200"/>
+            <a:ext cx="5620680" cy="2753640"/>
           </a:xfrm>
           <a:custGeom>
             <a:avLst/>
@@ -9685,8 +9515,8 @@
         </p:nvSpPr>
         <p:spPr>
           <a:xfrm>
-            <a:off x="6344280" y="1614600"/>
-            <a:ext cx="5353200" cy="276120"/>
+            <a:off x="6344640" y="1614600"/>
+            <a:ext cx="5353200" cy="275760"/>
           </a:xfrm>
           <a:prstGeom prst="rect">
             <a:avLst/>
@@ -9737,8 +9567,8 @@
         </p:nvSpPr>
         <p:spPr>
           <a:xfrm>
-            <a:off x="6292800" y="2028960"/>
-            <a:ext cx="5456520" cy="414000"/>
+            <a:off x="6293160" y="2028960"/>
+            <a:ext cx="5456520" cy="413640"/>
           </a:xfrm>
           <a:prstGeom prst="rect">
             <a:avLst/>
@@ -9789,8 +9619,8 @@
         </p:nvSpPr>
         <p:spPr>
           <a:xfrm>
-            <a:off x="6357240" y="2478240"/>
-            <a:ext cx="5327280" cy="241560"/>
+            <a:off x="6357600" y="2478240"/>
+            <a:ext cx="5327280" cy="241200"/>
           </a:xfrm>
           <a:prstGeom prst="rect">
             <a:avLst/>
@@ -9841,8 +9671,8 @@
         </p:nvSpPr>
         <p:spPr>
           <a:xfrm>
-            <a:off x="6396120" y="2858040"/>
-            <a:ext cx="5249520" cy="414000"/>
+            <a:off x="6396480" y="2858040"/>
+            <a:ext cx="5249520" cy="413640"/>
           </a:xfrm>
           <a:custGeom>
             <a:avLst/>
@@ -9894,8 +9724,8 @@
         </p:nvSpPr>
         <p:spPr>
           <a:xfrm>
-            <a:off x="6465240" y="2961720"/>
-            <a:ext cx="5111280" cy="207000"/>
+            <a:off x="6465600" y="2961720"/>
+            <a:ext cx="5111280" cy="206640"/>
           </a:xfrm>
           <a:prstGeom prst="rect">
             <a:avLst/>
@@ -9956,8 +9786,8 @@
         </p:nvSpPr>
         <p:spPr>
           <a:xfrm>
-            <a:off x="6396120" y="3410640"/>
-            <a:ext cx="2572560" cy="586800"/>
+            <a:off x="6396480" y="3410640"/>
+            <a:ext cx="2572560" cy="586440"/>
           </a:xfrm>
           <a:custGeom>
             <a:avLst/>
@@ -10009,8 +9839,8 @@
         </p:nvSpPr>
         <p:spPr>
           <a:xfrm>
-            <a:off x="6413400" y="3479760"/>
-            <a:ext cx="2538360" cy="276120"/>
+            <a:off x="6413760" y="3479760"/>
+            <a:ext cx="2538360" cy="275760"/>
           </a:xfrm>
           <a:prstGeom prst="rect">
             <a:avLst/>
@@ -10061,8 +9891,8 @@
         </p:nvSpPr>
         <p:spPr>
           <a:xfrm>
-            <a:off x="6435000" y="3755880"/>
-            <a:ext cx="2495160" cy="172440"/>
+            <a:off x="6435360" y="3755880"/>
+            <a:ext cx="2495160" cy="172080"/>
           </a:xfrm>
           <a:prstGeom prst="rect">
             <a:avLst/>
@@ -10113,8 +9943,8 @@
         </p:nvSpPr>
         <p:spPr>
           <a:xfrm>
-            <a:off x="9072000" y="3410640"/>
-            <a:ext cx="2572560" cy="586800"/>
+            <a:off x="9072720" y="3410640"/>
+            <a:ext cx="2572560" cy="586440"/>
           </a:xfrm>
           <a:custGeom>
             <a:avLst/>
@@ -10166,8 +9996,8 @@
         </p:nvSpPr>
         <p:spPr>
           <a:xfrm>
-            <a:off x="9089280" y="3479760"/>
-            <a:ext cx="2538360" cy="276120"/>
+            <a:off x="9090000" y="3479760"/>
+            <a:ext cx="2538360" cy="275760"/>
           </a:xfrm>
           <a:prstGeom prst="rect">
             <a:avLst/>
@@ -10218,8 +10048,8 @@
         </p:nvSpPr>
         <p:spPr>
           <a:xfrm>
-            <a:off x="9110880" y="3755880"/>
-            <a:ext cx="2495160" cy="172440"/>
+            <a:off x="9111600" y="3755880"/>
+            <a:ext cx="2495160" cy="172080"/>
           </a:xfrm>
           <a:prstGeom prst="rect">
             <a:avLst/>
@@ -10271,7 +10101,7 @@
         <p:spPr>
           <a:xfrm>
             <a:off x="362520" y="4351680"/>
-            <a:ext cx="11466360" cy="2486520"/>
+            <a:ext cx="11467080" cy="2486160"/>
           </a:xfrm>
           <a:custGeom>
             <a:avLst/>
@@ -10327,7 +10157,7 @@
         <p:spPr>
           <a:xfrm>
             <a:off x="500760" y="4541760"/>
-            <a:ext cx="11189880" cy="276120"/>
+            <a:ext cx="11190600" cy="275760"/>
           </a:xfrm>
           <a:prstGeom prst="rect">
             <a:avLst/>
@@ -10379,7 +10209,7 @@
         <p:spPr>
           <a:xfrm>
             <a:off x="552600" y="4921560"/>
-            <a:ext cx="9946800" cy="1726560"/>
+            <a:ext cx="9947160" cy="1726200"/>
           </a:xfrm>
           <a:prstGeom prst="roundRect">
             <a:avLst>
@@ -10443,7 +10273,7 @@
         <p:spPr>
           <a:xfrm>
             <a:off x="0" y="0"/>
-            <a:ext cx="12191760" cy="6857640"/>
+            <a:ext cx="12192480" cy="6857280"/>
           </a:xfrm>
           <a:custGeom>
             <a:avLst/>
@@ -10506,7 +10336,7 @@
         <p:spPr>
           <a:xfrm>
             <a:off x="380880" y="380880"/>
-            <a:ext cx="11658240" cy="456840"/>
+            <a:ext cx="11658960" cy="456480"/>
           </a:xfrm>
           <a:prstGeom prst="rect">
             <a:avLst/>
@@ -10558,7 +10388,7 @@
         <p:spPr>
           <a:xfrm>
             <a:off x="380880" y="952560"/>
-            <a:ext cx="11544120" cy="304560"/>
+            <a:ext cx="11544840" cy="304200"/>
           </a:xfrm>
           <a:prstGeom prst="rect">
             <a:avLst/>
@@ -10610,7 +10440,7 @@
         <p:spPr>
           <a:xfrm>
             <a:off x="380880" y="1371600"/>
-            <a:ext cx="914040" cy="37800"/>
+            <a:ext cx="913680" cy="37440"/>
           </a:xfrm>
           <a:custGeom>
             <a:avLst/>
@@ -10661,7 +10491,7 @@
         <p:spPr>
           <a:xfrm>
             <a:off x="395280" y="1576440"/>
-            <a:ext cx="3676320" cy="2352240"/>
+            <a:ext cx="3676320" cy="2351880"/>
           </a:xfrm>
           <a:custGeom>
             <a:avLst/>
@@ -10717,7 +10547,7 @@
         <p:spPr>
           <a:xfrm>
             <a:off x="564480" y="1752480"/>
-            <a:ext cx="356760" cy="285480"/>
+            <a:ext cx="356400" cy="285120"/>
           </a:xfrm>
           <a:custGeom>
             <a:avLst/>
@@ -10898,7 +10728,7 @@
         <p:spPr>
           <a:xfrm>
             <a:off x="1033560" y="1743120"/>
-            <a:ext cx="552240" cy="304560"/>
+            <a:ext cx="551880" cy="304200"/>
           </a:xfrm>
           <a:prstGeom prst="rect">
             <a:avLst/>
@@ -10950,7 +10780,7 @@
         <p:spPr>
           <a:xfrm>
             <a:off x="561960" y="2200320"/>
-            <a:ext cx="702360" cy="151920"/>
+            <a:ext cx="702000" cy="151560"/>
           </a:xfrm>
           <a:prstGeom prst="rect">
             <a:avLst/>
@@ -11002,7 +10832,7 @@
         <p:spPr>
           <a:xfrm>
             <a:off x="714240" y="2467080"/>
-            <a:ext cx="3266640" cy="228240"/>
+            <a:ext cx="3266640" cy="227880"/>
           </a:xfrm>
           <a:prstGeom prst="rect">
             <a:avLst/>
@@ -11064,7 +10894,7 @@
         <p:spPr>
           <a:xfrm>
             <a:off x="714240" y="2771640"/>
-            <a:ext cx="3266640" cy="228240"/>
+            <a:ext cx="3266640" cy="227880"/>
           </a:xfrm>
           <a:prstGeom prst="rect">
             <a:avLst/>
@@ -11126,7 +10956,7 @@
         <p:spPr>
           <a:xfrm>
             <a:off x="714240" y="3076560"/>
-            <a:ext cx="3266640" cy="228240"/>
+            <a:ext cx="3266640" cy="227880"/>
           </a:xfrm>
           <a:prstGeom prst="rect">
             <a:avLst/>
@@ -11188,7 +11018,7 @@
         <p:spPr>
           <a:xfrm>
             <a:off x="561960" y="3419640"/>
-            <a:ext cx="3342960" cy="342720"/>
+            <a:ext cx="3342960" cy="342360"/>
           </a:xfrm>
           <a:custGeom>
             <a:avLst/>
@@ -11241,7 +11071,7 @@
         <p:spPr>
           <a:xfrm>
             <a:off x="604800" y="3495600"/>
-            <a:ext cx="3257280" cy="190080"/>
+            <a:ext cx="3257280" cy="189720"/>
           </a:xfrm>
           <a:prstGeom prst="rect">
             <a:avLst/>
@@ -11292,8 +11122,8 @@
         </p:nvSpPr>
         <p:spPr>
           <a:xfrm>
-            <a:off x="4255920" y="1576440"/>
-            <a:ext cx="3676320" cy="2352240"/>
+            <a:off x="4256280" y="1576440"/>
+            <a:ext cx="3676320" cy="2351880"/>
           </a:xfrm>
           <a:custGeom>
             <a:avLst/>
@@ -11348,8 +11178,8 @@
         </p:nvSpPr>
         <p:spPr>
           <a:xfrm>
-            <a:off x="4496400" y="1752480"/>
-            <a:ext cx="213840" cy="285480"/>
+            <a:off x="4496760" y="1752480"/>
+            <a:ext cx="213480" cy="285120"/>
           </a:xfrm>
           <a:custGeom>
             <a:avLst/>
@@ -11524,8 +11354,8 @@
         </p:nvSpPr>
         <p:spPr>
           <a:xfrm>
-            <a:off x="4894200" y="1743120"/>
-            <a:ext cx="676080" cy="304560"/>
+            <a:off x="4894560" y="1743120"/>
+            <a:ext cx="675720" cy="304200"/>
           </a:xfrm>
           <a:prstGeom prst="rect">
             <a:avLst/>
@@ -11576,8 +11406,8 @@
         </p:nvSpPr>
         <p:spPr>
           <a:xfrm>
-            <a:off x="4422600" y="2200320"/>
-            <a:ext cx="702360" cy="151920"/>
+            <a:off x="4422960" y="2200320"/>
+            <a:ext cx="702000" cy="151560"/>
           </a:xfrm>
           <a:prstGeom prst="rect">
             <a:avLst/>
@@ -11628,8 +11458,8 @@
         </p:nvSpPr>
         <p:spPr>
           <a:xfrm>
-            <a:off x="4575240" y="2467080"/>
-            <a:ext cx="3266640" cy="228240"/>
+            <a:off x="4575600" y="2467080"/>
+            <a:ext cx="3266640" cy="227880"/>
           </a:xfrm>
           <a:prstGeom prst="rect">
             <a:avLst/>
@@ -11690,8 +11520,8 @@
         </p:nvSpPr>
         <p:spPr>
           <a:xfrm>
-            <a:off x="4575240" y="2771640"/>
-            <a:ext cx="3266640" cy="228240"/>
+            <a:off x="4575600" y="2771640"/>
+            <a:ext cx="3266640" cy="227880"/>
           </a:xfrm>
           <a:prstGeom prst="rect">
             <a:avLst/>
@@ -11752,8 +11582,8 @@
         </p:nvSpPr>
         <p:spPr>
           <a:xfrm>
-            <a:off x="4575240" y="3076560"/>
-            <a:ext cx="3266640" cy="228240"/>
+            <a:off x="4575600" y="3076560"/>
+            <a:ext cx="3266640" cy="227880"/>
           </a:xfrm>
           <a:prstGeom prst="rect">
             <a:avLst/>
@@ -11814,8 +11644,8 @@
         </p:nvSpPr>
         <p:spPr>
           <a:xfrm>
-            <a:off x="4422600" y="3419640"/>
-            <a:ext cx="3342960" cy="342720"/>
+            <a:off x="4422960" y="3419640"/>
+            <a:ext cx="3342960" cy="342360"/>
           </a:xfrm>
           <a:custGeom>
             <a:avLst/>
@@ -11867,8 +11697,8 @@
         </p:nvSpPr>
         <p:spPr>
           <a:xfrm>
-            <a:off x="4465440" y="3495600"/>
-            <a:ext cx="3257280" cy="190080"/>
+            <a:off x="4465800" y="3495600"/>
+            <a:ext cx="3257280" cy="189720"/>
           </a:xfrm>
           <a:prstGeom prst="rect">
             <a:avLst/>
@@ -11919,8 +11749,8 @@
         </p:nvSpPr>
         <p:spPr>
           <a:xfrm>
-            <a:off x="8116920" y="1576440"/>
-            <a:ext cx="3676320" cy="2352240"/>
+            <a:off x="8117280" y="1576440"/>
+            <a:ext cx="3676320" cy="2351880"/>
           </a:xfrm>
           <a:custGeom>
             <a:avLst/>
@@ -11975,8 +11805,8 @@
         </p:nvSpPr>
         <p:spPr>
           <a:xfrm>
-            <a:off x="8321760" y="1752480"/>
-            <a:ext cx="285480" cy="285480"/>
+            <a:off x="8322480" y="1752480"/>
+            <a:ext cx="285120" cy="285120"/>
           </a:xfrm>
           <a:custGeom>
             <a:avLst/>
@@ -12099,8 +11929,8 @@
         </p:nvSpPr>
         <p:spPr>
           <a:xfrm>
-            <a:off x="8755200" y="1743120"/>
-            <a:ext cx="542520" cy="304560"/>
+            <a:off x="8755920" y="1743120"/>
+            <a:ext cx="542160" cy="304200"/>
           </a:xfrm>
           <a:prstGeom prst="rect">
             <a:avLst/>
@@ -12151,8 +11981,8 @@
         </p:nvSpPr>
         <p:spPr>
           <a:xfrm>
-            <a:off x="8283600" y="2200320"/>
-            <a:ext cx="702360" cy="151920"/>
+            <a:off x="8284320" y="2200320"/>
+            <a:ext cx="702000" cy="151560"/>
           </a:xfrm>
           <a:prstGeom prst="rect">
             <a:avLst/>
@@ -12203,8 +12033,8 @@
         </p:nvSpPr>
         <p:spPr>
           <a:xfrm>
-            <a:off x="8435880" y="2467080"/>
-            <a:ext cx="3266640" cy="228240"/>
+            <a:off x="8436600" y="2467080"/>
+            <a:ext cx="3266640" cy="227880"/>
           </a:xfrm>
           <a:prstGeom prst="rect">
             <a:avLst/>
@@ -12265,8 +12095,8 @@
         </p:nvSpPr>
         <p:spPr>
           <a:xfrm>
-            <a:off x="8435880" y="2771640"/>
-            <a:ext cx="3266640" cy="228240"/>
+            <a:off x="8436600" y="2771640"/>
+            <a:ext cx="3266640" cy="227880"/>
           </a:xfrm>
           <a:prstGeom prst="rect">
             <a:avLst/>
@@ -12327,8 +12157,8 @@
         </p:nvSpPr>
         <p:spPr>
           <a:xfrm>
-            <a:off x="8435880" y="3076560"/>
-            <a:ext cx="3266640" cy="228240"/>
+            <a:off x="8436600" y="3076560"/>
+            <a:ext cx="3266640" cy="227880"/>
           </a:xfrm>
           <a:prstGeom prst="rect">
             <a:avLst/>
@@ -12389,8 +12219,8 @@
         </p:nvSpPr>
         <p:spPr>
           <a:xfrm>
-            <a:off x="8283600" y="3419640"/>
-            <a:ext cx="3342960" cy="342720"/>
+            <a:off x="8284320" y="3419640"/>
+            <a:ext cx="3342960" cy="342360"/>
           </a:xfrm>
           <a:custGeom>
             <a:avLst/>
@@ -12442,8 +12272,8 @@
         </p:nvSpPr>
         <p:spPr>
           <a:xfrm>
-            <a:off x="8326440" y="3495600"/>
-            <a:ext cx="3257280" cy="190080"/>
+            <a:off x="8327160" y="3495600"/>
+            <a:ext cx="3257280" cy="189720"/>
           </a:xfrm>
           <a:prstGeom prst="rect">
             <a:avLst/>
@@ -12495,7 +12325,7 @@
         <p:spPr>
           <a:xfrm>
             <a:off x="395280" y="4110120"/>
-            <a:ext cx="3676320" cy="2352240"/>
+            <a:ext cx="3676320" cy="2351880"/>
           </a:xfrm>
           <a:custGeom>
             <a:avLst/>
@@ -12551,7 +12381,7 @@
         <p:spPr>
           <a:xfrm>
             <a:off x="600120" y="4286160"/>
-            <a:ext cx="285480" cy="285480"/>
+            <a:ext cx="285120" cy="285120"/>
           </a:xfrm>
           <a:custGeom>
             <a:avLst/>
@@ -12664,7 +12494,7 @@
         <p:spPr>
           <a:xfrm>
             <a:off x="1033560" y="4276800"/>
-            <a:ext cx="875880" cy="304560"/>
+            <a:ext cx="875520" cy="304200"/>
           </a:xfrm>
           <a:prstGeom prst="rect">
             <a:avLst/>
@@ -12716,7 +12546,7 @@
         <p:spPr>
           <a:xfrm>
             <a:off x="561960" y="4734000"/>
-            <a:ext cx="702360" cy="151920"/>
+            <a:ext cx="702000" cy="151560"/>
           </a:xfrm>
           <a:prstGeom prst="rect">
             <a:avLst/>
@@ -12768,7 +12598,7 @@
         <p:spPr>
           <a:xfrm>
             <a:off x="714240" y="5000760"/>
-            <a:ext cx="3266640" cy="228240"/>
+            <a:ext cx="3266640" cy="227880"/>
           </a:xfrm>
           <a:prstGeom prst="rect">
             <a:avLst/>
@@ -12830,7 +12660,7 @@
         <p:spPr>
           <a:xfrm>
             <a:off x="714240" y="5305320"/>
-            <a:ext cx="3266640" cy="228240"/>
+            <a:ext cx="3266640" cy="227880"/>
           </a:xfrm>
           <a:prstGeom prst="rect">
             <a:avLst/>
@@ -12892,7 +12722,7 @@
         <p:spPr>
           <a:xfrm>
             <a:off x="714240" y="5610240"/>
-            <a:ext cx="3266640" cy="228240"/>
+            <a:ext cx="3266640" cy="227880"/>
           </a:xfrm>
           <a:prstGeom prst="rect">
             <a:avLst/>
@@ -12954,7 +12784,7 @@
         <p:spPr>
           <a:xfrm>
             <a:off x="561960" y="5952960"/>
-            <a:ext cx="3342960" cy="342720"/>
+            <a:ext cx="3342960" cy="342360"/>
           </a:xfrm>
           <a:custGeom>
             <a:avLst/>
@@ -13007,7 +12837,7 @@
         <p:spPr>
           <a:xfrm>
             <a:off x="604800" y="6029280"/>
-            <a:ext cx="3257280" cy="190080"/>
+            <a:ext cx="3257280" cy="189720"/>
           </a:xfrm>
           <a:prstGeom prst="rect">
             <a:avLst/>
@@ -13058,8 +12888,8 @@
         </p:nvSpPr>
         <p:spPr>
           <a:xfrm>
-            <a:off x="4255920" y="4110120"/>
-            <a:ext cx="3676320" cy="2352240"/>
+            <a:off x="4256280" y="4110120"/>
+            <a:ext cx="3676320" cy="2351880"/>
           </a:xfrm>
           <a:custGeom>
             <a:avLst/>
@@ -13114,8 +12944,8 @@
         </p:nvSpPr>
         <p:spPr>
           <a:xfrm>
-            <a:off x="4443120" y="4286160"/>
-            <a:ext cx="321120" cy="285480"/>
+            <a:off x="4443480" y="4286160"/>
+            <a:ext cx="320760" cy="285120"/>
           </a:xfrm>
           <a:custGeom>
             <a:avLst/>
@@ -13311,8 +13141,8 @@
         </p:nvSpPr>
         <p:spPr>
           <a:xfrm>
-            <a:off x="4894200" y="4276800"/>
-            <a:ext cx="761760" cy="304560"/>
+            <a:off x="4894560" y="4276800"/>
+            <a:ext cx="761400" cy="304200"/>
           </a:xfrm>
           <a:prstGeom prst="rect">
             <a:avLst/>
@@ -13363,8 +13193,8 @@
         </p:nvSpPr>
         <p:spPr>
           <a:xfrm>
-            <a:off x="4422600" y="4734000"/>
-            <a:ext cx="702360" cy="151920"/>
+            <a:off x="4422960" y="4734000"/>
+            <a:ext cx="702000" cy="151560"/>
           </a:xfrm>
           <a:prstGeom prst="rect">
             <a:avLst/>
@@ -13415,8 +13245,8 @@
         </p:nvSpPr>
         <p:spPr>
           <a:xfrm>
-            <a:off x="4575240" y="5000760"/>
-            <a:ext cx="3266640" cy="228240"/>
+            <a:off x="4575600" y="5000760"/>
+            <a:ext cx="3266640" cy="227880"/>
           </a:xfrm>
           <a:prstGeom prst="rect">
             <a:avLst/>
@@ -13477,8 +13307,8 @@
         </p:nvSpPr>
         <p:spPr>
           <a:xfrm>
-            <a:off x="4575240" y="5305320"/>
-            <a:ext cx="3266640" cy="228240"/>
+            <a:off x="4575600" y="5305320"/>
+            <a:ext cx="3266640" cy="227880"/>
           </a:xfrm>
           <a:prstGeom prst="rect">
             <a:avLst/>
@@ -13539,8 +13369,8 @@
         </p:nvSpPr>
         <p:spPr>
           <a:xfrm>
-            <a:off x="4575240" y="5610240"/>
-            <a:ext cx="3266640" cy="228240"/>
+            <a:off x="4575600" y="5610240"/>
+            <a:ext cx="3266640" cy="227880"/>
           </a:xfrm>
           <a:prstGeom prst="rect">
             <a:avLst/>
@@ -13601,8 +13431,8 @@
         </p:nvSpPr>
         <p:spPr>
           <a:xfrm>
-            <a:off x="4422600" y="5952960"/>
-            <a:ext cx="3342960" cy="342720"/>
+            <a:off x="4422960" y="5952960"/>
+            <a:ext cx="3342960" cy="342360"/>
           </a:xfrm>
           <a:custGeom>
             <a:avLst/>
@@ -13654,8 +13484,8 @@
         </p:nvSpPr>
         <p:spPr>
           <a:xfrm>
-            <a:off x="4465440" y="6029280"/>
-            <a:ext cx="3257280" cy="190080"/>
+            <a:off x="4465800" y="6029280"/>
+            <a:ext cx="3257280" cy="189720"/>
           </a:xfrm>
           <a:prstGeom prst="rect">
             <a:avLst/>
@@ -13706,8 +13536,8 @@
         </p:nvSpPr>
         <p:spPr>
           <a:xfrm>
-            <a:off x="8116920" y="4110120"/>
-            <a:ext cx="3676320" cy="2352240"/>
+            <a:off x="8117280" y="4110120"/>
+            <a:ext cx="3676320" cy="2351880"/>
           </a:xfrm>
           <a:custGeom>
             <a:avLst/>
@@ -13762,8 +13592,8 @@
         </p:nvSpPr>
         <p:spPr>
           <a:xfrm>
-            <a:off x="8321760" y="4286160"/>
-            <a:ext cx="285480" cy="285480"/>
+            <a:off x="8322480" y="4286160"/>
+            <a:ext cx="285120" cy="285120"/>
           </a:xfrm>
           <a:custGeom>
             <a:avLst/>
@@ -13860,8 +13690,8 @@
         </p:nvSpPr>
         <p:spPr>
           <a:xfrm>
-            <a:off x="8755200" y="4276800"/>
-            <a:ext cx="866520" cy="304560"/>
+            <a:off x="8755920" y="4276800"/>
+            <a:ext cx="866160" cy="304200"/>
           </a:xfrm>
           <a:prstGeom prst="rect">
             <a:avLst/>
@@ -13912,8 +13742,8 @@
         </p:nvSpPr>
         <p:spPr>
           <a:xfrm>
-            <a:off x="8283600" y="4734000"/>
-            <a:ext cx="702360" cy="151920"/>
+            <a:off x="8284320" y="4734000"/>
+            <a:ext cx="702000" cy="151560"/>
           </a:xfrm>
           <a:prstGeom prst="rect">
             <a:avLst/>
@@ -13964,8 +13794,8 @@
         </p:nvSpPr>
         <p:spPr>
           <a:xfrm>
-            <a:off x="8435880" y="5000760"/>
-            <a:ext cx="3266640" cy="228240"/>
+            <a:off x="8436600" y="5000760"/>
+            <a:ext cx="3266640" cy="227880"/>
           </a:xfrm>
           <a:prstGeom prst="rect">
             <a:avLst/>
@@ -14026,8 +13856,8 @@
         </p:nvSpPr>
         <p:spPr>
           <a:xfrm>
-            <a:off x="8435880" y="5305320"/>
-            <a:ext cx="3266640" cy="228240"/>
+            <a:off x="8436600" y="5305320"/>
+            <a:ext cx="3266640" cy="227880"/>
           </a:xfrm>
           <a:prstGeom prst="rect">
             <a:avLst/>
@@ -14088,8 +13918,8 @@
         </p:nvSpPr>
         <p:spPr>
           <a:xfrm>
-            <a:off x="8435880" y="5610240"/>
-            <a:ext cx="3266640" cy="228240"/>
+            <a:off x="8436600" y="5610240"/>
+            <a:ext cx="3266640" cy="227880"/>
           </a:xfrm>
           <a:prstGeom prst="rect">
             <a:avLst/>
@@ -14150,8 +13980,8 @@
         </p:nvSpPr>
         <p:spPr>
           <a:xfrm>
-            <a:off x="8283600" y="5952960"/>
-            <a:ext cx="3342960" cy="342720"/>
+            <a:off x="8284320" y="5952960"/>
+            <a:ext cx="3342960" cy="342360"/>
           </a:xfrm>
           <a:custGeom>
             <a:avLst/>
@@ -14203,8 +14033,8 @@
         </p:nvSpPr>
         <p:spPr>
           <a:xfrm>
-            <a:off x="8326440" y="6029280"/>
-            <a:ext cx="3257280" cy="190080"/>
+            <a:off x="8327160" y="6029280"/>
+            <a:ext cx="3257280" cy="189720"/>
           </a:xfrm>
           <a:prstGeom prst="rect">
             <a:avLst/>
@@ -14288,7 +14118,7 @@
         <p:spPr>
           <a:xfrm>
             <a:off x="0" y="0"/>
-            <a:ext cx="12191760" cy="6857640"/>
+            <a:ext cx="12192480" cy="6857280"/>
           </a:xfrm>
           <a:prstGeom prst="roundRect">
             <a:avLst>
@@ -14320,7 +14150,7 @@
         <p:spPr>
           <a:xfrm>
             <a:off x="0" y="0"/>
-            <a:ext cx="12191760" cy="6857640"/>
+            <a:ext cx="12192480" cy="6857280"/>
           </a:xfrm>
           <a:custGeom>
             <a:avLst/>
@@ -14383,7 +14213,7 @@
         <p:spPr>
           <a:xfrm>
             <a:off x="380880" y="1542960"/>
-            <a:ext cx="1856880" cy="609120"/>
+            <a:ext cx="1856520" cy="608760"/>
           </a:xfrm>
           <a:custGeom>
             <a:avLst/>
@@ -14434,7 +14264,7 @@
         <p:spPr>
           <a:xfrm>
             <a:off x="609480" y="1676520"/>
-            <a:ext cx="1568160" cy="342720"/>
+            <a:ext cx="1567800" cy="342360"/>
           </a:xfrm>
           <a:prstGeom prst="rect">
             <a:avLst/>
@@ -14486,7 +14316,7 @@
         <p:spPr>
           <a:xfrm>
             <a:off x="380880" y="2381400"/>
-            <a:ext cx="11772720" cy="1714320"/>
+            <a:ext cx="11773440" cy="1713960"/>
           </a:xfrm>
           <a:prstGeom prst="rect">
             <a:avLst/>
@@ -14559,7 +14389,7 @@
         <p:spPr>
           <a:xfrm>
             <a:off x="380880" y="4324320"/>
-            <a:ext cx="1523520" cy="75960"/>
+            <a:ext cx="1523160" cy="75600"/>
           </a:xfrm>
           <a:custGeom>
             <a:avLst/>
@@ -14610,7 +14440,7 @@
         <p:spPr>
           <a:xfrm>
             <a:off x="380880" y="4629240"/>
-            <a:ext cx="7457760" cy="685440"/>
+            <a:ext cx="7458120" cy="685080"/>
           </a:xfrm>
           <a:prstGeom prst="rect">
             <a:avLst/>
@@ -14682,8 +14512,8 @@
         </p:nvSpPr>
         <p:spPr>
           <a:xfrm>
-            <a:off x="10591920" y="5867280"/>
-            <a:ext cx="151920" cy="151920"/>
+            <a:off x="10592640" y="5867280"/>
+            <a:ext cx="151560" cy="151560"/>
           </a:xfrm>
           <a:custGeom>
             <a:avLst/>
@@ -14733,8 +14563,8 @@
         </p:nvSpPr>
         <p:spPr>
           <a:xfrm>
-            <a:off x="10896480" y="5867280"/>
-            <a:ext cx="151920" cy="151920"/>
+            <a:off x="10897200" y="5867280"/>
+            <a:ext cx="151560" cy="151560"/>
           </a:xfrm>
           <a:custGeom>
             <a:avLst/>
@@ -14784,8 +14614,8 @@
         </p:nvSpPr>
         <p:spPr>
           <a:xfrm>
-            <a:off x="11201400" y="5867280"/>
-            <a:ext cx="151920" cy="151920"/>
+            <a:off x="11202120" y="5867280"/>
+            <a:ext cx="151560" cy="151560"/>
           </a:xfrm>
           <a:custGeom>
             <a:avLst/>
@@ -14868,7 +14698,7 @@
         <p:spPr>
           <a:xfrm>
             <a:off x="0" y="0"/>
-            <a:ext cx="12191760" cy="6855480"/>
+            <a:ext cx="12192480" cy="6855120"/>
           </a:xfrm>
           <a:custGeom>
             <a:avLst/>
@@ -14931,7 +14761,7 @@
         <p:spPr>
           <a:xfrm>
             <a:off x="353520" y="353520"/>
-            <a:ext cx="11696760" cy="423720"/>
+            <a:ext cx="11697480" cy="423360"/>
           </a:xfrm>
           <a:prstGeom prst="rect">
             <a:avLst/>
@@ -14983,7 +14813,7 @@
         <p:spPr>
           <a:xfrm>
             <a:off x="353520" y="883440"/>
-            <a:ext cx="11590920" cy="282240"/>
+            <a:ext cx="11591640" cy="281880"/>
           </a:xfrm>
           <a:prstGeom prst="rect">
             <a:avLst/>
@@ -15035,7 +14865,7 @@
         <p:spPr>
           <a:xfrm>
             <a:off x="353520" y="1272240"/>
-            <a:ext cx="847800" cy="34920"/>
+            <a:ext cx="847440" cy="34560"/>
           </a:xfrm>
           <a:custGeom>
             <a:avLst/>
@@ -15086,7 +14916,7 @@
         <p:spPr>
           <a:xfrm>
             <a:off x="366480" y="1462320"/>
-            <a:ext cx="3710160" cy="2111040"/>
+            <a:ext cx="3710160" cy="2110680"/>
           </a:xfrm>
           <a:custGeom>
             <a:avLst/>
@@ -15142,7 +14972,7 @@
         <p:spPr>
           <a:xfrm>
             <a:off x="1954800" y="1652040"/>
-            <a:ext cx="529560" cy="423720"/>
+            <a:ext cx="529200" cy="423360"/>
           </a:xfrm>
           <a:custGeom>
             <a:avLst/>
@@ -15358,7 +15188,7 @@
         <p:spPr>
           <a:xfrm>
             <a:off x="503640" y="2217600"/>
-            <a:ext cx="3436200" cy="282240"/>
+            <a:ext cx="3436200" cy="281880"/>
           </a:xfrm>
           <a:prstGeom prst="rect">
             <a:avLst/>
@@ -15410,7 +15240,7 @@
         <p:spPr>
           <a:xfrm>
             <a:off x="516960" y="2606400"/>
-            <a:ext cx="3409920" cy="777240"/>
+            <a:ext cx="3409920" cy="776880"/>
           </a:xfrm>
           <a:prstGeom prst="rect">
             <a:avLst/>
@@ -15481,8 +15311,8 @@
         </p:nvSpPr>
         <p:spPr>
           <a:xfrm>
-            <a:off x="4240800" y="1462320"/>
-            <a:ext cx="3710160" cy="2111040"/>
+            <a:off x="4241160" y="1462320"/>
+            <a:ext cx="3710160" cy="2110680"/>
           </a:xfrm>
           <a:custGeom>
             <a:avLst/>
@@ -15537,8 +15367,8 @@
         </p:nvSpPr>
         <p:spPr>
           <a:xfrm>
-            <a:off x="5882040" y="1652040"/>
-            <a:ext cx="423720" cy="423720"/>
+            <a:off x="5882400" y="1652040"/>
+            <a:ext cx="423360" cy="423360"/>
           </a:xfrm>
           <a:custGeom>
             <a:avLst/>
@@ -15714,8 +15544,8 @@
         </p:nvSpPr>
         <p:spPr>
           <a:xfrm>
-            <a:off x="4377600" y="2217600"/>
-            <a:ext cx="3436200" cy="282240"/>
+            <a:off x="4377960" y="2217600"/>
+            <a:ext cx="3436200" cy="281880"/>
           </a:xfrm>
           <a:prstGeom prst="rect">
             <a:avLst/>
@@ -15766,8 +15596,8 @@
         </p:nvSpPr>
         <p:spPr>
           <a:xfrm>
-            <a:off x="4390920" y="2606400"/>
-            <a:ext cx="3409920" cy="777240"/>
+            <a:off x="4391280" y="2606400"/>
+            <a:ext cx="3409920" cy="776880"/>
           </a:xfrm>
           <a:prstGeom prst="rect">
             <a:avLst/>
@@ -15838,8 +15668,8 @@
         </p:nvSpPr>
         <p:spPr>
           <a:xfrm>
-            <a:off x="8115120" y="1462320"/>
-            <a:ext cx="3710160" cy="2111040"/>
+            <a:off x="8115480" y="1462320"/>
+            <a:ext cx="3710160" cy="2110680"/>
           </a:xfrm>
           <a:custGeom>
             <a:avLst/>
@@ -15894,8 +15724,8 @@
         </p:nvSpPr>
         <p:spPr>
           <a:xfrm>
-            <a:off x="9756000" y="1652040"/>
-            <a:ext cx="423720" cy="423720"/>
+            <a:off x="9756720" y="1652040"/>
+            <a:ext cx="423360" cy="423360"/>
           </a:xfrm>
           <a:custGeom>
             <a:avLst/>
@@ -16015,8 +15845,8 @@
         </p:nvSpPr>
         <p:spPr>
           <a:xfrm>
-            <a:off x="8251920" y="2217600"/>
-            <a:ext cx="3436200" cy="282240"/>
+            <a:off x="8252640" y="2217600"/>
+            <a:ext cx="3436200" cy="281880"/>
           </a:xfrm>
           <a:prstGeom prst="rect">
             <a:avLst/>
@@ -16067,8 +15897,8 @@
         </p:nvSpPr>
         <p:spPr>
           <a:xfrm>
-            <a:off x="8265240" y="2606400"/>
-            <a:ext cx="3409920" cy="520920"/>
+            <a:off x="8265960" y="2606400"/>
+            <a:ext cx="3409920" cy="520560"/>
           </a:xfrm>
           <a:prstGeom prst="rect">
             <a:avLst/>
@@ -16140,7 +15970,7 @@
         <p:spPr>
           <a:xfrm>
             <a:off x="366480" y="3739320"/>
-            <a:ext cx="5609880" cy="3100680"/>
+            <a:ext cx="5609880" cy="3100320"/>
           </a:xfrm>
           <a:custGeom>
             <a:avLst/>
@@ -16196,7 +16026,7 @@
         <p:spPr>
           <a:xfrm>
             <a:off x="503640" y="3929400"/>
-            <a:ext cx="5335920" cy="282240"/>
+            <a:ext cx="5335920" cy="281880"/>
           </a:xfrm>
           <a:prstGeom prst="rect">
             <a:avLst/>
@@ -16248,7 +16078,7 @@
         <p:spPr>
           <a:xfrm>
             <a:off x="556560" y="4353480"/>
-            <a:ext cx="5229720" cy="494280"/>
+            <a:ext cx="5229720" cy="493920"/>
           </a:xfrm>
           <a:custGeom>
             <a:avLst/>
@@ -16301,7 +16131,7 @@
         <p:spPr>
           <a:xfrm>
             <a:off x="662760" y="4476960"/>
-            <a:ext cx="1625400" cy="246960"/>
+            <a:ext cx="1625040" cy="246600"/>
           </a:xfrm>
           <a:prstGeom prst="rect">
             <a:avLst/>
@@ -16352,8 +16182,8 @@
         </p:nvSpPr>
         <p:spPr>
           <a:xfrm>
-            <a:off x="5293800" y="4459320"/>
-            <a:ext cx="494280" cy="282240"/>
+            <a:off x="5294160" y="4459320"/>
+            <a:ext cx="493920" cy="281880"/>
           </a:xfrm>
           <a:prstGeom prst="rect">
             <a:avLst/>
@@ -16405,7 +16235,7 @@
         <p:spPr>
           <a:xfrm>
             <a:off x="556560" y="4953960"/>
-            <a:ext cx="5229720" cy="494280"/>
+            <a:ext cx="5229720" cy="493920"/>
           </a:xfrm>
           <a:custGeom>
             <a:avLst/>
@@ -16458,7 +16288,7 @@
         <p:spPr>
           <a:xfrm>
             <a:off x="662760" y="5077800"/>
-            <a:ext cx="1625400" cy="246960"/>
+            <a:ext cx="1625040" cy="246600"/>
           </a:xfrm>
           <a:prstGeom prst="rect">
             <a:avLst/>
@@ -16509,8 +16339,8 @@
         </p:nvSpPr>
         <p:spPr>
           <a:xfrm>
-            <a:off x="5136840" y="5060160"/>
-            <a:ext cx="644400" cy="282240"/>
+            <a:off x="5137200" y="5060160"/>
+            <a:ext cx="644040" cy="281880"/>
           </a:xfrm>
           <a:prstGeom prst="rect">
             <a:avLst/>
@@ -16562,7 +16392,7 @@
         <p:spPr>
           <a:xfrm>
             <a:off x="556560" y="5554800"/>
-            <a:ext cx="5229720" cy="494280"/>
+            <a:ext cx="5229720" cy="493920"/>
           </a:xfrm>
           <a:custGeom>
             <a:avLst/>
@@ -16615,7 +16445,7 @@
         <p:spPr>
           <a:xfrm>
             <a:off x="662760" y="5678640"/>
-            <a:ext cx="1157040" cy="246960"/>
+            <a:ext cx="1156680" cy="246600"/>
           </a:xfrm>
           <a:prstGeom prst="rect">
             <a:avLst/>
@@ -16666,8 +16496,8 @@
         </p:nvSpPr>
         <p:spPr>
           <a:xfrm>
-            <a:off x="5199840" y="5661000"/>
-            <a:ext cx="582840" cy="282240"/>
+            <a:off x="5200200" y="5661000"/>
+            <a:ext cx="582480" cy="281880"/>
           </a:xfrm>
           <a:prstGeom prst="rect">
             <a:avLst/>
@@ -16719,7 +16549,7 @@
         <p:spPr>
           <a:xfrm>
             <a:off x="556560" y="6155640"/>
-            <a:ext cx="5229720" cy="494280"/>
+            <a:ext cx="5229720" cy="493920"/>
           </a:xfrm>
           <a:custGeom>
             <a:avLst/>
@@ -16772,7 +16602,7 @@
         <p:spPr>
           <a:xfrm>
             <a:off x="662760" y="6279480"/>
-            <a:ext cx="1413360" cy="246960"/>
+            <a:ext cx="1413000" cy="246600"/>
           </a:xfrm>
           <a:prstGeom prst="rect">
             <a:avLst/>
@@ -16823,8 +16653,8 @@
         </p:nvSpPr>
         <p:spPr>
           <a:xfrm>
-            <a:off x="4971960" y="6261480"/>
-            <a:ext cx="812520" cy="282240"/>
+            <a:off x="4972320" y="6261480"/>
+            <a:ext cx="812160" cy="281880"/>
           </a:xfrm>
           <a:prstGeom prst="rect">
             <a:avLst/>
@@ -16875,8 +16705,8 @@
         </p:nvSpPr>
         <p:spPr>
           <a:xfrm>
-            <a:off x="6213240" y="3739320"/>
-            <a:ext cx="5609880" cy="3100680"/>
+            <a:off x="6213600" y="3739320"/>
+            <a:ext cx="5609880" cy="3100320"/>
           </a:xfrm>
           <a:custGeom>
             <a:avLst/>
@@ -16931,8 +16761,8 @@
         </p:nvSpPr>
         <p:spPr>
           <a:xfrm>
-            <a:off x="6350040" y="3929400"/>
-            <a:ext cx="5335920" cy="282240"/>
+            <a:off x="6350400" y="3929400"/>
+            <a:ext cx="5335920" cy="281880"/>
           </a:xfrm>
           <a:prstGeom prst="rect">
             <a:avLst/>
@@ -16983,8 +16813,8 @@
         </p:nvSpPr>
         <p:spPr>
           <a:xfrm>
-            <a:off x="6403320" y="4353480"/>
-            <a:ext cx="5229720" cy="459000"/>
+            <a:off x="6403680" y="4353480"/>
+            <a:ext cx="5229720" cy="458640"/>
           </a:xfrm>
           <a:custGeom>
             <a:avLst/>
@@ -17036,8 +16866,8 @@
         </p:nvSpPr>
         <p:spPr>
           <a:xfrm>
-            <a:off x="6520320" y="4494600"/>
-            <a:ext cx="198360" cy="176400"/>
+            <a:off x="6520680" y="4494600"/>
+            <a:ext cx="198000" cy="176040"/>
           </a:xfrm>
           <a:custGeom>
             <a:avLst/>
@@ -17155,8 +16985,8 @@
         </p:nvSpPr>
         <p:spPr>
           <a:xfrm>
-            <a:off x="6836040" y="4459320"/>
-            <a:ext cx="2420280" cy="246960"/>
+            <a:off x="6836400" y="4459320"/>
+            <a:ext cx="2420280" cy="246600"/>
           </a:xfrm>
           <a:prstGeom prst="rect">
             <a:avLst/>
@@ -17217,8 +17047,8 @@
         </p:nvSpPr>
         <p:spPr>
           <a:xfrm>
-            <a:off x="6403320" y="4918680"/>
-            <a:ext cx="5229720" cy="459000"/>
+            <a:off x="6403680" y="4918680"/>
+            <a:ext cx="5229720" cy="458640"/>
           </a:xfrm>
           <a:custGeom>
             <a:avLst/>
@@ -17270,8 +17100,8 @@
         </p:nvSpPr>
         <p:spPr>
           <a:xfrm>
-            <a:off x="6520320" y="5060160"/>
-            <a:ext cx="198360" cy="176400"/>
+            <a:off x="6520680" y="5060160"/>
+            <a:ext cx="198000" cy="176040"/>
           </a:xfrm>
           <a:custGeom>
             <a:avLst/>
@@ -17395,8 +17225,8 @@
         </p:nvSpPr>
         <p:spPr>
           <a:xfrm>
-            <a:off x="6836040" y="5024880"/>
-            <a:ext cx="2058120" cy="246960"/>
+            <a:off x="6836400" y="5024880"/>
+            <a:ext cx="2058120" cy="246600"/>
           </a:xfrm>
           <a:prstGeom prst="rect">
             <a:avLst/>
@@ -17457,8 +17287,8 @@
         </p:nvSpPr>
         <p:spPr>
           <a:xfrm>
-            <a:off x="6403320" y="5484240"/>
-            <a:ext cx="5229720" cy="459000"/>
+            <a:off x="6403680" y="5484240"/>
+            <a:ext cx="5229720" cy="458640"/>
           </a:xfrm>
           <a:custGeom>
             <a:avLst/>
@@ -17510,8 +17340,8 @@
         </p:nvSpPr>
         <p:spPr>
           <a:xfrm>
-            <a:off x="6520320" y="5625720"/>
-            <a:ext cx="198360" cy="176400"/>
+            <a:off x="6520680" y="5625720"/>
+            <a:ext cx="198000" cy="176040"/>
           </a:xfrm>
           <a:custGeom>
             <a:avLst/>
@@ -17707,8 +17537,8 @@
         </p:nvSpPr>
         <p:spPr>
           <a:xfrm>
-            <a:off x="6836040" y="5590080"/>
-            <a:ext cx="2455560" cy="246960"/>
+            <a:off x="6836400" y="5590080"/>
+            <a:ext cx="2455560" cy="246600"/>
           </a:xfrm>
           <a:prstGeom prst="rect">
             <a:avLst/>
@@ -17769,8 +17599,8 @@
         </p:nvSpPr>
         <p:spPr>
           <a:xfrm>
-            <a:off x="6403320" y="6049440"/>
-            <a:ext cx="5229720" cy="459000"/>
+            <a:off x="6403680" y="6049440"/>
+            <a:ext cx="5229720" cy="458640"/>
           </a:xfrm>
           <a:custGeom>
             <a:avLst/>
@@ -17822,8 +17652,8 @@
         </p:nvSpPr>
         <p:spPr>
           <a:xfrm>
-            <a:off x="6542280" y="6190920"/>
-            <a:ext cx="154080" cy="176400"/>
+            <a:off x="6542640" y="6190920"/>
+            <a:ext cx="153720" cy="176040"/>
           </a:xfrm>
           <a:custGeom>
             <a:avLst/>
@@ -17983,8 +17813,8 @@
         </p:nvSpPr>
         <p:spPr>
           <a:xfrm>
-            <a:off x="6836040" y="6155640"/>
-            <a:ext cx="2296800" cy="246960"/>
+            <a:off x="6836400" y="6155640"/>
+            <a:ext cx="2296800" cy="246600"/>
           </a:xfrm>
           <a:prstGeom prst="rect">
             <a:avLst/>
@@ -18078,7 +17908,7 @@
         <p:spPr>
           <a:xfrm>
             <a:off x="0" y="0"/>
-            <a:ext cx="12191760" cy="6857640"/>
+            <a:ext cx="12192480" cy="6857280"/>
           </a:xfrm>
           <a:custGeom>
             <a:avLst/>
@@ -18141,7 +17971,7 @@
         <p:spPr>
           <a:xfrm>
             <a:off x="354240" y="354240"/>
-            <a:ext cx="11695320" cy="424800"/>
+            <a:ext cx="11696040" cy="424440"/>
           </a:xfrm>
           <a:prstGeom prst="rect">
             <a:avLst/>
@@ -18193,7 +18023,7 @@
         <p:spPr>
           <a:xfrm>
             <a:off x="354240" y="885960"/>
-            <a:ext cx="11589120" cy="283320"/>
+            <a:ext cx="11589840" cy="282960"/>
           </a:xfrm>
           <a:prstGeom prst="rect">
             <a:avLst/>
@@ -18245,7 +18075,7 @@
         <p:spPr>
           <a:xfrm>
             <a:off x="354240" y="1275840"/>
-            <a:ext cx="850320" cy="34920"/>
+            <a:ext cx="849960" cy="34560"/>
           </a:xfrm>
           <a:custGeom>
             <a:avLst/>
@@ -18296,7 +18126,7 @@
         <p:spPr>
           <a:xfrm>
             <a:off x="367560" y="1466280"/>
-            <a:ext cx="5608440" cy="3180600"/>
+            <a:ext cx="5608440" cy="3180240"/>
           </a:xfrm>
           <a:custGeom>
             <a:avLst/>
@@ -18352,7 +18182,7 @@
         <p:spPr>
           <a:xfrm>
             <a:off x="618120" y="1657080"/>
-            <a:ext cx="278640" cy="318600"/>
+            <a:ext cx="278280" cy="318240"/>
           </a:xfrm>
           <a:custGeom>
             <a:avLst/>
@@ -18639,7 +18469,7 @@
         <p:spPr>
           <a:xfrm>
             <a:off x="1063080" y="1657080"/>
-            <a:ext cx="1213560" cy="318600"/>
+            <a:ext cx="1213200" cy="318240"/>
           </a:xfrm>
           <a:prstGeom prst="rect">
             <a:avLst/>
@@ -18691,7 +18521,7 @@
         <p:spPr>
           <a:xfrm>
             <a:off x="558360" y="2117520"/>
-            <a:ext cx="5227200" cy="708480"/>
+            <a:ext cx="5227200" cy="708120"/>
           </a:xfrm>
           <a:custGeom>
             <a:avLst/>
@@ -18744,7 +18574,7 @@
         <p:spPr>
           <a:xfrm>
             <a:off x="664560" y="2224080"/>
-            <a:ext cx="5094360" cy="247680"/>
+            <a:ext cx="5094360" cy="247320"/>
           </a:xfrm>
           <a:prstGeom prst="rect">
             <a:avLst/>
@@ -18796,7 +18626,7 @@
         <p:spPr>
           <a:xfrm>
             <a:off x="664560" y="2507400"/>
-            <a:ext cx="5085720" cy="212400"/>
+            <a:ext cx="5085720" cy="212040"/>
           </a:xfrm>
           <a:prstGeom prst="rect">
             <a:avLst/>
@@ -18850,7 +18680,7 @@
         <p:spPr>
           <a:xfrm>
             <a:off x="558360" y="2932920"/>
-            <a:ext cx="5227200" cy="708480"/>
+            <a:ext cx="5227200" cy="708120"/>
           </a:xfrm>
           <a:custGeom>
             <a:avLst/>
@@ -18903,7 +18733,7 @@
         <p:spPr>
           <a:xfrm>
             <a:off x="664560" y="3039120"/>
-            <a:ext cx="5094360" cy="247680"/>
+            <a:ext cx="5094360" cy="247320"/>
           </a:xfrm>
           <a:prstGeom prst="rect">
             <a:avLst/>
@@ -18955,7 +18785,7 @@
         <p:spPr>
           <a:xfrm>
             <a:off x="664560" y="3322800"/>
-            <a:ext cx="5085720" cy="212400"/>
+            <a:ext cx="5085720" cy="212040"/>
           </a:xfrm>
           <a:prstGeom prst="rect">
             <a:avLst/>
@@ -19009,7 +18839,7 @@
         <p:spPr>
           <a:xfrm>
             <a:off x="558360" y="3747960"/>
-            <a:ext cx="5227200" cy="708480"/>
+            <a:ext cx="5227200" cy="708120"/>
           </a:xfrm>
           <a:custGeom>
             <a:avLst/>
@@ -19062,7 +18892,7 @@
         <p:spPr>
           <a:xfrm>
             <a:off x="664560" y="3854160"/>
-            <a:ext cx="5094360" cy="247680"/>
+            <a:ext cx="5094360" cy="247320"/>
           </a:xfrm>
           <a:prstGeom prst="rect">
             <a:avLst/>
@@ -19114,7 +18944,7 @@
         <p:spPr>
           <a:xfrm>
             <a:off x="664560" y="4137840"/>
-            <a:ext cx="5085720" cy="212400"/>
+            <a:ext cx="5085720" cy="212040"/>
           </a:xfrm>
           <a:prstGeom prst="rect">
             <a:avLst/>
@@ -19167,8 +18997,8 @@
         </p:nvSpPr>
         <p:spPr>
           <a:xfrm>
-            <a:off x="6215760" y="1466280"/>
-            <a:ext cx="5608440" cy="1293120"/>
+            <a:off x="6216120" y="1466280"/>
+            <a:ext cx="5608440" cy="1292760"/>
           </a:xfrm>
           <a:custGeom>
             <a:avLst/>
@@ -19223,8 +19053,8 @@
         </p:nvSpPr>
         <p:spPr>
           <a:xfrm>
-            <a:off x="6441480" y="1665720"/>
-            <a:ext cx="265320" cy="265320"/>
+            <a:off x="6441840" y="1665720"/>
+            <a:ext cx="264960" cy="264960"/>
           </a:xfrm>
           <a:custGeom>
             <a:avLst/>
@@ -19335,8 +19165,8 @@
         </p:nvSpPr>
         <p:spPr>
           <a:xfrm>
-            <a:off x="6844680" y="1657080"/>
-            <a:ext cx="983160" cy="283320"/>
+            <a:off x="6845040" y="1657080"/>
+            <a:ext cx="982800" cy="282960"/>
           </a:xfrm>
           <a:prstGeom prst="rect">
             <a:avLst/>
@@ -19387,8 +19217,8 @@
         </p:nvSpPr>
         <p:spPr>
           <a:xfrm>
-            <a:off x="6406200" y="2046600"/>
-            <a:ext cx="5307120" cy="522360"/>
+            <a:off x="6406560" y="2046600"/>
+            <a:ext cx="5307120" cy="522000"/>
           </a:xfrm>
           <a:prstGeom prst="rect">
             <a:avLst/>
@@ -19479,8 +19309,8 @@
         </p:nvSpPr>
         <p:spPr>
           <a:xfrm>
-            <a:off x="6215760" y="2923920"/>
-            <a:ext cx="5608440" cy="1293120"/>
+            <a:off x="6216120" y="2923920"/>
+            <a:ext cx="5608440" cy="1292760"/>
           </a:xfrm>
           <a:custGeom>
             <a:avLst/>
@@ -19535,8 +19365,8 @@
         </p:nvSpPr>
         <p:spPr>
           <a:xfrm>
-            <a:off x="6408360" y="3123360"/>
-            <a:ext cx="331920" cy="265320"/>
+            <a:off x="6408720" y="3123360"/>
+            <a:ext cx="331560" cy="264960"/>
           </a:xfrm>
           <a:custGeom>
             <a:avLst/>
@@ -19657,8 +19487,8 @@
         </p:nvSpPr>
         <p:spPr>
           <a:xfrm>
-            <a:off x="6844680" y="3114360"/>
-            <a:ext cx="708480" cy="283320"/>
+            <a:off x="6845040" y="3114360"/>
+            <a:ext cx="708120" cy="282960"/>
           </a:xfrm>
           <a:prstGeom prst="rect">
             <a:avLst/>
@@ -19709,8 +19539,8 @@
         </p:nvSpPr>
         <p:spPr>
           <a:xfrm>
-            <a:off x="6406200" y="3504240"/>
-            <a:ext cx="5307120" cy="522360"/>
+            <a:off x="6406560" y="3504240"/>
+            <a:ext cx="5307120" cy="522000"/>
           </a:xfrm>
           <a:prstGeom prst="rect">
             <a:avLst/>
@@ -19782,7 +19612,7 @@
         <p:spPr>
           <a:xfrm>
             <a:off x="367560" y="4815720"/>
-            <a:ext cx="2737440" cy="1266840"/>
+            <a:ext cx="2737440" cy="1266480"/>
           </a:xfrm>
           <a:custGeom>
             <a:avLst/>
@@ -19838,7 +19668,7 @@
         <p:spPr>
           <a:xfrm>
             <a:off x="1577160" y="4970880"/>
-            <a:ext cx="318600" cy="318600"/>
+            <a:ext cx="318240" cy="318240"/>
           </a:xfrm>
           <a:custGeom>
             <a:avLst/>
@@ -20081,7 +19911,7 @@
         <p:spPr>
           <a:xfrm>
             <a:off x="478440" y="5396040"/>
-            <a:ext cx="2516040" cy="247680"/>
+            <a:ext cx="2516040" cy="247320"/>
           </a:xfrm>
           <a:prstGeom prst="rect">
             <a:avLst/>
@@ -20133,7 +19963,7 @@
         <p:spPr>
           <a:xfrm>
             <a:off x="487440" y="5715000"/>
-            <a:ext cx="2498400" cy="212400"/>
+            <a:ext cx="2498400" cy="212040"/>
           </a:xfrm>
           <a:prstGeom prst="rect">
             <a:avLst/>
@@ -20185,7 +20015,7 @@
         <p:spPr>
           <a:xfrm>
             <a:off x="3273840" y="4815720"/>
-            <a:ext cx="2737440" cy="1266840"/>
+            <a:ext cx="2737440" cy="1266480"/>
           </a:xfrm>
           <a:custGeom>
             <a:avLst/>
@@ -20240,8 +20070,8 @@
         </p:nvSpPr>
         <p:spPr>
           <a:xfrm>
-            <a:off x="4503240" y="4970880"/>
-            <a:ext cx="278640" cy="318600"/>
+            <a:off x="4503600" y="4970880"/>
+            <a:ext cx="278280" cy="318240"/>
           </a:xfrm>
           <a:custGeom>
             <a:avLst/>
@@ -20411,7 +20241,7 @@
         <p:spPr>
           <a:xfrm>
             <a:off x="3384720" y="5396040"/>
-            <a:ext cx="2516040" cy="247680"/>
+            <a:ext cx="2516040" cy="247320"/>
           </a:xfrm>
           <a:prstGeom prst="rect">
             <a:avLst/>
@@ -20463,7 +20293,7 @@
         <p:spPr>
           <a:xfrm>
             <a:off x="3393720" y="5715000"/>
-            <a:ext cx="2498400" cy="212400"/>
+            <a:ext cx="2498400" cy="212040"/>
           </a:xfrm>
           <a:prstGeom prst="rect">
             <a:avLst/>
@@ -20514,8 +20344,8 @@
         </p:nvSpPr>
         <p:spPr>
           <a:xfrm>
-            <a:off x="6180120" y="4815720"/>
-            <a:ext cx="2737440" cy="1266840"/>
+            <a:off x="6180480" y="4815720"/>
+            <a:ext cx="2737440" cy="1266480"/>
           </a:xfrm>
           <a:custGeom>
             <a:avLst/>
@@ -20570,8 +20400,8 @@
         </p:nvSpPr>
         <p:spPr>
           <a:xfrm>
-            <a:off x="7389720" y="4970880"/>
-            <a:ext cx="318600" cy="318600"/>
+            <a:off x="7390080" y="4970880"/>
+            <a:ext cx="318240" cy="318240"/>
           </a:xfrm>
           <a:custGeom>
             <a:avLst/>
@@ -20774,8 +20604,8 @@
         </p:nvSpPr>
         <p:spPr>
           <a:xfrm>
-            <a:off x="6291000" y="5396040"/>
-            <a:ext cx="2516040" cy="247680"/>
+            <a:off x="6291360" y="5396040"/>
+            <a:ext cx="2516040" cy="247320"/>
           </a:xfrm>
           <a:prstGeom prst="rect">
             <a:avLst/>
@@ -20826,8 +20656,8 @@
         </p:nvSpPr>
         <p:spPr>
           <a:xfrm>
-            <a:off x="6299640" y="5715000"/>
-            <a:ext cx="2498400" cy="212400"/>
+            <a:off x="6300000" y="5715000"/>
+            <a:ext cx="2498400" cy="212040"/>
           </a:xfrm>
           <a:prstGeom prst="rect">
             <a:avLst/>
@@ -20878,8 +20708,8 @@
         </p:nvSpPr>
         <p:spPr>
           <a:xfrm>
-            <a:off x="9086400" y="4815720"/>
-            <a:ext cx="2737440" cy="1266840"/>
+            <a:off x="9087120" y="4815720"/>
+            <a:ext cx="2737440" cy="1266480"/>
           </a:xfrm>
           <a:custGeom>
             <a:avLst/>
@@ -20934,8 +20764,8 @@
         </p:nvSpPr>
         <p:spPr>
           <a:xfrm>
-            <a:off x="10296000" y="4970880"/>
-            <a:ext cx="318600" cy="318600"/>
+            <a:off x="10296720" y="4970880"/>
+            <a:ext cx="318240" cy="318240"/>
           </a:xfrm>
           <a:custGeom>
             <a:avLst/>
@@ -21157,8 +20987,8 @@
         </p:nvSpPr>
         <p:spPr>
           <a:xfrm>
-            <a:off x="9197280" y="5396040"/>
-            <a:ext cx="2516040" cy="247680"/>
+            <a:off x="9198000" y="5396040"/>
+            <a:ext cx="2516040" cy="247320"/>
           </a:xfrm>
           <a:prstGeom prst="rect">
             <a:avLst/>
@@ -21209,8 +21039,8 @@
         </p:nvSpPr>
         <p:spPr>
           <a:xfrm>
-            <a:off x="9205920" y="5715000"/>
-            <a:ext cx="2498400" cy="212400"/>
+            <a:off x="9206640" y="5715000"/>
+            <a:ext cx="2498400" cy="212040"/>
           </a:xfrm>
           <a:prstGeom prst="rect">
             <a:avLst/>
@@ -21262,7 +21092,7 @@
         <p:spPr>
           <a:xfrm>
             <a:off x="367560" y="6251040"/>
-            <a:ext cx="11456280" cy="593280"/>
+            <a:ext cx="11457000" cy="592920"/>
           </a:xfrm>
           <a:custGeom>
             <a:avLst/>
@@ -21318,7 +21148,7 @@
         <p:spPr>
           <a:xfrm>
             <a:off x="469440" y="6406200"/>
-            <a:ext cx="11252520" cy="283320"/>
+            <a:ext cx="11253240" cy="282960"/>
           </a:xfrm>
           <a:prstGeom prst="rect">
             <a:avLst/>
@@ -21432,7 +21262,7 @@
         <p:spPr>
           <a:xfrm>
             <a:off x="0" y="0"/>
-            <a:ext cx="12191760" cy="6857640"/>
+            <a:ext cx="12192480" cy="6857280"/>
           </a:xfrm>
           <a:prstGeom prst="roundRect">
             <a:avLst>
@@ -21464,7 +21294,7 @@
         <p:spPr>
           <a:xfrm>
             <a:off x="0" y="0"/>
-            <a:ext cx="12191760" cy="6857640"/>
+            <a:ext cx="12192480" cy="6857280"/>
           </a:xfrm>
           <a:custGeom>
             <a:avLst/>
@@ -21527,7 +21357,7 @@
         <p:spPr>
           <a:xfrm>
             <a:off x="380880" y="1714680"/>
-            <a:ext cx="1856880" cy="609120"/>
+            <a:ext cx="1856520" cy="608760"/>
           </a:xfrm>
           <a:custGeom>
             <a:avLst/>
@@ -21578,7 +21408,7 @@
         <p:spPr>
           <a:xfrm>
             <a:off x="609480" y="1847880"/>
-            <a:ext cx="1568160" cy="342720"/>
+            <a:ext cx="1567800" cy="342360"/>
           </a:xfrm>
           <a:prstGeom prst="rect">
             <a:avLst/>
@@ -21630,7 +21460,7 @@
         <p:spPr>
           <a:xfrm>
             <a:off x="380880" y="2552760"/>
-            <a:ext cx="11772720" cy="1714320"/>
+            <a:ext cx="11773440" cy="1713960"/>
           </a:xfrm>
           <a:prstGeom prst="rect">
             <a:avLst/>
@@ -21703,7 +21533,7 @@
         <p:spPr>
           <a:xfrm>
             <a:off x="380880" y="4495680"/>
-            <a:ext cx="1523520" cy="75960"/>
+            <a:ext cx="1523160" cy="75600"/>
           </a:xfrm>
           <a:custGeom>
             <a:avLst/>
@@ -21754,7 +21584,7 @@
         <p:spPr>
           <a:xfrm>
             <a:off x="380880" y="4800600"/>
-            <a:ext cx="7457760" cy="342720"/>
+            <a:ext cx="7458120" cy="342360"/>
           </a:xfrm>
           <a:prstGeom prst="rect">
             <a:avLst/>
@@ -21805,8 +21635,8 @@
         </p:nvSpPr>
         <p:spPr>
           <a:xfrm>
-            <a:off x="10591920" y="5867280"/>
-            <a:ext cx="151920" cy="151920"/>
+            <a:off x="10592640" y="5867280"/>
+            <a:ext cx="151560" cy="151560"/>
           </a:xfrm>
           <a:custGeom>
             <a:avLst/>
@@ -21856,8 +21686,8 @@
         </p:nvSpPr>
         <p:spPr>
           <a:xfrm>
-            <a:off x="10896480" y="5867280"/>
-            <a:ext cx="151920" cy="151920"/>
+            <a:off x="10897200" y="5867280"/>
+            <a:ext cx="151560" cy="151560"/>
           </a:xfrm>
           <a:custGeom>
             <a:avLst/>
@@ -21907,8 +21737,8 @@
         </p:nvSpPr>
         <p:spPr>
           <a:xfrm>
-            <a:off x="11201400" y="5867280"/>
-            <a:ext cx="151920" cy="151920"/>
+            <a:off x="11202120" y="5867280"/>
+            <a:ext cx="151560" cy="151560"/>
           </a:xfrm>
           <a:custGeom>
             <a:avLst/>
@@ -21991,7 +21821,7 @@
         <p:spPr>
           <a:xfrm>
             <a:off x="0" y="0"/>
-            <a:ext cx="12191760" cy="6856560"/>
+            <a:ext cx="12192480" cy="6856200"/>
           </a:xfrm>
           <a:custGeom>
             <a:avLst/>
@@ -22054,7 +21884,7 @@
         <p:spPr>
           <a:xfrm>
             <a:off x="327240" y="327240"/>
-            <a:ext cx="11733480" cy="392400"/>
+            <a:ext cx="11734200" cy="392040"/>
           </a:xfrm>
           <a:prstGeom prst="rect">
             <a:avLst/>
@@ -22106,7 +21936,7 @@
         <p:spPr>
           <a:xfrm>
             <a:off x="327240" y="818280"/>
-            <a:ext cx="11635200" cy="261360"/>
+            <a:ext cx="11635920" cy="261000"/>
           </a:xfrm>
           <a:prstGeom prst="rect">
             <a:avLst/>
@@ -22158,7 +21988,7 @@
         <p:spPr>
           <a:xfrm>
             <a:off x="327240" y="1178280"/>
-            <a:ext cx="785160" cy="32400"/>
+            <a:ext cx="784800" cy="32040"/>
           </a:xfrm>
           <a:custGeom>
             <a:avLst/>
@@ -22209,7 +22039,7 @@
         <p:spPr>
           <a:xfrm>
             <a:off x="339480" y="1354320"/>
-            <a:ext cx="5645520" cy="3493440"/>
+            <a:ext cx="5645520" cy="3493080"/>
           </a:xfrm>
           <a:custGeom>
             <a:avLst/>
@@ -22265,7 +22095,7 @@
         <p:spPr>
           <a:xfrm>
             <a:off x="453960" y="1530000"/>
-            <a:ext cx="5416560" cy="294120"/>
+            <a:ext cx="5416560" cy="293760"/>
           </a:xfrm>
           <a:prstGeom prst="rect">
             <a:avLst/>
@@ -22317,7 +22147,7 @@
         <p:spPr>
           <a:xfrm>
             <a:off x="515520" y="1955520"/>
-            <a:ext cx="5293800" cy="621360"/>
+            <a:ext cx="5293800" cy="621000"/>
           </a:xfrm>
           <a:custGeom>
             <a:avLst/>
@@ -22370,7 +22200,7 @@
         <p:spPr>
           <a:xfrm>
             <a:off x="634320" y="2086560"/>
-            <a:ext cx="163440" cy="163440"/>
+            <a:ext cx="163080" cy="163080"/>
           </a:xfrm>
           <a:custGeom>
             <a:avLst/>
@@ -22512,7 +22342,7 @@
         <p:spPr>
           <a:xfrm>
             <a:off x="916560" y="2053800"/>
-            <a:ext cx="2405160" cy="228600"/>
+            <a:ext cx="2405160" cy="228240"/>
           </a:xfrm>
           <a:prstGeom prst="rect">
             <a:avLst/>
@@ -22564,7 +22394,7 @@
         <p:spPr>
           <a:xfrm>
             <a:off x="916560" y="2282760"/>
-            <a:ext cx="2397240" cy="196200"/>
+            <a:ext cx="2397240" cy="195840"/>
           </a:xfrm>
           <a:prstGeom prst="rect">
             <a:avLst/>
@@ -22618,7 +22448,7 @@
         <p:spPr>
           <a:xfrm>
             <a:off x="515520" y="2675520"/>
-            <a:ext cx="5293800" cy="621360"/>
+            <a:ext cx="5293800" cy="621000"/>
           </a:xfrm>
           <a:custGeom>
             <a:avLst/>
@@ -22671,7 +22501,7 @@
         <p:spPr>
           <a:xfrm>
             <a:off x="634320" y="2806560"/>
-            <a:ext cx="163440" cy="163440"/>
+            <a:ext cx="163080" cy="163080"/>
           </a:xfrm>
           <a:custGeom>
             <a:avLst/>
@@ -22798,7 +22628,7 @@
         <p:spPr>
           <a:xfrm>
             <a:off x="916560" y="2773800"/>
-            <a:ext cx="2045160" cy="228600"/>
+            <a:ext cx="2045160" cy="228240"/>
           </a:xfrm>
           <a:prstGeom prst="rect">
             <a:avLst/>
@@ -22850,7 +22680,7 @@
         <p:spPr>
           <a:xfrm>
             <a:off x="916560" y="3003120"/>
-            <a:ext cx="2037240" cy="196200"/>
+            <a:ext cx="2037240" cy="195840"/>
           </a:xfrm>
           <a:prstGeom prst="rect">
             <a:avLst/>
@@ -22904,7 +22734,7 @@
         <p:spPr>
           <a:xfrm>
             <a:off x="515520" y="3395880"/>
-            <a:ext cx="5293800" cy="621360"/>
+            <a:ext cx="5293800" cy="621000"/>
           </a:xfrm>
           <a:custGeom>
             <a:avLst/>
@@ -22957,7 +22787,7 @@
         <p:spPr>
           <a:xfrm>
             <a:off x="634320" y="3526560"/>
-            <a:ext cx="163440" cy="163440"/>
+            <a:ext cx="163080" cy="163080"/>
           </a:xfrm>
           <a:custGeom>
             <a:avLst/>
@@ -23102,7 +22932,7 @@
         <p:spPr>
           <a:xfrm>
             <a:off x="916560" y="3493800"/>
-            <a:ext cx="1963440" cy="228600"/>
+            <a:ext cx="1963080" cy="228240"/>
           </a:xfrm>
           <a:prstGeom prst="rect">
             <a:avLst/>
@@ -23154,7 +22984,7 @@
         <p:spPr>
           <a:xfrm>
             <a:off x="916560" y="3723120"/>
-            <a:ext cx="1955160" cy="196200"/>
+            <a:ext cx="1954800" cy="195840"/>
           </a:xfrm>
           <a:prstGeom prst="rect">
             <a:avLst/>
@@ -23207,8 +23037,8 @@
         </p:nvSpPr>
         <p:spPr>
           <a:xfrm>
-            <a:off x="6205680" y="1354320"/>
-            <a:ext cx="5645520" cy="3493440"/>
+            <a:off x="6206040" y="1354320"/>
+            <a:ext cx="5645520" cy="3493080"/>
           </a:xfrm>
           <a:custGeom>
             <a:avLst/>
@@ -23263,8 +23093,8 @@
         </p:nvSpPr>
         <p:spPr>
           <a:xfrm>
-            <a:off x="6320160" y="1530000"/>
-            <a:ext cx="5416560" cy="294120"/>
+            <a:off x="6320520" y="1530000"/>
+            <a:ext cx="5416560" cy="293760"/>
           </a:xfrm>
           <a:prstGeom prst="rect">
             <a:avLst/>
@@ -23315,8 +23145,8 @@
         </p:nvSpPr>
         <p:spPr>
           <a:xfrm>
-            <a:off x="6381360" y="1955520"/>
-            <a:ext cx="5293800" cy="1145160"/>
+            <a:off x="6381720" y="1955520"/>
+            <a:ext cx="5293800" cy="1144800"/>
           </a:xfrm>
           <a:custGeom>
             <a:avLst/>
@@ -23368,8 +23198,8 @@
         </p:nvSpPr>
         <p:spPr>
           <a:xfrm>
-            <a:off x="6414120" y="2086560"/>
-            <a:ext cx="5228280" cy="392400"/>
+            <a:off x="6414480" y="2086560"/>
+            <a:ext cx="5228280" cy="392040"/>
           </a:xfrm>
           <a:prstGeom prst="rect">
             <a:avLst/>
@@ -23420,8 +23250,8 @@
         </p:nvSpPr>
         <p:spPr>
           <a:xfrm>
-            <a:off x="6475680" y="2544840"/>
-            <a:ext cx="5105520" cy="228600"/>
+            <a:off x="6476040" y="2544840"/>
+            <a:ext cx="5105520" cy="228240"/>
           </a:xfrm>
           <a:prstGeom prst="rect">
             <a:avLst/>
@@ -23472,8 +23302,8 @@
         </p:nvSpPr>
         <p:spPr>
           <a:xfrm>
-            <a:off x="6479640" y="2773800"/>
-            <a:ext cx="5097240" cy="196200"/>
+            <a:off x="6480000" y="2773800"/>
+            <a:ext cx="5097240" cy="195840"/>
           </a:xfrm>
           <a:prstGeom prst="rect">
             <a:avLst/>
@@ -23526,8 +23356,8 @@
         </p:nvSpPr>
         <p:spPr>
           <a:xfrm>
-            <a:off x="6381360" y="3232080"/>
-            <a:ext cx="5293800" cy="654120"/>
+            <a:off x="6381720" y="3232080"/>
+            <a:ext cx="5293800" cy="653760"/>
           </a:xfrm>
           <a:custGeom>
             <a:avLst/>
@@ -23579,8 +23409,8 @@
         </p:nvSpPr>
         <p:spPr>
           <a:xfrm>
-            <a:off x="6479640" y="3330360"/>
-            <a:ext cx="5171040" cy="228600"/>
+            <a:off x="6480000" y="3330360"/>
+            <a:ext cx="5171040" cy="228240"/>
           </a:xfrm>
           <a:prstGeom prst="rect">
             <a:avLst/>
@@ -23631,8 +23461,8 @@
         </p:nvSpPr>
         <p:spPr>
           <a:xfrm>
-            <a:off x="6479640" y="3592080"/>
-            <a:ext cx="5162760" cy="196200"/>
+            <a:off x="6480000" y="3592080"/>
+            <a:ext cx="5162760" cy="195840"/>
           </a:xfrm>
           <a:prstGeom prst="rect">
             <a:avLst/>
@@ -23697,8 +23527,8 @@
         </p:nvSpPr>
         <p:spPr>
           <a:xfrm>
-            <a:off x="6381360" y="4017600"/>
-            <a:ext cx="5293800" cy="654120"/>
+            <a:off x="6381720" y="4017600"/>
+            <a:ext cx="5293800" cy="653760"/>
           </a:xfrm>
           <a:custGeom>
             <a:avLst/>
@@ -23750,8 +23580,8 @@
         </p:nvSpPr>
         <p:spPr>
           <a:xfrm>
-            <a:off x="6479640" y="4115880"/>
-            <a:ext cx="5171040" cy="228600"/>
+            <a:off x="6480000" y="4115880"/>
+            <a:ext cx="5171040" cy="228240"/>
           </a:xfrm>
           <a:prstGeom prst="rect">
             <a:avLst/>
@@ -23802,8 +23632,8 @@
         </p:nvSpPr>
         <p:spPr>
           <a:xfrm>
-            <a:off x="6479640" y="4377600"/>
-            <a:ext cx="5162760" cy="196200"/>
+            <a:off x="6480000" y="4377600"/>
+            <a:ext cx="5162760" cy="195840"/>
           </a:xfrm>
           <a:prstGeom prst="rect">
             <a:avLst/>
@@ -23869,7 +23699,7 @@
         <p:spPr>
           <a:xfrm>
             <a:off x="339480" y="5003640"/>
-            <a:ext cx="3731040" cy="1169640"/>
+            <a:ext cx="3731040" cy="1169280"/>
           </a:xfrm>
           <a:custGeom>
             <a:avLst/>
@@ -23925,7 +23755,7 @@
         <p:spPr>
           <a:xfrm>
             <a:off x="2095920" y="5146920"/>
-            <a:ext cx="220680" cy="294120"/>
+            <a:ext cx="220320" cy="293760"/>
           </a:xfrm>
           <a:custGeom>
             <a:avLst/>
@@ -24166,7 +23996,7 @@
         <p:spPr>
           <a:xfrm>
             <a:off x="441720" y="5539680"/>
-            <a:ext cx="3526200" cy="228600"/>
+            <a:ext cx="3526200" cy="228240"/>
           </a:xfrm>
           <a:prstGeom prst="rect">
             <a:avLst/>
@@ -24218,7 +24048,7 @@
         <p:spPr>
           <a:xfrm>
             <a:off x="450000" y="5834160"/>
-            <a:ext cx="3510000" cy="196200"/>
+            <a:ext cx="3510000" cy="195840"/>
           </a:xfrm>
           <a:prstGeom prst="rect">
             <a:avLst/>
@@ -24269,8 +24099,8 @@
         </p:nvSpPr>
         <p:spPr>
           <a:xfrm>
-            <a:off x="4228560" y="5003640"/>
-            <a:ext cx="3731040" cy="1169640"/>
+            <a:off x="4228920" y="5003640"/>
+            <a:ext cx="3731040" cy="1169280"/>
           </a:xfrm>
           <a:custGeom>
             <a:avLst/>
@@ -24325,8 +24155,8 @@
         </p:nvSpPr>
         <p:spPr>
           <a:xfrm>
-            <a:off x="5929200" y="5146920"/>
-            <a:ext cx="331200" cy="294120"/>
+            <a:off x="5929560" y="5146920"/>
+            <a:ext cx="330840" cy="293760"/>
           </a:xfrm>
           <a:custGeom>
             <a:avLst/>
@@ -24428,8 +24258,8 @@
         </p:nvSpPr>
         <p:spPr>
           <a:xfrm>
-            <a:off x="4330800" y="5539680"/>
-            <a:ext cx="3526200" cy="228600"/>
+            <a:off x="4331160" y="5539680"/>
+            <a:ext cx="3526200" cy="228240"/>
           </a:xfrm>
           <a:prstGeom prst="rect">
             <a:avLst/>
@@ -24480,8 +24310,8 @@
         </p:nvSpPr>
         <p:spPr>
           <a:xfrm>
-            <a:off x="4338720" y="5834160"/>
-            <a:ext cx="3510000" cy="196200"/>
+            <a:off x="4339080" y="5834160"/>
+            <a:ext cx="3510000" cy="195840"/>
           </a:xfrm>
           <a:prstGeom prst="rect">
             <a:avLst/>
@@ -24532,8 +24362,8 @@
         </p:nvSpPr>
         <p:spPr>
           <a:xfrm>
-            <a:off x="8117280" y="5003640"/>
-            <a:ext cx="3731040" cy="1169640"/>
+            <a:off x="8117640" y="5003640"/>
+            <a:ext cx="3731040" cy="1169280"/>
           </a:xfrm>
           <a:custGeom>
             <a:avLst/>
@@ -24588,8 +24418,8 @@
         </p:nvSpPr>
         <p:spPr>
           <a:xfrm>
-            <a:off x="9818280" y="5146920"/>
-            <a:ext cx="331200" cy="294120"/>
+            <a:off x="9819000" y="5146920"/>
+            <a:ext cx="330840" cy="293760"/>
           </a:xfrm>
           <a:custGeom>
             <a:avLst/>
@@ -24778,8 +24608,8 @@
         </p:nvSpPr>
         <p:spPr>
           <a:xfrm>
-            <a:off x="8219520" y="5539680"/>
-            <a:ext cx="3526200" cy="228600"/>
+            <a:off x="8220240" y="5539680"/>
+            <a:ext cx="3526200" cy="228240"/>
           </a:xfrm>
           <a:prstGeom prst="rect">
             <a:avLst/>
@@ -24830,8 +24660,8 @@
         </p:nvSpPr>
         <p:spPr>
           <a:xfrm>
-            <a:off x="8227800" y="5834160"/>
-            <a:ext cx="3510000" cy="196200"/>
+            <a:off x="8228520" y="5834160"/>
+            <a:ext cx="3510000" cy="195840"/>
           </a:xfrm>
           <a:prstGeom prst="rect">
             <a:avLst/>
@@ -24883,7 +24713,7 @@
         <p:spPr>
           <a:xfrm>
             <a:off x="339480" y="6329160"/>
-            <a:ext cx="11512440" cy="515160"/>
+            <a:ext cx="11513160" cy="514800"/>
           </a:xfrm>
           <a:custGeom>
             <a:avLst/>
@@ -24939,7 +24769,7 @@
         <p:spPr>
           <a:xfrm>
             <a:off x="441720" y="6472440"/>
-            <a:ext cx="11307960" cy="228600"/>
+            <a:ext cx="11308680" cy="228240"/>
           </a:xfrm>
           <a:prstGeom prst="rect">
             <a:avLst/>
@@ -25043,7 +24873,7 @@
         <p:spPr>
           <a:xfrm>
             <a:off x="0" y="0"/>
-            <a:ext cx="12191760" cy="6859800"/>
+            <a:ext cx="12192480" cy="6859440"/>
           </a:xfrm>
           <a:custGeom>
             <a:avLst/>
@@ -25106,7 +24936,7 @@
         <p:spPr>
           <a:xfrm>
             <a:off x="372960" y="372960"/>
-            <a:ext cx="11669760" cy="447120"/>
+            <a:ext cx="11670480" cy="446760"/>
           </a:xfrm>
           <a:prstGeom prst="rect">
             <a:avLst/>
@@ -25158,7 +24988,7 @@
         <p:spPr>
           <a:xfrm>
             <a:off x="372960" y="932040"/>
-            <a:ext cx="11557800" cy="298080"/>
+            <a:ext cx="11558520" cy="297720"/>
           </a:xfrm>
           <a:prstGeom prst="rect">
             <a:avLst/>
@@ -25210,7 +25040,7 @@
         <p:spPr>
           <a:xfrm>
             <a:off x="372960" y="1342080"/>
-            <a:ext cx="894600" cy="37080"/>
+            <a:ext cx="894240" cy="36720"/>
           </a:xfrm>
           <a:custGeom>
             <a:avLst/>
@@ -25261,7 +25091,7 @@
         <p:spPr>
           <a:xfrm>
             <a:off x="387000" y="1542600"/>
-            <a:ext cx="5582880" cy="2013120"/>
+            <a:ext cx="5582880" cy="2012760"/>
           </a:xfrm>
           <a:custGeom>
             <a:avLst/>
@@ -25317,7 +25147,7 @@
         <p:spPr>
           <a:xfrm>
             <a:off x="587160" y="1743120"/>
-            <a:ext cx="5294160" cy="298080"/>
+            <a:ext cx="5294160" cy="297720"/>
           </a:xfrm>
           <a:prstGeom prst="rect">
             <a:avLst/>
@@ -25369,7 +25199,7 @@
         <p:spPr>
           <a:xfrm>
             <a:off x="587160" y="2153160"/>
-            <a:ext cx="5266080" cy="549720"/>
+            <a:ext cx="5266080" cy="549360"/>
           </a:xfrm>
           <a:prstGeom prst="rect">
             <a:avLst/>
@@ -25461,7 +25291,7 @@
         <p:spPr>
           <a:xfrm>
             <a:off x="587160" y="2810160"/>
-            <a:ext cx="5266080" cy="549720"/>
+            <a:ext cx="5266080" cy="549360"/>
           </a:xfrm>
           <a:prstGeom prst="rect">
             <a:avLst/>
@@ -25533,7 +25363,7 @@
         <p:spPr>
           <a:xfrm>
             <a:off x="387000" y="3733200"/>
-            <a:ext cx="5582880" cy="1929240"/>
+            <a:ext cx="5582880" cy="1928880"/>
           </a:xfrm>
           <a:custGeom>
             <a:avLst/>
@@ -25589,7 +25419,7 @@
         <p:spPr>
           <a:xfrm>
             <a:off x="587160" y="3933360"/>
-            <a:ext cx="5294160" cy="298080"/>
+            <a:ext cx="5294160" cy="297720"/>
           </a:xfrm>
           <a:prstGeom prst="rect">
             <a:avLst/>
@@ -25641,7 +25471,7 @@
         <p:spPr>
           <a:xfrm>
             <a:off x="610560" y="4380840"/>
-            <a:ext cx="167400" cy="167400"/>
+            <a:ext cx="167040" cy="167040"/>
           </a:xfrm>
           <a:custGeom>
             <a:avLst/>
@@ -25746,7 +25576,7 @@
         <p:spPr>
           <a:xfrm>
             <a:off x="908640" y="4343760"/>
-            <a:ext cx="3150000" cy="223200"/>
+            <a:ext cx="3150000" cy="222840"/>
           </a:xfrm>
           <a:prstGeom prst="rect">
             <a:avLst/>
@@ -25808,7 +25638,7 @@
         <p:spPr>
           <a:xfrm>
             <a:off x="610560" y="4679280"/>
-            <a:ext cx="167400" cy="167400"/>
+            <a:ext cx="167040" cy="167040"/>
           </a:xfrm>
           <a:custGeom>
             <a:avLst/>
@@ -25913,7 +25743,7 @@
         <p:spPr>
           <a:xfrm>
             <a:off x="908640" y="4641840"/>
-            <a:ext cx="2777400" cy="223200"/>
+            <a:ext cx="2777400" cy="222840"/>
           </a:xfrm>
           <a:prstGeom prst="rect">
             <a:avLst/>
@@ -25975,7 +25805,7 @@
         <p:spPr>
           <a:xfrm>
             <a:off x="610560" y="4977360"/>
-            <a:ext cx="167400" cy="167400"/>
+            <a:ext cx="167040" cy="167040"/>
           </a:xfrm>
           <a:custGeom>
             <a:avLst/>
@@ -26080,7 +25910,7 @@
         <p:spPr>
           <a:xfrm>
             <a:off x="908640" y="4940280"/>
-            <a:ext cx="3187440" cy="223200"/>
+            <a:ext cx="3187440" cy="222840"/>
           </a:xfrm>
           <a:prstGeom prst="rect">
             <a:avLst/>
@@ -26142,7 +25972,7 @@
         <p:spPr>
           <a:xfrm>
             <a:off x="610560" y="5275800"/>
-            <a:ext cx="167400" cy="167400"/>
+            <a:ext cx="167040" cy="167040"/>
           </a:xfrm>
           <a:custGeom>
             <a:avLst/>
@@ -26247,7 +26077,7 @@
         <p:spPr>
           <a:xfrm>
             <a:off x="908640" y="5238360"/>
-            <a:ext cx="2982240" cy="223200"/>
+            <a:ext cx="2982240" cy="222840"/>
           </a:xfrm>
           <a:prstGeom prst="rect">
             <a:avLst/>
@@ -26308,8 +26138,8 @@
         </p:nvSpPr>
         <p:spPr>
           <a:xfrm>
-            <a:off x="6224040" y="1542600"/>
-            <a:ext cx="5582880" cy="3942360"/>
+            <a:off x="6224400" y="1542600"/>
+            <a:ext cx="5582880" cy="3942000"/>
           </a:xfrm>
           <a:custGeom>
             <a:avLst/>
@@ -26364,8 +26194,8 @@
         </p:nvSpPr>
         <p:spPr>
           <a:xfrm>
-            <a:off x="6368400" y="1743120"/>
-            <a:ext cx="5294160" cy="298080"/>
+            <a:off x="6368760" y="1743120"/>
+            <a:ext cx="5294160" cy="297720"/>
           </a:xfrm>
           <a:prstGeom prst="rect">
             <a:avLst/>
@@ -26416,8 +26246,8 @@
         </p:nvSpPr>
         <p:spPr>
           <a:xfrm>
-            <a:off x="6424200" y="2190600"/>
-            <a:ext cx="5182200" cy="1080720"/>
+            <a:off x="6424560" y="2190600"/>
+            <a:ext cx="5182200" cy="1080360"/>
           </a:xfrm>
           <a:custGeom>
             <a:avLst/>
@@ -26469,8 +26299,8 @@
         </p:nvSpPr>
         <p:spPr>
           <a:xfrm>
-            <a:off x="6461640" y="2339640"/>
-            <a:ext cx="5107680" cy="447120"/>
+            <a:off x="6462000" y="2339640"/>
+            <a:ext cx="5107680" cy="446760"/>
           </a:xfrm>
           <a:prstGeom prst="rect">
             <a:avLst/>
@@ -26521,8 +26351,8 @@
         </p:nvSpPr>
         <p:spPr>
           <a:xfrm>
-            <a:off x="6531480" y="2861640"/>
-            <a:ext cx="4967640" cy="260640"/>
+            <a:off x="6531840" y="2861640"/>
+            <a:ext cx="4967640" cy="260280"/>
           </a:xfrm>
           <a:prstGeom prst="rect">
             <a:avLst/>
@@ -26573,8 +26403,8 @@
         </p:nvSpPr>
         <p:spPr>
           <a:xfrm>
-            <a:off x="6424200" y="3420720"/>
-            <a:ext cx="5182200" cy="857160"/>
+            <a:off x="6424560" y="3420720"/>
+            <a:ext cx="5182200" cy="856800"/>
           </a:xfrm>
           <a:custGeom>
             <a:avLst/>
@@ -26626,8 +26456,8 @@
         </p:nvSpPr>
         <p:spPr>
           <a:xfrm>
-            <a:off x="6573240" y="3570120"/>
-            <a:ext cx="4967640" cy="260640"/>
+            <a:off x="6573600" y="3570120"/>
+            <a:ext cx="4967640" cy="260280"/>
           </a:xfrm>
           <a:prstGeom prst="rect">
             <a:avLst/>
@@ -26678,8 +26508,8 @@
         </p:nvSpPr>
         <p:spPr>
           <a:xfrm>
-            <a:off x="6573240" y="3905640"/>
-            <a:ext cx="4958640" cy="223200"/>
+            <a:off x="6573600" y="3905640"/>
+            <a:ext cx="4958640" cy="222840"/>
           </a:xfrm>
           <a:prstGeom prst="rect">
             <a:avLst/>
@@ -26732,8 +26562,8 @@
         </p:nvSpPr>
         <p:spPr>
           <a:xfrm>
-            <a:off x="6424200" y="4427640"/>
-            <a:ext cx="5182200" cy="857160"/>
+            <a:off x="6424560" y="4427640"/>
+            <a:ext cx="5182200" cy="856800"/>
           </a:xfrm>
           <a:custGeom>
             <a:avLst/>
@@ -26785,8 +26615,8 @@
         </p:nvSpPr>
         <p:spPr>
           <a:xfrm>
-            <a:off x="6573240" y="4576680"/>
-            <a:ext cx="4967640" cy="260640"/>
+            <a:off x="6573600" y="4576680"/>
+            <a:ext cx="4967640" cy="260280"/>
           </a:xfrm>
           <a:prstGeom prst="rect">
             <a:avLst/>
@@ -26837,8 +26667,8 @@
         </p:nvSpPr>
         <p:spPr>
           <a:xfrm>
-            <a:off x="6573240" y="4912200"/>
-            <a:ext cx="4958640" cy="223200"/>
+            <a:off x="6573600" y="4912200"/>
+            <a:ext cx="4958640" cy="222840"/>
           </a:xfrm>
           <a:prstGeom prst="rect">
             <a:avLst/>
@@ -26891,8 +26721,8 @@
         </p:nvSpPr>
         <p:spPr>
           <a:xfrm>
-            <a:off x="6224040" y="5662440"/>
-            <a:ext cx="5582880" cy="1183320"/>
+            <a:off x="6224400" y="5662440"/>
+            <a:ext cx="5582880" cy="1182960"/>
           </a:xfrm>
           <a:custGeom>
             <a:avLst/>
@@ -26947,8 +26777,8 @@
         </p:nvSpPr>
         <p:spPr>
           <a:xfrm>
-            <a:off x="6340320" y="5825520"/>
-            <a:ext cx="5349960" cy="260640"/>
+            <a:off x="6340680" y="5825520"/>
+            <a:ext cx="5349960" cy="260280"/>
           </a:xfrm>
           <a:prstGeom prst="rect">
             <a:avLst/>
@@ -26999,8 +26829,8 @@
         </p:nvSpPr>
         <p:spPr>
           <a:xfrm>
-            <a:off x="6349680" y="6198480"/>
-            <a:ext cx="5331240" cy="484200"/>
+            <a:off x="6350040" y="6198480"/>
+            <a:ext cx="5331240" cy="483840"/>
           </a:xfrm>
           <a:prstGeom prst="rect">
             <a:avLst/>
@@ -27124,7 +26954,7 @@
         <p:spPr>
           <a:xfrm>
             <a:off x="0" y="0"/>
-            <a:ext cx="12191760" cy="6857640"/>
+            <a:ext cx="12192480" cy="6857280"/>
           </a:xfrm>
           <a:custGeom>
             <a:avLst/>
@@ -27187,7 +27017,7 @@
         <p:spPr>
           <a:xfrm>
             <a:off x="380880" y="380880"/>
-            <a:ext cx="11715480" cy="571320"/>
+            <a:ext cx="11716200" cy="570960"/>
           </a:xfrm>
           <a:prstGeom prst="rect">
             <a:avLst/>
@@ -27239,7 +27069,7 @@
         <p:spPr>
           <a:xfrm>
             <a:off x="380880" y="1104840"/>
-            <a:ext cx="914040" cy="75960"/>
+            <a:ext cx="913680" cy="75600"/>
           </a:xfrm>
           <a:custGeom>
             <a:avLst/>
@@ -27290,7 +27120,7 @@
         <p:spPr>
           <a:xfrm>
             <a:off x="399960" y="1504800"/>
-            <a:ext cx="5447880" cy="1342800"/>
+            <a:ext cx="5447880" cy="1342440"/>
           </a:xfrm>
           <a:custGeom>
             <a:avLst/>
@@ -27346,7 +27176,7 @@
         <p:spPr>
           <a:xfrm>
             <a:off x="647640" y="1752480"/>
-            <a:ext cx="666360" cy="571320"/>
+            <a:ext cx="666000" cy="570960"/>
           </a:xfrm>
           <a:prstGeom prst="rect">
             <a:avLst/>
@@ -27398,7 +27228,7 @@
         <p:spPr>
           <a:xfrm>
             <a:off x="1257480" y="1752480"/>
-            <a:ext cx="4485960" cy="342720"/>
+            <a:ext cx="4485960" cy="342360"/>
           </a:xfrm>
           <a:prstGeom prst="rect">
             <a:avLst/>
@@ -27450,7 +27280,7 @@
         <p:spPr>
           <a:xfrm>
             <a:off x="1257480" y="2171880"/>
-            <a:ext cx="4438440" cy="266400"/>
+            <a:ext cx="4438440" cy="266040"/>
           </a:xfrm>
           <a:prstGeom prst="rect">
             <a:avLst/>
@@ -27503,8 +27333,8 @@
         </p:nvSpPr>
         <p:spPr>
           <a:xfrm>
-            <a:off x="6343560" y="1504800"/>
-            <a:ext cx="5447880" cy="1342800"/>
+            <a:off x="6343920" y="1504800"/>
+            <a:ext cx="5447880" cy="1342440"/>
           </a:xfrm>
           <a:custGeom>
             <a:avLst/>
@@ -27559,8 +27389,8 @@
         </p:nvSpPr>
         <p:spPr>
           <a:xfrm>
-            <a:off x="6591240" y="1752480"/>
-            <a:ext cx="771120" cy="571320"/>
+            <a:off x="6591600" y="1752480"/>
+            <a:ext cx="770760" cy="570960"/>
           </a:xfrm>
           <a:prstGeom prst="rect">
             <a:avLst/>
@@ -27611,8 +27441,8 @@
         </p:nvSpPr>
         <p:spPr>
           <a:xfrm>
-            <a:off x="7306920" y="1752480"/>
-            <a:ext cx="4381200" cy="342720"/>
+            <a:off x="7307280" y="1752480"/>
+            <a:ext cx="4381200" cy="342360"/>
           </a:xfrm>
           <a:prstGeom prst="rect">
             <a:avLst/>
@@ -27663,8 +27493,8 @@
         </p:nvSpPr>
         <p:spPr>
           <a:xfrm>
-            <a:off x="7306920" y="2171880"/>
-            <a:ext cx="4333680" cy="266400"/>
+            <a:off x="7307280" y="2171880"/>
+            <a:ext cx="4333680" cy="266040"/>
           </a:xfrm>
           <a:prstGeom prst="rect">
             <a:avLst/>
@@ -27718,7 +27548,7 @@
         <p:spPr>
           <a:xfrm>
             <a:off x="399960" y="3117960"/>
-            <a:ext cx="5447880" cy="1342800"/>
+            <a:ext cx="5447880" cy="1342440"/>
           </a:xfrm>
           <a:custGeom>
             <a:avLst/>
@@ -27774,7 +27604,7 @@
         <p:spPr>
           <a:xfrm>
             <a:off x="647640" y="3365280"/>
-            <a:ext cx="771120" cy="571320"/>
+            <a:ext cx="770760" cy="570960"/>
           </a:xfrm>
           <a:prstGeom prst="rect">
             <a:avLst/>
@@ -27826,7 +27656,7 @@
         <p:spPr>
           <a:xfrm>
             <a:off x="1363320" y="3365280"/>
-            <a:ext cx="4381200" cy="342720"/>
+            <a:ext cx="4381200" cy="342360"/>
           </a:xfrm>
           <a:prstGeom prst="rect">
             <a:avLst/>
@@ -27878,7 +27708,7 @@
         <p:spPr>
           <a:xfrm>
             <a:off x="1363320" y="3784680"/>
-            <a:ext cx="4333680" cy="266400"/>
+            <a:ext cx="4333680" cy="266040"/>
           </a:xfrm>
           <a:prstGeom prst="rect">
             <a:avLst/>
@@ -27931,8 +27761,8 @@
         </p:nvSpPr>
         <p:spPr>
           <a:xfrm>
-            <a:off x="6343560" y="3117960"/>
-            <a:ext cx="5447880" cy="1342800"/>
+            <a:off x="6343920" y="3117960"/>
+            <a:ext cx="5447880" cy="1342440"/>
           </a:xfrm>
           <a:custGeom>
             <a:avLst/>
@@ -27987,8 +27817,8 @@
         </p:nvSpPr>
         <p:spPr>
           <a:xfrm>
-            <a:off x="6591240" y="3365280"/>
-            <a:ext cx="752040" cy="571320"/>
+            <a:off x="6591600" y="3365280"/>
+            <a:ext cx="751680" cy="570960"/>
           </a:xfrm>
           <a:prstGeom prst="rect">
             <a:avLst/>
@@ -28039,8 +27869,8 @@
         </p:nvSpPr>
         <p:spPr>
           <a:xfrm>
-            <a:off x="7285680" y="3365280"/>
-            <a:ext cx="4400280" cy="342720"/>
+            <a:off x="7286040" y="3365280"/>
+            <a:ext cx="4400280" cy="342360"/>
           </a:xfrm>
           <a:prstGeom prst="rect">
             <a:avLst/>
@@ -28091,8 +27921,8 @@
         </p:nvSpPr>
         <p:spPr>
           <a:xfrm>
-            <a:off x="7285680" y="3784680"/>
-            <a:ext cx="4352400" cy="266400"/>
+            <a:off x="7286040" y="3784680"/>
+            <a:ext cx="4352400" cy="266040"/>
           </a:xfrm>
           <a:prstGeom prst="rect">
             <a:avLst/>
@@ -28146,7 +27976,7 @@
         <p:spPr>
           <a:xfrm>
             <a:off x="399960" y="4730760"/>
-            <a:ext cx="11391480" cy="1342800"/>
+            <a:ext cx="11392200" cy="1342440"/>
           </a:xfrm>
           <a:custGeom>
             <a:avLst/>
@@ -28202,7 +28032,7 @@
         <p:spPr>
           <a:xfrm>
             <a:off x="647640" y="4978440"/>
-            <a:ext cx="752040" cy="571320"/>
+            <a:ext cx="751680" cy="570960"/>
           </a:xfrm>
           <a:prstGeom prst="rect">
             <a:avLst/>
@@ -28254,7 +28084,7 @@
         <p:spPr>
           <a:xfrm>
             <a:off x="1342080" y="4978440"/>
-            <a:ext cx="10343880" cy="342720"/>
+            <a:ext cx="10344600" cy="342360"/>
           </a:xfrm>
           <a:prstGeom prst="rect">
             <a:avLst/>
@@ -28306,7 +28136,7 @@
         <p:spPr>
           <a:xfrm>
             <a:off x="1342080" y="5397480"/>
-            <a:ext cx="10296000" cy="266400"/>
+            <a:ext cx="10296720" cy="266040"/>
           </a:xfrm>
           <a:prstGeom prst="rect">
             <a:avLst/>
@@ -28359,8 +28189,8 @@
         </p:nvSpPr>
         <p:spPr>
           <a:xfrm>
-            <a:off x="5715000" y="6324480"/>
-            <a:ext cx="151920" cy="151920"/>
+            <a:off x="5715360" y="6324480"/>
+            <a:ext cx="151560" cy="151560"/>
           </a:xfrm>
           <a:custGeom>
             <a:avLst/>
@@ -28410,8 +28240,8 @@
         </p:nvSpPr>
         <p:spPr>
           <a:xfrm>
-            <a:off x="6019920" y="6324480"/>
-            <a:ext cx="151920" cy="151920"/>
+            <a:off x="6020280" y="6324480"/>
+            <a:ext cx="151560" cy="151560"/>
           </a:xfrm>
           <a:custGeom>
             <a:avLst/>
@@ -28461,8 +28291,8 @@
         </p:nvSpPr>
         <p:spPr>
           <a:xfrm>
-            <a:off x="6324480" y="6324480"/>
-            <a:ext cx="151920" cy="151920"/>
+            <a:off x="6324840" y="6324480"/>
+            <a:ext cx="151560" cy="151560"/>
           </a:xfrm>
           <a:custGeom>
             <a:avLst/>
@@ -28545,7 +28375,7 @@
         <p:spPr>
           <a:xfrm>
             <a:off x="0" y="0"/>
-            <a:ext cx="12191760" cy="6855840"/>
+            <a:ext cx="12192480" cy="6855480"/>
           </a:xfrm>
           <a:prstGeom prst="roundRect">
             <a:avLst>
@@ -28577,7 +28407,7 @@
         <p:spPr>
           <a:xfrm>
             <a:off x="0" y="0"/>
-            <a:ext cx="12191760" cy="6855840"/>
+            <a:ext cx="12192480" cy="6855480"/>
           </a:xfrm>
           <a:custGeom>
             <a:avLst/>
@@ -28639,8 +28469,8 @@
         </p:nvSpPr>
         <p:spPr>
           <a:xfrm>
-            <a:off x="5608440" y="-186840"/>
-            <a:ext cx="971280" cy="647640"/>
+            <a:off x="5608800" y="-186840"/>
+            <a:ext cx="970920" cy="647280"/>
           </a:xfrm>
           <a:prstGeom prst="rect">
             <a:avLst/>
@@ -28691,8 +28521,8 @@
         </p:nvSpPr>
         <p:spPr>
           <a:xfrm>
-            <a:off x="4541400" y="821160"/>
-            <a:ext cx="3103920" cy="1619280"/>
+            <a:off x="4541760" y="821160"/>
+            <a:ext cx="3103920" cy="1618920"/>
           </a:xfrm>
           <a:prstGeom prst="rect">
             <a:avLst/>
@@ -28764,8 +28594,8 @@
         </p:nvSpPr>
         <p:spPr>
           <a:xfrm>
-            <a:off x="5374800" y="2656440"/>
-            <a:ext cx="1439280" cy="360"/>
+            <a:off x="5375160" y="2656440"/>
+            <a:ext cx="1438920" cy="360"/>
           </a:xfrm>
           <a:custGeom>
             <a:avLst/>
@@ -28816,7 +28646,7 @@
         <p:spPr>
           <a:xfrm>
             <a:off x="2201400" y="2944440"/>
-            <a:ext cx="7782840" cy="350640"/>
+            <a:ext cx="7783200" cy="350280"/>
           </a:xfrm>
           <a:prstGeom prst="rect">
             <a:avLst/>
@@ -28868,7 +28698,7 @@
         <p:spPr>
           <a:xfrm>
             <a:off x="2268720" y="3524760"/>
-            <a:ext cx="3742560" cy="944280"/>
+            <a:ext cx="3742560" cy="943920"/>
           </a:xfrm>
           <a:custGeom>
             <a:avLst/>
@@ -28924,7 +28754,7 @@
         <p:spPr>
           <a:xfrm>
             <a:off x="4006080" y="3682440"/>
-            <a:ext cx="269640" cy="269640"/>
+            <a:ext cx="269280" cy="269280"/>
           </a:xfrm>
           <a:custGeom>
             <a:avLst/>
@@ -29101,7 +28931,7 @@
         <p:spPr>
           <a:xfrm>
             <a:off x="2385720" y="4060080"/>
-            <a:ext cx="3508920" cy="251640"/>
+            <a:ext cx="3508920" cy="251280"/>
           </a:xfrm>
           <a:prstGeom prst="rect">
             <a:avLst/>
@@ -29152,8 +28982,8 @@
         </p:nvSpPr>
         <p:spPr>
           <a:xfrm>
-            <a:off x="6179760" y="3524760"/>
-            <a:ext cx="3742560" cy="944280"/>
+            <a:off x="6180120" y="3524760"/>
+            <a:ext cx="3742560" cy="943920"/>
           </a:xfrm>
           <a:custGeom>
             <a:avLst/>
@@ -29208,8 +29038,8 @@
         </p:nvSpPr>
         <p:spPr>
           <a:xfrm>
-            <a:off x="7883640" y="3682440"/>
-            <a:ext cx="336960" cy="269640"/>
+            <a:off x="7884000" y="3682440"/>
+            <a:ext cx="336600" cy="269280"/>
           </a:xfrm>
           <a:custGeom>
             <a:avLst/>
@@ -29424,8 +29254,8 @@
         </p:nvSpPr>
         <p:spPr>
           <a:xfrm>
-            <a:off x="6296760" y="4060080"/>
-            <a:ext cx="3508920" cy="251640"/>
+            <a:off x="6297120" y="4060080"/>
+            <a:ext cx="3508920" cy="251280"/>
           </a:xfrm>
           <a:prstGeom prst="rect">
             <a:avLst/>
@@ -29477,7 +29307,7 @@
         <p:spPr>
           <a:xfrm>
             <a:off x="2268720" y="4640760"/>
-            <a:ext cx="3742560" cy="944280"/>
+            <a:ext cx="3742560" cy="943920"/>
           </a:xfrm>
           <a:custGeom>
             <a:avLst/>
@@ -29533,7 +29363,7 @@
         <p:spPr>
           <a:xfrm>
             <a:off x="4039920" y="4798080"/>
-            <a:ext cx="201960" cy="269640"/>
+            <a:ext cx="201600" cy="269280"/>
           </a:xfrm>
           <a:custGeom>
             <a:avLst/>
@@ -29709,7 +29539,7 @@
         <p:spPr>
           <a:xfrm>
             <a:off x="2385720" y="5176080"/>
-            <a:ext cx="3508920" cy="251640"/>
+            <a:ext cx="3508920" cy="251280"/>
           </a:xfrm>
           <a:prstGeom prst="rect">
             <a:avLst/>
@@ -29760,8 +29590,8 @@
         </p:nvSpPr>
         <p:spPr>
           <a:xfrm>
-            <a:off x="6179760" y="4640760"/>
-            <a:ext cx="3742560" cy="944280"/>
+            <a:off x="6180120" y="4640760"/>
+            <a:ext cx="3742560" cy="943920"/>
           </a:xfrm>
           <a:custGeom>
             <a:avLst/>
@@ -29816,8 +29646,8 @@
         </p:nvSpPr>
         <p:spPr>
           <a:xfrm>
-            <a:off x="7917120" y="4798080"/>
-            <a:ext cx="269640" cy="269640"/>
+            <a:off x="7917480" y="4798080"/>
+            <a:ext cx="269280" cy="269280"/>
           </a:xfrm>
           <a:custGeom>
             <a:avLst/>
@@ -29907,8 +29737,8 @@
         </p:nvSpPr>
         <p:spPr>
           <a:xfrm>
-            <a:off x="6296760" y="5176080"/>
-            <a:ext cx="3508920" cy="251640"/>
+            <a:off x="6297120" y="5176080"/>
+            <a:ext cx="3508920" cy="251280"/>
           </a:xfrm>
           <a:prstGeom prst="rect">
             <a:avLst/>
@@ -29960,7 +29790,7 @@
         <p:spPr>
           <a:xfrm>
             <a:off x="2210400" y="5814720"/>
-            <a:ext cx="7764840" cy="296640"/>
+            <a:ext cx="7765200" cy="296280"/>
           </a:xfrm>
           <a:prstGeom prst="rect">
             <a:avLst/>
@@ -30032,7 +29862,7 @@
         <p:spPr>
           <a:xfrm>
             <a:off x="2187720" y="6395040"/>
-            <a:ext cx="7809840" cy="323640"/>
+            <a:ext cx="7810200" cy="323280"/>
           </a:xfrm>
           <a:prstGeom prst="rect">
             <a:avLst/>
@@ -30084,7 +29914,7 @@
         <p:spPr>
           <a:xfrm>
             <a:off x="2210400" y="6791040"/>
-            <a:ext cx="7764840" cy="251640"/>
+            <a:ext cx="7765200" cy="251280"/>
           </a:xfrm>
           <a:prstGeom prst="rect">
             <a:avLst/>
@@ -30135,8 +29965,8 @@
         </p:nvSpPr>
         <p:spPr>
           <a:xfrm>
-            <a:off x="5734440" y="5920560"/>
-            <a:ext cx="143640" cy="143640"/>
+            <a:off x="5734800" y="5920560"/>
+            <a:ext cx="143280" cy="143280"/>
           </a:xfrm>
           <a:custGeom>
             <a:avLst/>
@@ -30186,8 +30016,8 @@
         </p:nvSpPr>
         <p:spPr>
           <a:xfrm>
-            <a:off x="6022440" y="5920560"/>
-            <a:ext cx="143640" cy="143640"/>
+            <a:off x="6022800" y="5920560"/>
+            <a:ext cx="143280" cy="143280"/>
           </a:xfrm>
           <a:custGeom>
             <a:avLst/>
@@ -30237,8 +30067,8 @@
         </p:nvSpPr>
         <p:spPr>
           <a:xfrm>
-            <a:off x="6310440" y="5920560"/>
-            <a:ext cx="143640" cy="143640"/>
+            <a:off x="6310800" y="5920560"/>
+            <a:ext cx="143280" cy="143280"/>
           </a:xfrm>
           <a:custGeom>
             <a:avLst/>
@@ -30321,7 +30151,7 @@
         <p:spPr>
           <a:xfrm>
             <a:off x="0" y="0"/>
-            <a:ext cx="12191760" cy="6857640"/>
+            <a:ext cx="12192480" cy="6857280"/>
           </a:xfrm>
           <a:prstGeom prst="roundRect">
             <a:avLst>
@@ -30353,7 +30183,7 @@
         <p:spPr>
           <a:xfrm>
             <a:off x="0" y="0"/>
-            <a:ext cx="12191760" cy="6857640"/>
+            <a:ext cx="12192480" cy="6857280"/>
           </a:xfrm>
           <a:custGeom>
             <a:avLst/>
@@ -30416,7 +30246,7 @@
         <p:spPr>
           <a:xfrm>
             <a:off x="380880" y="1542960"/>
-            <a:ext cx="1800000" cy="609120"/>
+            <a:ext cx="1799640" cy="608760"/>
           </a:xfrm>
           <a:custGeom>
             <a:avLst/>
@@ -30467,7 +30297,7 @@
         <p:spPr>
           <a:xfrm>
             <a:off x="609480" y="1676520"/>
-            <a:ext cx="1517400" cy="342720"/>
+            <a:ext cx="1517040" cy="342360"/>
           </a:xfrm>
           <a:prstGeom prst="rect">
             <a:avLst/>
@@ -30497,7 +30327,7 @@
             <a:r>
               <a:rPr b="1" lang="en-US" sz="2700" spc="-1" strike="noStrike">
                 <a:solidFill>
-                  <a:srgbClr val="1a1c2c"/>
+                  <a:srgbClr val="000000"/>
                 </a:solidFill>
                 <a:latin typeface="Jersey 15"/>
                 <a:ea typeface="Jersey 15"/>
@@ -30505,6 +30335,9 @@
               <a:t>CHAPTER 01</a:t>
             </a:r>
             <a:endParaRPr b="0" lang="en-HK" sz="2700" spc="-1" strike="noStrike">
+              <a:solidFill>
+                <a:srgbClr val="000000"/>
+              </a:solidFill>
               <a:latin typeface="Arial"/>
             </a:endParaRPr>
           </a:p>
@@ -30519,7 +30352,7 @@
         <p:spPr>
           <a:xfrm>
             <a:off x="380880" y="2381400"/>
-            <a:ext cx="11772720" cy="1714320"/>
+            <a:ext cx="11773440" cy="1713960"/>
           </a:xfrm>
           <a:prstGeom prst="rect">
             <a:avLst/>
@@ -30549,7 +30382,7 @@
             <a:r>
               <a:rPr b="1" lang="en-US" sz="5400" spc="-1" strike="noStrike">
                 <a:solidFill>
-                  <a:srgbClr val="f4f4f4"/>
+                  <a:srgbClr val="000000"/>
                 </a:solidFill>
                 <a:latin typeface="Jersey 20 Charted"/>
                 <a:ea typeface="Jersey 20 Charted"/>
@@ -30557,6 +30390,9 @@
               <a:t>THE DAWN OF</a:t>
             </a:r>
             <a:endParaRPr b="0" lang="en-HK" sz="5400" spc="-1" strike="noStrike">
+              <a:solidFill>
+                <a:srgbClr val="000000"/>
+              </a:solidFill>
               <a:latin typeface="Arial"/>
             </a:endParaRPr>
           </a:p>
@@ -30570,7 +30406,7 @@
             <a:r>
               <a:rPr b="1" lang="en-US" sz="5400" spc="-1" strike="noStrike">
                 <a:solidFill>
-                  <a:srgbClr val="f4f4f4"/>
+                  <a:srgbClr val="000000"/>
                 </a:solidFill>
                 <a:latin typeface="Jersey 20 Charted"/>
                 <a:ea typeface="Jersey 20 Charted"/>
@@ -30578,6 +30414,9 @@
               <a:t>A NEW ERA</a:t>
             </a:r>
             <a:endParaRPr b="0" lang="en-HK" sz="5400" spc="-1" strike="noStrike">
+              <a:solidFill>
+                <a:srgbClr val="000000"/>
+              </a:solidFill>
               <a:latin typeface="Arial"/>
             </a:endParaRPr>
           </a:p>
@@ -30592,7 +30431,7 @@
         <p:spPr>
           <a:xfrm>
             <a:off x="380880" y="4324320"/>
-            <a:ext cx="1523520" cy="75960"/>
+            <a:ext cx="1523160" cy="75600"/>
           </a:xfrm>
           <a:custGeom>
             <a:avLst/>
@@ -30643,7 +30482,7 @@
         <p:spPr>
           <a:xfrm>
             <a:off x="380880" y="4629240"/>
-            <a:ext cx="7457760" cy="685440"/>
+            <a:ext cx="7458120" cy="685080"/>
           </a:xfrm>
           <a:prstGeom prst="rect">
             <a:avLst/>
@@ -30671,18 +30510,18 @@
               <a:buNone/>
             </a:pPr>
             <a:r>
-              <a:rPr b="0" i="1" lang="en-US" sz="2250" spc="-1" strike="noStrike">
-                <a:solidFill>
-                  <a:srgbClr val="ffff00"/>
+              <a:rPr b="0" lang="en-US" sz="2250" spc="-1" strike="noStrike">
+                <a:solidFill>
+                  <a:srgbClr val="000000"/>
                 </a:solidFill>
                 <a:latin typeface="Jersey 15"/>
                 <a:ea typeface="Jersey 15"/>
               </a:rPr>
               <a:t>How a Japanese Space Shooter</a:t>
             </a:r>
-            <a:endParaRPr b="0" i="1" lang="en-HK" sz="2250" spc="-1" strike="noStrike">
+            <a:endParaRPr b="0" lang="en-HK" sz="2250" spc="-1" strike="noStrike">
               <a:solidFill>
-                <a:srgbClr val="ffff00"/>
+                <a:srgbClr val="000000"/>
               </a:solidFill>
               <a:latin typeface="Arial"/>
             </a:endParaRPr>
@@ -30695,18 +30534,18 @@
               <a:buNone/>
             </a:pPr>
             <a:r>
-              <a:rPr b="0" i="1" lang="en-US" sz="2250" spc="-1" strike="noStrike">
-                <a:solidFill>
-                  <a:srgbClr val="ffff00"/>
+              <a:rPr b="0" lang="en-US" sz="2250" spc="-1" strike="noStrike">
+                <a:solidFill>
+                  <a:srgbClr val="000000"/>
                 </a:solidFill>
                 <a:latin typeface="Jersey 15"/>
                 <a:ea typeface="Jersey 15"/>
               </a:rPr>
               <a:t>Changed Everything</a:t>
             </a:r>
-            <a:endParaRPr b="0" i="1" lang="en-HK" sz="2250" spc="-1" strike="noStrike">
+            <a:endParaRPr b="0" lang="en-HK" sz="2250" spc="-1" strike="noStrike">
               <a:solidFill>
-                <a:srgbClr val="ffff00"/>
+                <a:srgbClr val="000000"/>
               </a:solidFill>
               <a:latin typeface="Arial"/>
             </a:endParaRPr>
@@ -30721,8 +30560,8 @@
         </p:nvSpPr>
         <p:spPr>
           <a:xfrm>
-            <a:off x="10591920" y="5867280"/>
-            <a:ext cx="151920" cy="151920"/>
+            <a:off x="10592640" y="5867280"/>
+            <a:ext cx="151560" cy="151560"/>
           </a:xfrm>
           <a:custGeom>
             <a:avLst/>
@@ -30772,8 +30611,8 @@
         </p:nvSpPr>
         <p:spPr>
           <a:xfrm>
-            <a:off x="10896480" y="5867280"/>
-            <a:ext cx="151920" cy="151920"/>
+            <a:off x="10897200" y="5867280"/>
+            <a:ext cx="151560" cy="151560"/>
           </a:xfrm>
           <a:custGeom>
             <a:avLst/>
@@ -30823,8 +30662,8 @@
         </p:nvSpPr>
         <p:spPr>
           <a:xfrm>
-            <a:off x="11201400" y="5867280"/>
-            <a:ext cx="151920" cy="151920"/>
+            <a:off x="11202120" y="5867280"/>
+            <a:ext cx="151560" cy="151560"/>
           </a:xfrm>
           <a:custGeom>
             <a:avLst/>
@@ -30907,7 +30746,7 @@
         <p:spPr>
           <a:xfrm>
             <a:off x="0" y="0"/>
-            <a:ext cx="12191760" cy="6857640"/>
+            <a:ext cx="12192480" cy="6857280"/>
           </a:xfrm>
           <a:custGeom>
             <a:avLst/>
@@ -30970,7 +30809,7 @@
         <p:spPr>
           <a:xfrm>
             <a:off x="380880" y="380880"/>
-            <a:ext cx="11658240" cy="456840"/>
+            <a:ext cx="11658960" cy="456480"/>
           </a:xfrm>
           <a:prstGeom prst="rect">
             <a:avLst/>
@@ -31022,7 +30861,7 @@
         <p:spPr>
           <a:xfrm>
             <a:off x="380880" y="952560"/>
-            <a:ext cx="11544120" cy="304560"/>
+            <a:ext cx="11544840" cy="304200"/>
           </a:xfrm>
           <a:prstGeom prst="rect">
             <a:avLst/>
@@ -31074,7 +30913,7 @@
         <p:spPr>
           <a:xfrm>
             <a:off x="380880" y="1371600"/>
-            <a:ext cx="914040" cy="37800"/>
+            <a:ext cx="913680" cy="37440"/>
           </a:xfrm>
           <a:custGeom>
             <a:avLst/>
@@ -31125,7 +30964,7 @@
         <p:spPr>
           <a:xfrm>
             <a:off x="395280" y="1576440"/>
-            <a:ext cx="5609880" cy="1666440"/>
+            <a:ext cx="5609880" cy="1666080"/>
           </a:xfrm>
           <a:custGeom>
             <a:avLst/>
@@ -31181,7 +31020,7 @@
         <p:spPr>
           <a:xfrm>
             <a:off x="600120" y="1781280"/>
-            <a:ext cx="5314680" cy="304560"/>
+            <a:ext cx="5314680" cy="304200"/>
           </a:xfrm>
           <a:prstGeom prst="rect">
             <a:avLst/>
@@ -31233,7 +31072,7 @@
         <p:spPr>
           <a:xfrm>
             <a:off x="600120" y="2200320"/>
-            <a:ext cx="5285880" cy="837720"/>
+            <a:ext cx="5285880" cy="837360"/>
           </a:xfrm>
           <a:prstGeom prst="rect">
             <a:avLst/>
@@ -31304,8 +31143,8 @@
         </p:nvSpPr>
         <p:spPr>
           <a:xfrm>
-            <a:off x="6186600" y="1576440"/>
-            <a:ext cx="5609880" cy="1666440"/>
+            <a:off x="6186960" y="1576440"/>
+            <a:ext cx="5609880" cy="1666080"/>
           </a:xfrm>
           <a:custGeom>
             <a:avLst/>
@@ -31360,8 +31199,8 @@
         </p:nvSpPr>
         <p:spPr>
           <a:xfrm>
-            <a:off x="6391440" y="1781280"/>
-            <a:ext cx="5314680" cy="304560"/>
+            <a:off x="6391800" y="1781280"/>
+            <a:ext cx="5314680" cy="304200"/>
           </a:xfrm>
           <a:prstGeom prst="rect">
             <a:avLst/>
@@ -31412,8 +31251,8 @@
         </p:nvSpPr>
         <p:spPr>
           <a:xfrm>
-            <a:off x="6391440" y="2200320"/>
-            <a:ext cx="5285880" cy="561600"/>
+            <a:off x="6391800" y="2200320"/>
+            <a:ext cx="5285880" cy="561240"/>
           </a:xfrm>
           <a:prstGeom prst="rect">
             <a:avLst/>
@@ -31475,7 +31314,7 @@
         <p:spPr>
           <a:xfrm>
             <a:off x="399960" y="3426480"/>
-            <a:ext cx="11391480" cy="3314520"/>
+            <a:ext cx="11392200" cy="3314160"/>
           </a:xfrm>
           <a:custGeom>
             <a:avLst/>
@@ -31531,7 +31370,7 @@
         <p:spPr>
           <a:xfrm>
             <a:off x="552600" y="3636000"/>
-            <a:ext cx="11086920" cy="304560"/>
+            <a:ext cx="11087640" cy="304200"/>
           </a:xfrm>
           <a:prstGeom prst="rect">
             <a:avLst/>
@@ -31583,7 +31422,7 @@
         <p:spPr>
           <a:xfrm>
             <a:off x="609480" y="4055400"/>
-            <a:ext cx="10972440" cy="2476080"/>
+            <a:ext cx="10973160" cy="2475720"/>
           </a:xfrm>
           <a:prstGeom prst="roundRect">
             <a:avLst>
@@ -31647,7 +31486,7 @@
         <p:spPr>
           <a:xfrm>
             <a:off x="0" y="0"/>
-            <a:ext cx="12191760" cy="6855480"/>
+            <a:ext cx="12192480" cy="6855120"/>
           </a:xfrm>
           <a:custGeom>
             <a:avLst/>
@@ -31710,7 +31549,7 @@
         <p:spPr>
           <a:xfrm>
             <a:off x="349200" y="349200"/>
-            <a:ext cx="11702520" cy="418680"/>
+            <a:ext cx="11703240" cy="418320"/>
           </a:xfrm>
           <a:prstGeom prst="rect">
             <a:avLst/>
@@ -31762,7 +31601,7 @@
         <p:spPr>
           <a:xfrm>
             <a:off x="349200" y="873360"/>
-            <a:ext cx="11597760" cy="279000"/>
+            <a:ext cx="11598480" cy="278640"/>
           </a:xfrm>
           <a:prstGeom prst="rect">
             <a:avLst/>
@@ -31814,7 +31653,7 @@
         <p:spPr>
           <a:xfrm>
             <a:off x="349200" y="1257480"/>
-            <a:ext cx="838080" cy="34560"/>
+            <a:ext cx="837720" cy="34200"/>
           </a:xfrm>
           <a:custGeom>
             <a:avLst/>
@@ -31865,7 +31704,7 @@
         <p:spPr>
           <a:xfrm>
             <a:off x="362520" y="1445400"/>
-            <a:ext cx="5047560" cy="4191840"/>
+            <a:ext cx="5047560" cy="4191480"/>
           </a:xfrm>
           <a:custGeom>
             <a:avLst/>
@@ -31921,7 +31760,7 @@
         <p:spPr>
           <a:xfrm>
             <a:off x="515160" y="1598400"/>
-            <a:ext cx="4741920" cy="1676520"/>
+            <a:ext cx="4741920" cy="1676160"/>
           </a:xfrm>
           <a:prstGeom prst="roundRect">
             <a:avLst>
@@ -31953,7 +31792,7 @@
         <p:spPr>
           <a:xfrm>
             <a:off x="384120" y="3380040"/>
-            <a:ext cx="5004000" cy="523800"/>
+            <a:ext cx="5004000" cy="523440"/>
           </a:xfrm>
           <a:prstGeom prst="rect">
             <a:avLst/>
@@ -32005,7 +31844,7 @@
         <p:spPr>
           <a:xfrm>
             <a:off x="471600" y="3973680"/>
-            <a:ext cx="4829400" cy="244080"/>
+            <a:ext cx="4829400" cy="243720"/>
           </a:xfrm>
           <a:prstGeom prst="rect">
             <a:avLst/>
@@ -32057,7 +31896,7 @@
         <p:spPr>
           <a:xfrm>
             <a:off x="362520" y="5801400"/>
-            <a:ext cx="5047560" cy="1038960"/>
+            <a:ext cx="5047560" cy="1038600"/>
           </a:xfrm>
           <a:custGeom>
             <a:avLst/>
@@ -32113,7 +31952,7 @@
         <p:spPr>
           <a:xfrm>
             <a:off x="410400" y="5954040"/>
-            <a:ext cx="4951440" cy="418680"/>
+            <a:ext cx="4951440" cy="418320"/>
           </a:xfrm>
           <a:prstGeom prst="rect">
             <a:avLst/>
@@ -32165,7 +32004,7 @@
         <p:spPr>
           <a:xfrm>
             <a:off x="475920" y="6443280"/>
-            <a:ext cx="4820400" cy="244080"/>
+            <a:ext cx="4820400" cy="243720"/>
           </a:xfrm>
           <a:prstGeom prst="rect">
             <a:avLst/>
@@ -32216,8 +32055,8 @@
         </p:nvSpPr>
         <p:spPr>
           <a:xfrm>
-            <a:off x="5648040" y="1445400"/>
-            <a:ext cx="6174360" cy="1886040"/>
+            <a:off x="5648400" y="1445400"/>
+            <a:ext cx="6174720" cy="1885680"/>
           </a:xfrm>
           <a:custGeom>
             <a:avLst/>
@@ -32272,8 +32111,8 @@
         </p:nvSpPr>
         <p:spPr>
           <a:xfrm>
-            <a:off x="5835600" y="1633320"/>
-            <a:ext cx="5903640" cy="279000"/>
+            <a:off x="5835960" y="1633320"/>
+            <a:ext cx="5903640" cy="278640"/>
           </a:xfrm>
           <a:prstGeom prst="rect">
             <a:avLst/>
@@ -32324,8 +32163,8 @@
         </p:nvSpPr>
         <p:spPr>
           <a:xfrm>
-            <a:off x="5835600" y="2017440"/>
-            <a:ext cx="5877360" cy="514800"/>
+            <a:off x="5835960" y="2017440"/>
+            <a:ext cx="5877360" cy="514440"/>
           </a:xfrm>
           <a:prstGeom prst="rect">
             <a:avLst/>
@@ -32406,8 +32245,8 @@
         </p:nvSpPr>
         <p:spPr>
           <a:xfrm>
-            <a:off x="5835600" y="2633040"/>
-            <a:ext cx="5877360" cy="514800"/>
+            <a:off x="5835960" y="2633040"/>
+            <a:ext cx="5877360" cy="514440"/>
           </a:xfrm>
           <a:prstGeom prst="rect">
             <a:avLst/>
@@ -32458,8 +32297,8 @@
         </p:nvSpPr>
         <p:spPr>
           <a:xfrm>
-            <a:off x="5648040" y="3497760"/>
-            <a:ext cx="6174360" cy="1527840"/>
+            <a:off x="5648400" y="3497760"/>
+            <a:ext cx="6174720" cy="1527480"/>
           </a:xfrm>
           <a:custGeom>
             <a:avLst/>
@@ -32514,8 +32353,8 @@
         </p:nvSpPr>
         <p:spPr>
           <a:xfrm>
-            <a:off x="5835600" y="3685680"/>
-            <a:ext cx="5903640" cy="279000"/>
+            <a:off x="5835960" y="3685680"/>
+            <a:ext cx="5903640" cy="278640"/>
           </a:xfrm>
           <a:prstGeom prst="rect">
             <a:avLst/>
@@ -32566,8 +32405,8 @@
         </p:nvSpPr>
         <p:spPr>
           <a:xfrm>
-            <a:off x="5835600" y="4069800"/>
-            <a:ext cx="5877360" cy="768240"/>
+            <a:off x="5835960" y="4069800"/>
+            <a:ext cx="5877360" cy="767880"/>
           </a:xfrm>
           <a:prstGeom prst="rect">
             <a:avLst/>
@@ -32638,8 +32477,8 @@
         </p:nvSpPr>
         <p:spPr>
           <a:xfrm>
-            <a:off x="5643720" y="5185440"/>
-            <a:ext cx="3030120" cy="768240"/>
+            <a:off x="5644080" y="5185440"/>
+            <a:ext cx="3030120" cy="767880"/>
           </a:xfrm>
           <a:custGeom>
             <a:avLst/>
@@ -32694,8 +32533,8 @@
         </p:nvSpPr>
         <p:spPr>
           <a:xfrm>
-            <a:off x="7030800" y="5299200"/>
-            <a:ext cx="261720" cy="261720"/>
+            <a:off x="7031160" y="5299200"/>
+            <a:ext cx="261360" cy="261360"/>
           </a:xfrm>
           <a:custGeom>
             <a:avLst/>
@@ -32871,8 +32710,8 @@
         </p:nvSpPr>
         <p:spPr>
           <a:xfrm>
-            <a:off x="5722200" y="5631120"/>
-            <a:ext cx="2872800" cy="209160"/>
+            <a:off x="5722560" y="5631120"/>
+            <a:ext cx="2872800" cy="208800"/>
           </a:xfrm>
           <a:prstGeom prst="rect">
             <a:avLst/>
@@ -32923,8 +32762,8 @@
         </p:nvSpPr>
         <p:spPr>
           <a:xfrm>
-            <a:off x="8798040" y="5185440"/>
-            <a:ext cx="3030120" cy="768240"/>
+            <a:off x="8798760" y="5185440"/>
+            <a:ext cx="3030120" cy="767880"/>
           </a:xfrm>
           <a:custGeom>
             <a:avLst/>
@@ -32979,8 +32818,8 @@
         </p:nvSpPr>
         <p:spPr>
           <a:xfrm>
-            <a:off x="10185120" y="5299200"/>
-            <a:ext cx="261720" cy="261720"/>
+            <a:off x="10185840" y="5299200"/>
+            <a:ext cx="261360" cy="261360"/>
           </a:xfrm>
           <a:custGeom>
             <a:avLst/>
@@ -33070,8 +32909,8 @@
         </p:nvSpPr>
         <p:spPr>
           <a:xfrm>
-            <a:off x="8876520" y="5631120"/>
-            <a:ext cx="2872800" cy="209160"/>
+            <a:off x="8877240" y="5631120"/>
+            <a:ext cx="2872800" cy="208800"/>
           </a:xfrm>
           <a:prstGeom prst="rect">
             <a:avLst/>
@@ -33122,8 +32961,8 @@
         </p:nvSpPr>
         <p:spPr>
           <a:xfrm>
-            <a:off x="5643720" y="6076440"/>
-            <a:ext cx="3030120" cy="768240"/>
+            <a:off x="5644080" y="6076440"/>
+            <a:ext cx="3030120" cy="767880"/>
           </a:xfrm>
           <a:custGeom>
             <a:avLst/>
@@ -33178,8 +33017,8 @@
         </p:nvSpPr>
         <p:spPr>
           <a:xfrm>
-            <a:off x="7030800" y="6189840"/>
-            <a:ext cx="261720" cy="261720"/>
+            <a:off x="7031160" y="6189840"/>
+            <a:ext cx="261360" cy="261360"/>
           </a:xfrm>
           <a:custGeom>
             <a:avLst/>
@@ -33276,8 +33115,8 @@
         </p:nvSpPr>
         <p:spPr>
           <a:xfrm>
-            <a:off x="5722200" y="6521760"/>
-            <a:ext cx="2872800" cy="209160"/>
+            <a:off x="5722560" y="6521760"/>
+            <a:ext cx="2872800" cy="208800"/>
           </a:xfrm>
           <a:prstGeom prst="rect">
             <a:avLst/>
@@ -33328,8 +33167,8 @@
         </p:nvSpPr>
         <p:spPr>
           <a:xfrm>
-            <a:off x="8798040" y="6076440"/>
-            <a:ext cx="3030120" cy="768240"/>
+            <a:off x="8798760" y="6076440"/>
+            <a:ext cx="3030120" cy="767880"/>
           </a:xfrm>
           <a:custGeom>
             <a:avLst/>
@@ -33384,8 +33223,8 @@
         </p:nvSpPr>
         <p:spPr>
           <a:xfrm>
-            <a:off x="10185120" y="6189840"/>
-            <a:ext cx="261720" cy="261720"/>
+            <a:off x="10185840" y="6189840"/>
+            <a:ext cx="261360" cy="261360"/>
           </a:xfrm>
           <a:custGeom>
             <a:avLst/>
@@ -33496,8 +33335,8 @@
         </p:nvSpPr>
         <p:spPr>
           <a:xfrm>
-            <a:off x="8876520" y="6521760"/>
-            <a:ext cx="2872800" cy="209160"/>
+            <a:off x="8877240" y="6521760"/>
+            <a:ext cx="2872800" cy="208800"/>
           </a:xfrm>
           <a:prstGeom prst="rect">
             <a:avLst/>
@@ -33581,7 +33420,7 @@
         <p:spPr>
           <a:xfrm>
             <a:off x="0" y="0"/>
-            <a:ext cx="12191760" cy="6858360"/>
+            <a:ext cx="12192480" cy="6858000"/>
           </a:xfrm>
           <a:custGeom>
             <a:avLst/>
@@ -33644,7 +33483,7 @@
         <p:spPr>
           <a:xfrm>
             <a:off x="369720" y="369720"/>
-            <a:ext cx="11674080" cy="443160"/>
+            <a:ext cx="11674800" cy="442800"/>
           </a:xfrm>
           <a:prstGeom prst="rect">
             <a:avLst/>
@@ -33674,7 +33513,7 @@
             <a:r>
               <a:rPr b="1" lang="en-US" sz="3500" spc="-1" strike="noStrike">
                 <a:solidFill>
-                  <a:srgbClr val="ffcd75"/>
+                  <a:srgbClr val="ffff00"/>
                 </a:solidFill>
                 <a:latin typeface="Jersey 20 Charted"/>
                 <a:ea typeface="Jersey 20 Charted"/>
@@ -33682,6 +33521,9 @@
               <a:t>TECHNOLOGY EVOLUTION</a:t>
             </a:r>
             <a:endParaRPr b="0" lang="en-HK" sz="3500" spc="-1" strike="noStrike">
+              <a:solidFill>
+                <a:srgbClr val="ffff00"/>
+              </a:solidFill>
               <a:latin typeface="Arial"/>
             </a:endParaRPr>
           </a:p>
@@ -33696,7 +33538,7 @@
         <p:spPr>
           <a:xfrm>
             <a:off x="369720" y="924480"/>
-            <a:ext cx="11563200" cy="295560"/>
+            <a:ext cx="11563920" cy="295200"/>
           </a:xfrm>
           <a:prstGeom prst="rect">
             <a:avLst/>
@@ -33748,7 +33590,7 @@
         <p:spPr>
           <a:xfrm>
             <a:off x="369720" y="1330920"/>
-            <a:ext cx="887040" cy="36720"/>
+            <a:ext cx="886680" cy="36360"/>
           </a:xfrm>
           <a:custGeom>
             <a:avLst/>
@@ -33799,7 +33641,7 @@
         <p:spPr>
           <a:xfrm>
             <a:off x="383760" y="1529640"/>
-            <a:ext cx="5591880" cy="2837520"/>
+            <a:ext cx="5591880" cy="2837160"/>
           </a:xfrm>
           <a:custGeom>
             <a:avLst/>
@@ -33855,7 +33697,7 @@
         <p:spPr>
           <a:xfrm>
             <a:off x="527040" y="1728360"/>
-            <a:ext cx="5305320" cy="295560"/>
+            <a:ext cx="5305320" cy="295200"/>
           </a:xfrm>
           <a:prstGeom prst="rect">
             <a:avLst/>
@@ -33907,7 +33749,7 @@
         <p:spPr>
           <a:xfrm>
             <a:off x="582480" y="2246040"/>
-            <a:ext cx="110520" cy="110520"/>
+            <a:ext cx="110160" cy="110160"/>
           </a:xfrm>
           <a:custGeom>
             <a:avLst/>
@@ -33958,7 +33800,7 @@
         <p:spPr>
           <a:xfrm>
             <a:off x="804240" y="2172240"/>
-            <a:ext cx="1875960" cy="258480"/>
+            <a:ext cx="1875600" cy="258120"/>
           </a:xfrm>
           <a:prstGeom prst="rect">
             <a:avLst/>
@@ -33986,16 +33828,19 @@
               <a:buNone/>
             </a:pPr>
             <a:r>
-              <a:rPr b="0" lang="en-US" sz="1310" spc="-1" strike="noStrike">
-                <a:solidFill>
-                  <a:srgbClr val="f4f4f4"/>
+              <a:rPr b="1" lang="en-US" sz="1310" spc="-1" strike="noStrike">
+                <a:solidFill>
+                  <a:srgbClr val="00a933"/>
                 </a:solidFill>
                 <a:latin typeface="Jersey 15"/>
                 <a:ea typeface="Jersey 15"/>
               </a:rPr>
               <a:t>Simple discrete logic circuits</a:t>
             </a:r>
-            <a:endParaRPr b="0" lang="en-HK" sz="1310" spc="-1" strike="noStrike">
+            <a:endParaRPr b="1" lang="en-HK" sz="1310" spc="-1" strike="noStrike">
+              <a:solidFill>
+                <a:srgbClr val="00a933"/>
+              </a:solidFill>
               <a:latin typeface="Arial"/>
             </a:endParaRPr>
           </a:p>
@@ -34010,7 +33855,7 @@
         <p:spPr>
           <a:xfrm>
             <a:off x="582480" y="2615760"/>
-            <a:ext cx="110520" cy="110520"/>
+            <a:ext cx="110160" cy="110160"/>
           </a:xfrm>
           <a:custGeom>
             <a:avLst/>
@@ -34061,7 +33906,7 @@
         <p:spPr>
           <a:xfrm>
             <a:off x="804240" y="2541960"/>
-            <a:ext cx="1460160" cy="258480"/>
+            <a:ext cx="1459800" cy="258120"/>
           </a:xfrm>
           <a:prstGeom prst="rect">
             <a:avLst/>
@@ -34113,7 +33958,7 @@
         <p:spPr>
           <a:xfrm>
             <a:off x="582480" y="2985480"/>
-            <a:ext cx="110520" cy="110520"/>
+            <a:ext cx="110160" cy="110160"/>
           </a:xfrm>
           <a:custGeom>
             <a:avLst/>
@@ -34164,7 +34009,7 @@
         <p:spPr>
           <a:xfrm>
             <a:off x="804240" y="2911680"/>
-            <a:ext cx="1219680" cy="258480"/>
+            <a:ext cx="1219320" cy="258120"/>
           </a:xfrm>
           <a:prstGeom prst="rect">
             <a:avLst/>
@@ -34216,7 +34061,7 @@
         <p:spPr>
           <a:xfrm>
             <a:off x="582480" y="3355200"/>
-            <a:ext cx="110520" cy="110520"/>
+            <a:ext cx="110160" cy="110160"/>
           </a:xfrm>
           <a:custGeom>
             <a:avLst/>
@@ -34267,7 +34112,7 @@
         <p:spPr>
           <a:xfrm>
             <a:off x="804240" y="3281400"/>
-            <a:ext cx="1922400" cy="258480"/>
+            <a:ext cx="1922040" cy="258120"/>
           </a:xfrm>
           <a:prstGeom prst="rect">
             <a:avLst/>
@@ -34319,7 +34164,7 @@
         <p:spPr>
           <a:xfrm>
             <a:off x="582480" y="3688200"/>
-            <a:ext cx="5194440" cy="480240"/>
+            <a:ext cx="5194440" cy="479880"/>
           </a:xfrm>
           <a:custGeom>
             <a:avLst/>
@@ -34372,7 +34217,7 @@
         <p:spPr>
           <a:xfrm>
             <a:off x="646920" y="3799080"/>
-            <a:ext cx="5064840" cy="258480"/>
+            <a:ext cx="5064840" cy="258120"/>
           </a:xfrm>
           <a:prstGeom prst="rect">
             <a:avLst/>
@@ -34423,8 +34268,8 @@
         </p:nvSpPr>
         <p:spPr>
           <a:xfrm>
-            <a:off x="6221160" y="1529640"/>
-            <a:ext cx="5591880" cy="2837520"/>
+            <a:off x="6221520" y="1529640"/>
+            <a:ext cx="5591880" cy="2837160"/>
           </a:xfrm>
           <a:custGeom>
             <a:avLst/>
@@ -34479,8 +34324,8 @@
         </p:nvSpPr>
         <p:spPr>
           <a:xfrm>
-            <a:off x="6364440" y="1728360"/>
-            <a:ext cx="5305320" cy="295560"/>
+            <a:off x="6364800" y="1728360"/>
+            <a:ext cx="5305320" cy="295200"/>
           </a:xfrm>
           <a:prstGeom prst="rect">
             <a:avLst/>
@@ -34510,7 +34355,7 @@
             <a:r>
               <a:rPr b="1" lang="en-US" sz="1750" spc="-1" strike="noStrike">
                 <a:solidFill>
-                  <a:srgbClr val="a7f070"/>
+                  <a:srgbClr val="00a933"/>
                 </a:solidFill>
                 <a:latin typeface="Jersey 15"/>
                 <a:ea typeface="Jersey 15"/>
@@ -34518,6 +34363,9 @@
               <a:t>GOLDEN AGE</a:t>
             </a:r>
             <a:endParaRPr b="0" lang="en-HK" sz="1750" spc="-1" strike="noStrike">
+              <a:solidFill>
+                <a:srgbClr val="00a933"/>
+              </a:solidFill>
               <a:latin typeface="Arial"/>
             </a:endParaRPr>
           </a:p>
@@ -34531,8 +34379,8 @@
         </p:nvSpPr>
         <p:spPr>
           <a:xfrm>
-            <a:off x="6419880" y="2246040"/>
-            <a:ext cx="110520" cy="110520"/>
+            <a:off x="6420240" y="2246040"/>
+            <a:ext cx="110160" cy="110160"/>
           </a:xfrm>
           <a:custGeom>
             <a:avLst/>
@@ -34582,8 +34430,8 @@
         </p:nvSpPr>
         <p:spPr>
           <a:xfrm>
-            <a:off x="6642000" y="2172240"/>
-            <a:ext cx="1857600" cy="258480"/>
+            <a:off x="6642360" y="2172240"/>
+            <a:ext cx="1857240" cy="258120"/>
           </a:xfrm>
           <a:prstGeom prst="rect">
             <a:avLst/>
@@ -34644,8 +34492,8 @@
         </p:nvSpPr>
         <p:spPr>
           <a:xfrm>
-            <a:off x="6419880" y="2615760"/>
-            <a:ext cx="110520" cy="110520"/>
+            <a:off x="6420240" y="2615760"/>
+            <a:ext cx="110160" cy="110160"/>
           </a:xfrm>
           <a:custGeom>
             <a:avLst/>
@@ -34695,8 +34543,8 @@
         </p:nvSpPr>
         <p:spPr>
           <a:xfrm>
-            <a:off x="6642000" y="2541960"/>
-            <a:ext cx="1654200" cy="258480"/>
+            <a:off x="6642360" y="2541960"/>
+            <a:ext cx="1653840" cy="258120"/>
           </a:xfrm>
           <a:prstGeom prst="rect">
             <a:avLst/>
@@ -34757,8 +34605,8 @@
         </p:nvSpPr>
         <p:spPr>
           <a:xfrm>
-            <a:off x="6419880" y="2985480"/>
-            <a:ext cx="110520" cy="110520"/>
+            <a:off x="6420240" y="2985480"/>
+            <a:ext cx="110160" cy="110160"/>
           </a:xfrm>
           <a:custGeom>
             <a:avLst/>
@@ -34808,8 +34656,8 @@
         </p:nvSpPr>
         <p:spPr>
           <a:xfrm>
-            <a:off x="6642000" y="2957760"/>
-            <a:ext cx="1315440" cy="165960"/>
+            <a:off x="6642360" y="2957760"/>
+            <a:ext cx="1315080" cy="165600"/>
           </a:xfrm>
           <a:prstGeom prst="rect">
             <a:avLst/>
@@ -34860,8 +34708,8 @@
         </p:nvSpPr>
         <p:spPr>
           <a:xfrm>
-            <a:off x="6419880" y="3355200"/>
-            <a:ext cx="110520" cy="110520"/>
+            <a:off x="6420240" y="3355200"/>
+            <a:ext cx="110160" cy="110160"/>
           </a:xfrm>
           <a:custGeom>
             <a:avLst/>
@@ -34911,8 +34759,8 @@
         </p:nvSpPr>
         <p:spPr>
           <a:xfrm>
-            <a:off x="6642000" y="3281400"/>
-            <a:ext cx="1487880" cy="258480"/>
+            <a:off x="6642360" y="3281400"/>
+            <a:ext cx="1487520" cy="258120"/>
           </a:xfrm>
           <a:prstGeom prst="rect">
             <a:avLst/>
@@ -34973,8 +34821,8 @@
         </p:nvSpPr>
         <p:spPr>
           <a:xfrm>
-            <a:off x="6419880" y="3688200"/>
-            <a:ext cx="5194440" cy="480240"/>
+            <a:off x="6420240" y="3688200"/>
+            <a:ext cx="5194440" cy="479880"/>
           </a:xfrm>
           <a:custGeom>
             <a:avLst/>
@@ -35026,8 +34874,8 @@
         </p:nvSpPr>
         <p:spPr>
           <a:xfrm>
-            <a:off x="6484680" y="3799080"/>
-            <a:ext cx="5064840" cy="258480"/>
+            <a:off x="6485040" y="3799080"/>
+            <a:ext cx="5064840" cy="258120"/>
           </a:xfrm>
           <a:prstGeom prst="rect">
             <a:avLst/>
@@ -35079,7 +34927,7 @@
         <p:spPr>
           <a:xfrm>
             <a:off x="383760" y="4543200"/>
-            <a:ext cx="3687840" cy="1543320"/>
+            <a:ext cx="3687840" cy="1542960"/>
           </a:xfrm>
           <a:custGeom>
             <a:avLst/>
@@ -35135,7 +34983,7 @@
         <p:spPr>
           <a:xfrm>
             <a:off x="2062800" y="4704840"/>
-            <a:ext cx="332280" cy="332280"/>
+            <a:ext cx="331920" cy="331920"/>
           </a:xfrm>
           <a:custGeom>
             <a:avLst/>
@@ -35462,7 +35310,7 @@
         <p:spPr>
           <a:xfrm>
             <a:off x="499320" y="5148720"/>
-            <a:ext cx="3456720" cy="258480"/>
+            <a:ext cx="3456720" cy="258120"/>
           </a:xfrm>
           <a:prstGeom prst="rect">
             <a:avLst/>
@@ -35492,7 +35340,7 @@
             <a:r>
               <a:rPr b="1" lang="en-US" sz="1450" spc="-1" strike="noStrike">
                 <a:solidFill>
-                  <a:srgbClr val="29adff"/>
+                  <a:srgbClr val="00a933"/>
                 </a:solidFill>
                 <a:latin typeface="Jersey 15"/>
                 <a:ea typeface="Jersey 15"/>
@@ -35500,6 +35348,9 @@
               <a:t>MICROPROCESSORS</a:t>
             </a:r>
             <a:endParaRPr b="0" lang="en-HK" sz="1450" spc="-1" strike="noStrike">
+              <a:solidFill>
+                <a:srgbClr val="00a933"/>
+              </a:solidFill>
               <a:latin typeface="Arial"/>
             </a:endParaRPr>
           </a:p>
@@ -35514,7 +35365,7 @@
         <p:spPr>
           <a:xfrm>
             <a:off x="508320" y="5481360"/>
-            <a:ext cx="3438000" cy="443160"/>
+            <a:ext cx="3438000" cy="442800"/>
           </a:xfrm>
           <a:prstGeom prst="rect">
             <a:avLst/>
@@ -35565,8 +35416,8 @@
         </p:nvSpPr>
         <p:spPr>
           <a:xfrm>
-            <a:off x="4250880" y="4543200"/>
-            <a:ext cx="3687840" cy="1543320"/>
+            <a:off x="4251240" y="4543200"/>
+            <a:ext cx="3687840" cy="1542960"/>
           </a:xfrm>
           <a:custGeom>
             <a:avLst/>
@@ -35621,8 +35472,8 @@
         </p:nvSpPr>
         <p:spPr>
           <a:xfrm>
-            <a:off x="5909400" y="4704840"/>
-            <a:ext cx="374040" cy="332280"/>
+            <a:off x="5909760" y="4704840"/>
+            <a:ext cx="373680" cy="331920"/>
           </a:xfrm>
           <a:custGeom>
             <a:avLst/>
@@ -35738,8 +35589,8 @@
         </p:nvSpPr>
         <p:spPr>
           <a:xfrm>
-            <a:off x="4366440" y="5148720"/>
-            <a:ext cx="3456720" cy="258480"/>
+            <a:off x="4366800" y="5148720"/>
+            <a:ext cx="3456720" cy="258120"/>
           </a:xfrm>
           <a:prstGeom prst="rect">
             <a:avLst/>
@@ -35769,7 +35620,7 @@
             <a:r>
               <a:rPr b="1" lang="en-US" sz="1450" spc="-1" strike="noStrike">
                 <a:solidFill>
-                  <a:srgbClr val="ffcd75"/>
+                  <a:srgbClr val="00a933"/>
                 </a:solidFill>
                 <a:latin typeface="Jersey 15"/>
                 <a:ea typeface="Jersey 15"/>
@@ -35777,6 +35628,9 @@
               <a:t>VECTOR GRAPHICS</a:t>
             </a:r>
             <a:endParaRPr b="0" lang="en-HK" sz="1450" spc="-1" strike="noStrike">
+              <a:solidFill>
+                <a:srgbClr val="00a933"/>
+              </a:solidFill>
               <a:latin typeface="Arial"/>
             </a:endParaRPr>
           </a:p>
@@ -35790,8 +35644,8 @@
         </p:nvSpPr>
         <p:spPr>
           <a:xfrm>
-            <a:off x="4375440" y="5481360"/>
-            <a:ext cx="3438000" cy="221400"/>
+            <a:off x="4375800" y="5481360"/>
+            <a:ext cx="3438000" cy="221040"/>
           </a:xfrm>
           <a:prstGeom prst="rect">
             <a:avLst/>
@@ -35842,8 +35696,8 @@
         </p:nvSpPr>
         <p:spPr>
           <a:xfrm>
-            <a:off x="8118000" y="4543200"/>
-            <a:ext cx="3687840" cy="1543320"/>
+            <a:off x="8118360" y="4543200"/>
+            <a:ext cx="3687840" cy="1542960"/>
           </a:xfrm>
           <a:custGeom>
             <a:avLst/>
@@ -35898,8 +35752,8 @@
         </p:nvSpPr>
         <p:spPr>
           <a:xfrm>
-            <a:off x="9755640" y="4704840"/>
-            <a:ext cx="415440" cy="332280"/>
+            <a:off x="9756360" y="4704840"/>
+            <a:ext cx="415080" cy="331920"/>
           </a:xfrm>
           <a:custGeom>
             <a:avLst/>
@@ -36117,8 +35971,8 @@
         </p:nvSpPr>
         <p:spPr>
           <a:xfrm>
-            <a:off x="8233560" y="5148720"/>
-            <a:ext cx="3456720" cy="258480"/>
+            <a:off x="8234280" y="5148720"/>
+            <a:ext cx="3456720" cy="258120"/>
           </a:xfrm>
           <a:prstGeom prst="rect">
             <a:avLst/>
@@ -36169,8 +36023,8 @@
         </p:nvSpPr>
         <p:spPr>
           <a:xfrm>
-            <a:off x="8242560" y="5481360"/>
-            <a:ext cx="3438000" cy="221400"/>
+            <a:off x="8243280" y="5481360"/>
+            <a:ext cx="3438000" cy="221040"/>
           </a:xfrm>
           <a:prstGeom prst="rect">
             <a:avLst/>
@@ -36222,7 +36076,7 @@
         <p:spPr>
           <a:xfrm>
             <a:off x="383760" y="6262560"/>
-            <a:ext cx="11424600" cy="582120"/>
+            <a:ext cx="11425320" cy="581760"/>
           </a:xfrm>
           <a:custGeom>
             <a:avLst/>
@@ -36278,7 +36132,7 @@
         <p:spPr>
           <a:xfrm>
             <a:off x="499320" y="6424200"/>
-            <a:ext cx="11193480" cy="258480"/>
+            <a:ext cx="11194200" cy="258120"/>
           </a:xfrm>
           <a:prstGeom prst="rect">
             <a:avLst/>
@@ -36392,7 +36246,7 @@
         <p:spPr>
           <a:xfrm>
             <a:off x="0" y="0"/>
-            <a:ext cx="12191760" cy="6857640"/>
+            <a:ext cx="12192480" cy="6857280"/>
           </a:xfrm>
           <a:prstGeom prst="roundRect">
             <a:avLst>
@@ -36424,7 +36278,7 @@
         <p:spPr>
           <a:xfrm>
             <a:off x="0" y="0"/>
-            <a:ext cx="12191760" cy="6857640"/>
+            <a:ext cx="12192480" cy="6857280"/>
           </a:xfrm>
           <a:custGeom>
             <a:avLst/>
@@ -36487,7 +36341,7 @@
         <p:spPr>
           <a:xfrm>
             <a:off x="380880" y="1114560"/>
-            <a:ext cx="1866600" cy="609120"/>
+            <a:ext cx="1866240" cy="608760"/>
           </a:xfrm>
           <a:custGeom>
             <a:avLst/>
@@ -36538,7 +36392,7 @@
         <p:spPr>
           <a:xfrm>
             <a:off x="609480" y="1247760"/>
-            <a:ext cx="1580760" cy="342720"/>
+            <a:ext cx="1580400" cy="342360"/>
           </a:xfrm>
           <a:prstGeom prst="rect">
             <a:avLst/>
@@ -36590,7 +36444,7 @@
         <p:spPr>
           <a:xfrm>
             <a:off x="380880" y="1952640"/>
-            <a:ext cx="11772720" cy="2571480"/>
+            <a:ext cx="11773440" cy="2571120"/>
           </a:xfrm>
           <a:prstGeom prst="rect">
             <a:avLst/>
@@ -36684,7 +36538,7 @@
         <p:spPr>
           <a:xfrm>
             <a:off x="380880" y="4753080"/>
-            <a:ext cx="1523520" cy="75960"/>
+            <a:ext cx="1523160" cy="75600"/>
           </a:xfrm>
           <a:custGeom>
             <a:avLst/>
@@ -36735,7 +36589,7 @@
         <p:spPr>
           <a:xfrm>
             <a:off x="380880" y="5057640"/>
-            <a:ext cx="7457760" cy="685440"/>
+            <a:ext cx="7458120" cy="685080"/>
           </a:xfrm>
           <a:prstGeom prst="rect">
             <a:avLst/>
@@ -36807,8 +36661,8 @@
         </p:nvSpPr>
         <p:spPr>
           <a:xfrm>
-            <a:off x="10591920" y="5867280"/>
-            <a:ext cx="151920" cy="151920"/>
+            <a:off x="10592640" y="5867280"/>
+            <a:ext cx="151560" cy="151560"/>
           </a:xfrm>
           <a:custGeom>
             <a:avLst/>
@@ -36858,8 +36712,8 @@
         </p:nvSpPr>
         <p:spPr>
           <a:xfrm>
-            <a:off x="10896480" y="5867280"/>
-            <a:ext cx="151920" cy="151920"/>
+            <a:off x="10897200" y="5867280"/>
+            <a:ext cx="151560" cy="151560"/>
           </a:xfrm>
           <a:custGeom>
             <a:avLst/>
@@ -36909,8 +36763,8 @@
         </p:nvSpPr>
         <p:spPr>
           <a:xfrm>
-            <a:off x="11201400" y="5867280"/>
-            <a:ext cx="151920" cy="151920"/>
+            <a:off x="11202120" y="5867280"/>
+            <a:ext cx="151560" cy="151560"/>
           </a:xfrm>
           <a:custGeom>
             <a:avLst/>
@@ -36993,7 +36847,7 @@
         <p:spPr>
           <a:xfrm>
             <a:off x="0" y="0"/>
-            <a:ext cx="12191760" cy="6858360"/>
+            <a:ext cx="12192480" cy="6858000"/>
           </a:xfrm>
           <a:custGeom>
             <a:avLst/>
@@ -37056,7 +36910,7 @@
         <p:spPr>
           <a:xfrm>
             <a:off x="379080" y="379080"/>
-            <a:ext cx="11661120" cy="454320"/>
+            <a:ext cx="11661840" cy="453960"/>
           </a:xfrm>
           <a:prstGeom prst="rect">
             <a:avLst/>
@@ -37108,7 +36962,7 @@
         <p:spPr>
           <a:xfrm>
             <a:off x="379080" y="947160"/>
-            <a:ext cx="11547360" cy="302760"/>
+            <a:ext cx="11548080" cy="302400"/>
           </a:xfrm>
           <a:prstGeom prst="rect">
             <a:avLst/>
@@ -37160,7 +37014,7 @@
         <p:spPr>
           <a:xfrm>
             <a:off x="379080" y="1364040"/>
-            <a:ext cx="909000" cy="37440"/>
+            <a:ext cx="908640" cy="37080"/>
           </a:xfrm>
           <a:custGeom>
             <a:avLst/>
@@ -37211,7 +37065,7 @@
         <p:spPr>
           <a:xfrm>
             <a:off x="393120" y="1567800"/>
-            <a:ext cx="4452120" cy="4234320"/>
+            <a:ext cx="4452120" cy="4233960"/>
           </a:xfrm>
           <a:custGeom>
             <a:avLst/>
@@ -37267,7 +37121,7 @@
         <p:spPr>
           <a:xfrm>
             <a:off x="559080" y="1733760"/>
-            <a:ext cx="4120560" cy="2121480"/>
+            <a:ext cx="4120560" cy="2121120"/>
           </a:xfrm>
           <a:prstGeom prst="roundRect">
             <a:avLst>
@@ -37299,7 +37153,7 @@
         <p:spPr>
           <a:xfrm>
             <a:off x="416880" y="3969360"/>
-            <a:ext cx="4404600" cy="568080"/>
+            <a:ext cx="4404600" cy="567720"/>
           </a:xfrm>
           <a:prstGeom prst="rect">
             <a:avLst/>
@@ -37351,7 +37205,7 @@
         <p:spPr>
           <a:xfrm>
             <a:off x="511560" y="4613400"/>
-            <a:ext cx="4215240" cy="264960"/>
+            <a:ext cx="4215240" cy="264600"/>
           </a:xfrm>
           <a:prstGeom prst="rect">
             <a:avLst/>
@@ -37403,7 +37257,7 @@
         <p:spPr>
           <a:xfrm>
             <a:off x="520920" y="4954320"/>
-            <a:ext cx="4196160" cy="227160"/>
+            <a:ext cx="4196160" cy="226800"/>
           </a:xfrm>
           <a:prstGeom prst="rect">
             <a:avLst/>
@@ -37457,7 +37311,7 @@
         <p:spPr>
           <a:xfrm>
             <a:off x="393120" y="5982480"/>
-            <a:ext cx="4452120" cy="861840"/>
+            <a:ext cx="4452120" cy="861480"/>
           </a:xfrm>
           <a:custGeom>
             <a:avLst/>
@@ -37513,7 +37367,7 @@
         <p:spPr>
           <a:xfrm>
             <a:off x="516240" y="6148080"/>
-            <a:ext cx="4205880" cy="264960"/>
+            <a:ext cx="4205880" cy="264600"/>
           </a:xfrm>
           <a:prstGeom prst="rect">
             <a:avLst/>
@@ -37575,7 +37429,7 @@
         <p:spPr>
           <a:xfrm>
             <a:off x="516240" y="6413400"/>
-            <a:ext cx="4205880" cy="264960"/>
+            <a:ext cx="4205880" cy="264600"/>
           </a:xfrm>
           <a:prstGeom prst="rect">
             <a:avLst/>
@@ -37636,8 +37490,8 @@
         </p:nvSpPr>
         <p:spPr>
           <a:xfrm>
-            <a:off x="5103720" y="1567800"/>
-            <a:ext cx="6697080" cy="2045880"/>
+            <a:off x="5104080" y="1567800"/>
+            <a:ext cx="6697440" cy="2045520"/>
           </a:xfrm>
           <a:custGeom>
             <a:avLst/>
@@ -37692,8 +37546,8 @@
         </p:nvSpPr>
         <p:spPr>
           <a:xfrm>
-            <a:off x="5307120" y="1771560"/>
-            <a:ext cx="6403680" cy="302760"/>
+            <a:off x="5307480" y="1771560"/>
+            <a:ext cx="6404040" cy="302400"/>
           </a:xfrm>
           <a:prstGeom prst="rect">
             <a:avLst/>
@@ -37744,8 +37598,8 @@
         </p:nvSpPr>
         <p:spPr>
           <a:xfrm>
-            <a:off x="5307120" y="2188440"/>
-            <a:ext cx="6375240" cy="558720"/>
+            <a:off x="5307480" y="2188440"/>
+            <a:ext cx="6375600" cy="558360"/>
           </a:xfrm>
           <a:prstGeom prst="rect">
             <a:avLst/>
@@ -37816,8 +37670,8 @@
         </p:nvSpPr>
         <p:spPr>
           <a:xfrm>
-            <a:off x="5307120" y="2856240"/>
-            <a:ext cx="6375240" cy="558720"/>
+            <a:off x="5307480" y="2856240"/>
+            <a:ext cx="6375600" cy="558360"/>
           </a:xfrm>
           <a:prstGeom prst="rect">
             <a:avLst/>
@@ -37888,8 +37742,8 @@
         </p:nvSpPr>
         <p:spPr>
           <a:xfrm>
-            <a:off x="5103720" y="3794040"/>
-            <a:ext cx="6697080" cy="2045880"/>
+            <a:off x="5104080" y="3794040"/>
+            <a:ext cx="6697440" cy="2045520"/>
           </a:xfrm>
           <a:custGeom>
             <a:avLst/>
@@ -37944,8 +37798,8 @@
         </p:nvSpPr>
         <p:spPr>
           <a:xfrm>
-            <a:off x="5307120" y="3997800"/>
-            <a:ext cx="6403680" cy="302760"/>
+            <a:off x="5307480" y="3997800"/>
+            <a:ext cx="6404040" cy="302400"/>
           </a:xfrm>
           <a:prstGeom prst="rect">
             <a:avLst/>
@@ -37996,8 +37850,8 @@
         </p:nvSpPr>
         <p:spPr>
           <a:xfrm>
-            <a:off x="5307120" y="4414680"/>
-            <a:ext cx="6375240" cy="558720"/>
+            <a:off x="5307480" y="4414680"/>
+            <a:ext cx="6375600" cy="558360"/>
           </a:xfrm>
           <a:prstGeom prst="rect">
             <a:avLst/>
@@ -38088,8 +37942,8 @@
         </p:nvSpPr>
         <p:spPr>
           <a:xfrm>
-            <a:off x="5307120" y="5082480"/>
-            <a:ext cx="6375240" cy="558720"/>
+            <a:off x="5307480" y="5082480"/>
+            <a:ext cx="6375600" cy="558360"/>
           </a:xfrm>
           <a:prstGeom prst="rect">
             <a:avLst/>
@@ -38160,8 +38014,8 @@
         </p:nvSpPr>
         <p:spPr>
           <a:xfrm>
-            <a:off x="5099040" y="6015600"/>
-            <a:ext cx="2149920" cy="833400"/>
+            <a:off x="5099400" y="6015600"/>
+            <a:ext cx="2149920" cy="833040"/>
           </a:xfrm>
           <a:custGeom>
             <a:avLst/>
@@ -38216,8 +38070,8 @@
         </p:nvSpPr>
         <p:spPr>
           <a:xfrm>
-            <a:off x="6068160" y="6138720"/>
-            <a:ext cx="212760" cy="283680"/>
+            <a:off x="6068520" y="6138720"/>
+            <a:ext cx="212400" cy="283320"/>
           </a:xfrm>
           <a:custGeom>
             <a:avLst/>
@@ -38363,8 +38217,8 @@
         </p:nvSpPr>
         <p:spPr>
           <a:xfrm>
-            <a:off x="5184000" y="6498720"/>
-            <a:ext cx="1979640" cy="227160"/>
+            <a:off x="5184360" y="6498720"/>
+            <a:ext cx="1979280" cy="226800"/>
           </a:xfrm>
           <a:prstGeom prst="rect">
             <a:avLst/>
@@ -38415,8 +38269,8 @@
         </p:nvSpPr>
         <p:spPr>
           <a:xfrm>
-            <a:off x="7378200" y="6015600"/>
-            <a:ext cx="2149920" cy="833400"/>
+            <a:off x="7378560" y="6015600"/>
+            <a:ext cx="2149920" cy="833040"/>
           </a:xfrm>
           <a:custGeom>
             <a:avLst/>
@@ -38471,8 +38325,8 @@
         </p:nvSpPr>
         <p:spPr>
           <a:xfrm>
-            <a:off x="8276400" y="6138720"/>
-            <a:ext cx="354960" cy="283680"/>
+            <a:off x="8277120" y="6138720"/>
+            <a:ext cx="354600" cy="283320"/>
           </a:xfrm>
           <a:custGeom>
             <a:avLst/>
@@ -38687,8 +38541,8 @@
         </p:nvSpPr>
         <p:spPr>
           <a:xfrm>
-            <a:off x="7463520" y="6498720"/>
-            <a:ext cx="1979640" cy="227160"/>
+            <a:off x="7463880" y="6498720"/>
+            <a:ext cx="1979280" cy="226800"/>
           </a:xfrm>
           <a:prstGeom prst="rect">
             <a:avLst/>
@@ -38739,8 +38593,8 @@
         </p:nvSpPr>
         <p:spPr>
           <a:xfrm>
-            <a:off x="9657720" y="6015600"/>
-            <a:ext cx="2149920" cy="833400"/>
+            <a:off x="9658440" y="6015600"/>
+            <a:ext cx="2149920" cy="833040"/>
           </a:xfrm>
           <a:custGeom>
             <a:avLst/>
@@ -38795,8 +38649,8 @@
         </p:nvSpPr>
         <p:spPr>
           <a:xfrm>
-            <a:off x="10591560" y="6138720"/>
-            <a:ext cx="283680" cy="283680"/>
+            <a:off x="10592280" y="6138720"/>
+            <a:ext cx="283320" cy="283320"/>
           </a:xfrm>
           <a:custGeom>
             <a:avLst/>
@@ -38972,8 +38826,8 @@
         </p:nvSpPr>
         <p:spPr>
           <a:xfrm>
-            <a:off x="9743040" y="6498720"/>
-            <a:ext cx="1979640" cy="227160"/>
+            <a:off x="9743760" y="6498720"/>
+            <a:ext cx="1979280" cy="226800"/>
           </a:xfrm>
           <a:prstGeom prst="rect">
             <a:avLst/>
@@ -39057,7 +38911,7 @@
         <p:spPr>
           <a:xfrm>
             <a:off x="0" y="0"/>
-            <a:ext cx="12191760" cy="6857640"/>
+            <a:ext cx="12192480" cy="6857280"/>
           </a:xfrm>
           <a:custGeom>
             <a:avLst/>
@@ -39120,7 +38974,7 @@
         <p:spPr>
           <a:xfrm>
             <a:off x="334800" y="334800"/>
-            <a:ext cx="11722680" cy="401400"/>
+            <a:ext cx="11723400" cy="401040"/>
           </a:xfrm>
           <a:prstGeom prst="rect">
             <a:avLst/>
@@ -39172,7 +39026,7 @@
         <p:spPr>
           <a:xfrm>
             <a:off x="334800" y="837360"/>
-            <a:ext cx="11622240" cy="267480"/>
+            <a:ext cx="11622960" cy="267120"/>
           </a:xfrm>
           <a:prstGeom prst="rect">
             <a:avLst/>
@@ -39224,7 +39078,7 @@
         <p:spPr>
           <a:xfrm>
             <a:off x="334800" y="1205640"/>
-            <a:ext cx="803520" cy="33120"/>
+            <a:ext cx="803160" cy="32760"/>
           </a:xfrm>
           <a:custGeom>
             <a:avLst/>
@@ -39275,7 +39129,7 @@
         <p:spPr>
           <a:xfrm>
             <a:off x="347400" y="1386000"/>
-            <a:ext cx="5065560" cy="4320360"/>
+            <a:ext cx="5065560" cy="4320000"/>
           </a:xfrm>
           <a:custGeom>
             <a:avLst/>
@@ -39331,7 +39185,7 @@
         <p:spPr>
           <a:xfrm>
             <a:off x="493920" y="1532520"/>
-            <a:ext cx="4772520" cy="1741320"/>
+            <a:ext cx="4772520" cy="1740960"/>
           </a:xfrm>
           <a:prstGeom prst="roundRect">
             <a:avLst>
@@ -39363,7 +39217,7 @@
         <p:spPr>
           <a:xfrm>
             <a:off x="368280" y="3374640"/>
-            <a:ext cx="5023800" cy="502200"/>
+            <a:ext cx="5023800" cy="501840"/>
           </a:xfrm>
           <a:prstGeom prst="rect">
             <a:avLst/>
@@ -39415,7 +39269,7 @@
         <p:spPr>
           <a:xfrm>
             <a:off x="452160" y="3943800"/>
-            <a:ext cx="4856400" cy="234000"/>
+            <a:ext cx="4856400" cy="233640"/>
           </a:xfrm>
           <a:prstGeom prst="rect">
             <a:avLst/>
@@ -39467,7 +39321,7 @@
         <p:spPr>
           <a:xfrm>
             <a:off x="460440" y="4245480"/>
-            <a:ext cx="4839480" cy="200520"/>
+            <a:ext cx="4839480" cy="200160"/>
           </a:xfrm>
           <a:prstGeom prst="rect">
             <a:avLst/>
@@ -39521,7 +39375,7 @@
         <p:spPr>
           <a:xfrm>
             <a:off x="347400" y="5867640"/>
-            <a:ext cx="5065560" cy="761760"/>
+            <a:ext cx="5065560" cy="761400"/>
           </a:xfrm>
           <a:custGeom>
             <a:avLst/>
@@ -39577,7 +39431,7 @@
         <p:spPr>
           <a:xfrm>
             <a:off x="456480" y="6014520"/>
-            <a:ext cx="4848120" cy="234000"/>
+            <a:ext cx="4848120" cy="233640"/>
           </a:xfrm>
           <a:prstGeom prst="rect">
             <a:avLst/>
@@ -39639,7 +39493,7 @@
         <p:spPr>
           <a:xfrm>
             <a:off x="456480" y="6248880"/>
-            <a:ext cx="4848120" cy="234000"/>
+            <a:ext cx="4848120" cy="233640"/>
           </a:xfrm>
           <a:prstGeom prst="rect">
             <a:avLst/>
@@ -39700,8 +39554,8 @@
         </p:nvSpPr>
         <p:spPr>
           <a:xfrm>
-            <a:off x="5643000" y="1386000"/>
-            <a:ext cx="6204600" cy="1808280"/>
+            <a:off x="5643360" y="1386000"/>
+            <a:ext cx="6204960" cy="1807920"/>
           </a:xfrm>
           <a:custGeom>
             <a:avLst/>
@@ -39756,8 +39610,8 @@
         </p:nvSpPr>
         <p:spPr>
           <a:xfrm>
-            <a:off x="5823000" y="1566000"/>
-            <a:ext cx="5945040" cy="267480"/>
+            <a:off x="5823360" y="1566000"/>
+            <a:ext cx="5945040" cy="267120"/>
           </a:xfrm>
           <a:prstGeom prst="rect">
             <a:avLst/>
@@ -39808,8 +39662,8 @@
         </p:nvSpPr>
         <p:spPr>
           <a:xfrm>
-            <a:off x="5823000" y="1934280"/>
-            <a:ext cx="5919840" cy="493560"/>
+            <a:off x="5823360" y="1934280"/>
+            <a:ext cx="5919840" cy="493200"/>
           </a:xfrm>
           <a:prstGeom prst="rect">
             <a:avLst/>
@@ -39900,8 +39754,8 @@
         </p:nvSpPr>
         <p:spPr>
           <a:xfrm>
-            <a:off x="5823000" y="2524680"/>
-            <a:ext cx="5919840" cy="493560"/>
+            <a:off x="5823360" y="2524680"/>
+            <a:ext cx="5919840" cy="493200"/>
           </a:xfrm>
           <a:prstGeom prst="rect">
             <a:avLst/>
@@ -39972,8 +39826,8 @@
         </p:nvSpPr>
         <p:spPr>
           <a:xfrm>
-            <a:off x="5643000" y="3353760"/>
-            <a:ext cx="6204600" cy="2051280"/>
+            <a:off x="5643360" y="3353760"/>
+            <a:ext cx="6204960" cy="2050920"/>
           </a:xfrm>
           <a:custGeom>
             <a:avLst/>
@@ -40028,8 +39882,8 @@
         </p:nvSpPr>
         <p:spPr>
           <a:xfrm>
-            <a:off x="5823000" y="3533760"/>
-            <a:ext cx="5945040" cy="267480"/>
+            <a:off x="5823360" y="3533760"/>
+            <a:ext cx="5945040" cy="267120"/>
           </a:xfrm>
           <a:prstGeom prst="rect">
             <a:avLst/>
@@ -40080,8 +39934,8 @@
         </p:nvSpPr>
         <p:spPr>
           <a:xfrm>
-            <a:off x="5823000" y="3902040"/>
-            <a:ext cx="5919840" cy="736560"/>
+            <a:off x="5823360" y="3902040"/>
+            <a:ext cx="5919840" cy="736200"/>
           </a:xfrm>
           <a:prstGeom prst="rect">
             <a:avLst/>
@@ -40152,8 +40006,8 @@
         </p:nvSpPr>
         <p:spPr>
           <a:xfrm>
-            <a:off x="5823000" y="4737240"/>
-            <a:ext cx="5919840" cy="493560"/>
+            <a:off x="5823360" y="4737240"/>
+            <a:ext cx="5919840" cy="493200"/>
           </a:xfrm>
           <a:prstGeom prst="rect">
             <a:avLst/>
@@ -40214,8 +40068,8 @@
         </p:nvSpPr>
         <p:spPr>
           <a:xfrm>
-            <a:off x="5643000" y="5566320"/>
-            <a:ext cx="6204600" cy="1063080"/>
+            <a:off x="5643360" y="5566320"/>
+            <a:ext cx="6204960" cy="1062720"/>
           </a:xfrm>
           <a:custGeom>
             <a:avLst/>
@@ -40270,8 +40124,8 @@
         </p:nvSpPr>
         <p:spPr>
           <a:xfrm>
-            <a:off x="5789520" y="5712840"/>
-            <a:ext cx="5995080" cy="234000"/>
+            <a:off x="5789880" y="5712840"/>
+            <a:ext cx="5995080" cy="233640"/>
           </a:xfrm>
           <a:prstGeom prst="rect">
             <a:avLst/>
@@ -40322,8 +40176,8 @@
         </p:nvSpPr>
         <p:spPr>
           <a:xfrm>
-            <a:off x="5789520" y="6048000"/>
-            <a:ext cx="5978520" cy="435240"/>
+            <a:off x="5789880" y="6048000"/>
+            <a:ext cx="5978520" cy="434880"/>
           </a:xfrm>
           <a:prstGeom prst="rect">
             <a:avLst/>
